--- a/documents/Presentations/Room_Server_Soutenance.pptx
+++ b/documents/Presentations/Room_Server_Soutenance.pptx
@@ -69,33 +69,24 @@
           </a:bodyPr>
           <a:p>
             <a:r>
-              <a:rPr b="0" lang="fr-FR" sz="1800" spc="-1" strike="noStrike">
+              <a:rPr b="0" lang="en-US" sz="1800" spc="-1" strike="noStrike">
                 <a:solidFill>
                   <a:schemeClr val="dk1"/>
                 </a:solidFill>
                 <a:latin typeface="Aptos"/>
               </a:rPr>
-              <a:t>Cliquez pour </a:t>
+              <a:t>Click to move </a:t>
             </a:r>
             <a:r>
-              <a:rPr b="0" lang="fr-FR" sz="1800" spc="-1" strike="noStrike">
+              <a:rPr b="0" lang="en-US" sz="1800" spc="-1" strike="noStrike">
                 <a:solidFill>
                   <a:schemeClr val="dk1"/>
                 </a:solidFill>
                 <a:latin typeface="Aptos"/>
               </a:rPr>
-              <a:t>déplacer la </a:t>
+              <a:t>the slide</a:t>
             </a:r>
-            <a:r>
-              <a:rPr b="0" lang="fr-FR" sz="1800" spc="-1" strike="noStrike">
-                <a:solidFill>
-                  <a:schemeClr val="dk1"/>
-                </a:solidFill>
-                <a:latin typeface="Aptos"/>
-              </a:rPr>
-              <a:t>diapo</a:t>
-            </a:r>
-            <a:endParaRPr b="0" lang="fr-FR" sz="1800" spc="-1" strike="noStrike">
+            <a:endParaRPr b="0" lang="en-US" sz="1800" spc="-1" strike="noStrike">
               <a:solidFill>
                 <a:schemeClr val="dk1"/>
               </a:solidFill>
@@ -136,15 +127,33 @@
               <a:buNone/>
             </a:pPr>
             <a:r>
-              <a:rPr b="0" lang="fr-FR" sz="2000" spc="-1" strike="noStrike">
+              <a:rPr b="0" lang="en-US" sz="2000" spc="-1" strike="noStrike">
                 <a:solidFill>
                   <a:srgbClr val="000000"/>
                 </a:solidFill>
                 <a:latin typeface="Arial"/>
               </a:rPr>
-              <a:t>Cliquez pour modifier le format des notes</a:t>
+              <a:t>Click to edit </a:t>
             </a:r>
-            <a:endParaRPr b="0" lang="fr-FR" sz="2000" spc="-1" strike="noStrike">
+            <a:r>
+              <a:rPr b="0" lang="en-US" sz="2000" spc="-1" strike="noStrike">
+                <a:solidFill>
+                  <a:srgbClr val="000000"/>
+                </a:solidFill>
+                <a:latin typeface="Arial"/>
+              </a:rPr>
+              <a:t>the notes </a:t>
+            </a:r>
+            <a:r>
+              <a:rPr b="0" lang="en-US" sz="2000" spc="-1" strike="noStrike">
+                <a:solidFill>
+                  <a:srgbClr val="000000"/>
+                </a:solidFill>
+                <a:latin typeface="Arial"/>
+              </a:rPr>
+              <a:t>format</a:t>
+            </a:r>
+            <a:endParaRPr b="0" lang="en-US" sz="2000" spc="-1" strike="noStrike">
               <a:solidFill>
                 <a:srgbClr val="000000"/>
               </a:solidFill>
@@ -185,15 +194,15 @@
               <a:buNone/>
             </a:pPr>
             <a:r>
-              <a:rPr b="0" lang="fr-FR" sz="1400" spc="-1" strike="noStrike">
+              <a:rPr b="0" lang="en-US" sz="1400" spc="-1" strike="noStrike">
                 <a:solidFill>
                   <a:srgbClr val="000000"/>
                 </a:solidFill>
                 <a:latin typeface="Times New Roman"/>
               </a:rPr>
-              <a:t>&lt;en-tête&gt;</a:t>
+              <a:t>&lt;header&gt;</a:t>
             </a:r>
-            <a:endParaRPr b="0" lang="fr-FR" sz="1400" spc="-1" strike="noStrike">
+            <a:endParaRPr b="0" lang="en-US" sz="1400" spc="-1" strike="noStrike">
               <a:solidFill>
                 <a:srgbClr val="000000"/>
               </a:solidFill>
@@ -232,7 +241,7 @@
           <a:lstStyle>
             <a:lvl1pPr indent="0" algn="r">
               <a:buNone/>
-              <a:defRPr b="0" lang="fr-FR" sz="1400" spc="-1" strike="noStrike">
+              <a:defRPr b="0" lang="en-US" sz="1400" spc="-1" strike="noStrike">
                 <a:solidFill>
                   <a:srgbClr val="000000"/>
                 </a:solidFill>
@@ -245,15 +254,15 @@
               <a:buNone/>
             </a:pPr>
             <a:r>
-              <a:rPr b="0" lang="fr-FR" sz="1400" spc="-1" strike="noStrike">
+              <a:rPr b="0" lang="en-US" sz="1400" spc="-1" strike="noStrike">
                 <a:solidFill>
                   <a:srgbClr val="000000"/>
                 </a:solidFill>
                 <a:latin typeface="Times New Roman"/>
               </a:rPr>
-              <a:t>&lt;date/heure&gt;</a:t>
+              <a:t>&lt;date/time&gt;</a:t>
             </a:r>
-            <a:endParaRPr b="0" lang="fr-FR" sz="1400" spc="-1" strike="noStrike">
+            <a:endParaRPr b="0" lang="en-US" sz="1400" spc="-1" strike="noStrike">
               <a:solidFill>
                 <a:srgbClr val="000000"/>
               </a:solidFill>
@@ -292,7 +301,7 @@
           <a:lstStyle>
             <a:lvl1pPr indent="0">
               <a:buNone/>
-              <a:defRPr b="0" lang="fr-FR" sz="1400" spc="-1" strike="noStrike">
+              <a:defRPr b="0" lang="en-US" sz="1400" spc="-1" strike="noStrike">
                 <a:solidFill>
                   <a:srgbClr val="000000"/>
                 </a:solidFill>
@@ -305,15 +314,15 @@
               <a:buNone/>
             </a:pPr>
             <a:r>
-              <a:rPr b="0" lang="fr-FR" sz="1400" spc="-1" strike="noStrike">
+              <a:rPr b="0" lang="en-US" sz="1400" spc="-1" strike="noStrike">
                 <a:solidFill>
                   <a:srgbClr val="000000"/>
                 </a:solidFill>
                 <a:latin typeface="Times New Roman"/>
               </a:rPr>
-              <a:t>&lt;pied de page&gt;</a:t>
+              <a:t>&lt;footer&gt;</a:t>
             </a:r>
-            <a:endParaRPr b="0" lang="fr-FR" sz="1400" spc="-1" strike="noStrike">
+            <a:endParaRPr b="0" lang="en-US" sz="1400" spc="-1" strike="noStrike">
               <a:solidFill>
                 <a:srgbClr val="000000"/>
               </a:solidFill>
@@ -352,7 +361,7 @@
           <a:lstStyle>
             <a:lvl1pPr indent="0" algn="r">
               <a:buNone/>
-              <a:defRPr b="0" lang="fr-FR" sz="1400" spc="-1" strike="noStrike">
+              <a:defRPr b="0" lang="en-US" sz="1400" spc="-1" strike="noStrike">
                 <a:solidFill>
                   <a:srgbClr val="000000"/>
                 </a:solidFill>
@@ -364,16 +373,16 @@
             <a:pPr indent="0" algn="r">
               <a:buNone/>
             </a:pPr>
-            <a:fld id="{CC973804-7D39-4B95-81C3-CAD9B63D237E}" type="slidenum">
-              <a:rPr b="0" lang="fr-FR" sz="1400" spc="-1" strike="noStrike">
+            <a:fld id="{E68DDCD0-E20F-4C55-8083-B8A5F02CD481}" type="slidenum">
+              <a:rPr b="0" lang="en-US" sz="1400" spc="-1" strike="noStrike">
                 <a:solidFill>
                   <a:srgbClr val="000000"/>
                 </a:solidFill>
                 <a:latin typeface="Times New Roman"/>
               </a:rPr>
-              <a:t>&lt;numéro&gt;</a:t>
+              <a:t>&lt;number&gt;</a:t>
             </a:fld>
-            <a:endParaRPr b="0" lang="fr-FR" sz="1400" spc="-1" strike="noStrike">
+            <a:endParaRPr b="0" lang="en-US" sz="1400" spc="-1" strike="noStrike">
               <a:solidFill>
                 <a:srgbClr val="000000"/>
               </a:solidFill>
@@ -407,7 +416,7 @@
       </p:grpSpPr>
       <p:sp>
         <p:nvSpPr>
-          <p:cNvPr id="140" name="PlaceHolder 1"/>
+          <p:cNvPr id="146" name="PlaceHolder 1"/>
           <p:cNvSpPr>
             <a:spLocks noGrp="1"/>
           </p:cNvSpPr>
@@ -430,7 +439,7 @@
       </p:sp>
       <p:sp>
         <p:nvSpPr>
-          <p:cNvPr id="141" name="PlaceHolder 2"/>
+          <p:cNvPr id="147" name="PlaceHolder 2"/>
           <p:cNvSpPr>
             <a:spLocks noGrp="1"/>
           </p:cNvSpPr>
@@ -441,7 +450,7 @@
         <p:spPr>
           <a:xfrm>
             <a:off x="685800" y="4400640"/>
-            <a:ext cx="5486040" cy="3600000"/>
+            <a:ext cx="5485680" cy="3599640"/>
           </a:xfrm>
           <a:prstGeom prst="rect">
             <a:avLst/>
@@ -457,9 +466,15 @@
           </a:bodyPr>
           <a:p>
             <a:pPr marL="216000" indent="-216000">
+              <a:lnSpc>
+                <a:spcPct val="100000"/>
+              </a:lnSpc>
               <a:buNone/>
-            </a:pPr>
-            <a:endParaRPr b="0" lang="fr-FR" sz="2000" spc="-1" strike="noStrike">
+              <a:tabLst>
+                <a:tab algn="l" pos="0"/>
+              </a:tabLst>
+            </a:pPr>
+            <a:endParaRPr b="0" lang="en-US" sz="2000" spc="-1" strike="noStrike">
               <a:solidFill>
                 <a:srgbClr val="000000"/>
               </a:solidFill>
@@ -468,7 +483,13 @@
           </a:p>
           <a:p>
             <a:pPr marL="216000" indent="-216000">
+              <a:lnSpc>
+                <a:spcPct val="100000"/>
+              </a:lnSpc>
               <a:buNone/>
+              <a:tabLst>
+                <a:tab algn="l" pos="0"/>
+              </a:tabLst>
             </a:pPr>
             <a:r>
               <a:rPr b="0" lang="en-US" sz="2000" spc="-1" strike="noStrike">
@@ -479,7 +500,7 @@
               </a:rPr>
               <a:t>[Sources]</a:t>
             </a:r>
-            <a:endParaRPr b="0" lang="fr-FR" sz="2000" spc="-1" strike="noStrike">
+            <a:endParaRPr b="0" lang="en-US" sz="2000" spc="-1" strike="noStrike">
               <a:solidFill>
                 <a:srgbClr val="000000"/>
               </a:solidFill>
@@ -488,7 +509,13 @@
           </a:p>
           <a:p>
             <a:pPr marL="216000" indent="-216000">
+              <a:lnSpc>
+                <a:spcPct val="100000"/>
+              </a:lnSpc>
               <a:buNone/>
+              <a:tabLst>
+                <a:tab algn="l" pos="0"/>
+              </a:tabLst>
             </a:pPr>
             <a:r>
               <a:rPr b="0" lang="en-US" sz="2000" spc="-1" strike="noStrike">
@@ -497,8 +524,25 @@
                 </a:solidFill>
                 <a:latin typeface="Arial"/>
               </a:rPr>
-              <a:t>- Final report provided by </a:t>
+              <a:t>- Final report provided by the user: project title page, abstract, sections 2, 6, 7, 8, 9, 10.</a:t>
             </a:r>
+            <a:endParaRPr b="0" lang="en-US" sz="2000" spc="-1" strike="noStrike">
+              <a:solidFill>
+                <a:srgbClr val="000000"/>
+              </a:solidFill>
+              <a:latin typeface="Arial"/>
+            </a:endParaRPr>
+          </a:p>
+          <a:p>
+            <a:pPr marL="216000" indent="0">
+              <a:lnSpc>
+                <a:spcPct val="100000"/>
+              </a:lnSpc>
+              <a:buNone/>
+              <a:tabLst>
+                <a:tab algn="l" pos="0"/>
+              </a:tabLst>
+            </a:pPr>
             <a:r>
               <a:rPr b="0" lang="en-US" sz="2000" spc="-1" strike="noStrike">
                 <a:solidFill>
@@ -506,61 +550,20 @@
                 </a:solidFill>
                 <a:latin typeface="Arial"/>
               </a:rPr>
-              <a:t>the user: project title </a:t>
-            </a:r>
-            <a:r>
-              <a:rPr b="0" lang="en-US" sz="2000" spc="-1" strike="noStrike">
-                <a:solidFill>
-                  <a:srgbClr val="000000"/>
-                </a:solidFill>
-                <a:latin typeface="Arial"/>
-              </a:rPr>
-              <a:t>page, abstract, sections </a:t>
-            </a:r>
-            <a:r>
-              <a:rPr b="0" lang="en-US" sz="2000" spc="-1" strike="noStrike">
-                <a:solidFill>
-                  <a:srgbClr val="000000"/>
-                </a:solidFill>
-                <a:latin typeface="Arial"/>
-              </a:rPr>
-              <a:t>2, 6, 7, 8, 9, 10.</a:t>
-            </a:r>
-            <a:endParaRPr b="0" lang="fr-FR" sz="2000" spc="-1" strike="noStrike">
-              <a:solidFill>
-                <a:srgbClr val="000000"/>
-              </a:solidFill>
-              <a:latin typeface="Arial"/>
-            </a:endParaRPr>
-          </a:p>
-          <a:p>
-            <a:pPr marL="216000" indent="0">
-              <a:lnSpc>
-                <a:spcPct val="100000"/>
-              </a:lnSpc>
-              <a:buNone/>
-            </a:pPr>
-            <a:r>
-              <a:rPr b="0" lang="en-US" sz="2000" spc="-1" strike="noStrike">
-                <a:solidFill>
-                  <a:srgbClr val="000000"/>
-                </a:solidFill>
-                <a:latin typeface="Arial"/>
-              </a:rPr>
               <a:t>[/Sources]</a:t>
             </a:r>
-            <a:endParaRPr b="0" lang="fr-FR" sz="2000" spc="-1" strike="noStrike">
-              <a:solidFill>
-                <a:srgbClr val="000000"/>
-              </a:solidFill>
-              <a:latin typeface="Arial"/>
-            </a:endParaRPr>
-          </a:p>
-        </p:txBody>
-      </p:sp>
-      <p:sp>
-        <p:nvSpPr>
-          <p:cNvPr id="142" name="PlaceHolder 3"/>
+            <a:endParaRPr b="0" lang="en-US" sz="2000" spc="-1" strike="noStrike">
+              <a:solidFill>
+                <a:srgbClr val="000000"/>
+              </a:solidFill>
+              <a:latin typeface="Arial"/>
+            </a:endParaRPr>
+          </a:p>
+        </p:txBody>
+      </p:sp>
+      <p:sp>
+        <p:nvSpPr>
+          <p:cNvPr id="148" name="PlaceHolder 3"/>
           <p:cNvSpPr>
             <a:spLocks noGrp="1"/>
           </p:cNvSpPr>
@@ -571,7 +574,7 @@
         <p:spPr>
           <a:xfrm>
             <a:off x="3884760" y="8685360"/>
-            <a:ext cx="2971440" cy="458280"/>
+            <a:ext cx="2971080" cy="457920"/>
           </a:xfrm>
           <a:prstGeom prst="rect">
             <a:avLst/>
@@ -591,6 +594,9 @@
                 <a:spcPct val="100000"/>
               </a:lnSpc>
               <a:buNone/>
+              <a:tabLst>
+                <a:tab algn="l" pos="0"/>
+              </a:tabLst>
               <a:defRPr b="0" lang="en-US" sz="1200" spc="-1" strike="noStrike">
                 <a:solidFill>
                   <a:schemeClr val="dk1"/>
@@ -606,8 +612,11 @@
                 <a:spcPct val="100000"/>
               </a:lnSpc>
               <a:buNone/>
-            </a:pPr>
-            <a:fld id="{76456AE7-5ABE-490C-97A4-5BAE96174EB4}" type="slidenum">
+              <a:tabLst>
+                <a:tab algn="l" pos="0"/>
+              </a:tabLst>
+            </a:pPr>
+            <a:fld id="{2FDC0AC9-ECA4-4903-B9B4-D841B4E7AEDC}" type="slidenum">
               <a:rPr b="0" lang="en-US" sz="1200" spc="-1" strike="noStrike">
                 <a:solidFill>
                   <a:schemeClr val="dk1"/>
@@ -615,9 +624,9 @@
                 <a:latin typeface="+mn-lt"/>
                 <a:ea typeface="+mn-ea"/>
               </a:rPr>
-              <a:t>&lt;numéro&gt;</a:t>
+              <a:t>&lt;number&gt;</a:t>
             </a:fld>
-            <a:endParaRPr b="0" lang="fr-FR" sz="1200" spc="-1" strike="noStrike">
+            <a:endParaRPr b="0" lang="en-US" sz="1200" spc="-1" strike="noStrike">
               <a:solidFill>
                 <a:srgbClr val="000000"/>
               </a:solidFill>
@@ -650,7 +659,7 @@
       </p:grpSpPr>
       <p:sp>
         <p:nvSpPr>
-          <p:cNvPr id="143" name="PlaceHolder 1"/>
+          <p:cNvPr id="149" name="PlaceHolder 1"/>
           <p:cNvSpPr>
             <a:spLocks noGrp="1"/>
           </p:cNvSpPr>
@@ -673,7 +682,7 @@
       </p:sp>
       <p:sp>
         <p:nvSpPr>
-          <p:cNvPr id="144" name="PlaceHolder 2"/>
+          <p:cNvPr id="150" name="PlaceHolder 2"/>
           <p:cNvSpPr>
             <a:spLocks noGrp="1"/>
           </p:cNvSpPr>
@@ -684,7 +693,7 @@
         <p:spPr>
           <a:xfrm>
             <a:off x="685800" y="4400640"/>
-            <a:ext cx="5486040" cy="3600000"/>
+            <a:ext cx="5485680" cy="3599640"/>
           </a:xfrm>
           <a:prstGeom prst="rect">
             <a:avLst/>
@@ -700,9 +709,15 @@
           </a:bodyPr>
           <a:p>
             <a:pPr marL="216000" indent="-216000">
+              <a:lnSpc>
+                <a:spcPct val="100000"/>
+              </a:lnSpc>
               <a:buNone/>
-            </a:pPr>
-            <a:endParaRPr b="0" lang="fr-FR" sz="2000" spc="-1" strike="noStrike">
+              <a:tabLst>
+                <a:tab algn="l" pos="0"/>
+              </a:tabLst>
+            </a:pPr>
+            <a:endParaRPr b="0" lang="en-US" sz="2000" spc="-1" strike="noStrike">
               <a:solidFill>
                 <a:srgbClr val="000000"/>
               </a:solidFill>
@@ -711,7 +726,13 @@
           </a:p>
           <a:p>
             <a:pPr marL="216000" indent="-216000">
+              <a:lnSpc>
+                <a:spcPct val="100000"/>
+              </a:lnSpc>
               <a:buNone/>
+              <a:tabLst>
+                <a:tab algn="l" pos="0"/>
+              </a:tabLst>
             </a:pPr>
             <a:r>
               <a:rPr b="0" lang="en-US" sz="2000" spc="-1" strike="noStrike">
@@ -722,7 +743,7 @@
               </a:rPr>
               <a:t>[Sources]</a:t>
             </a:r>
-            <a:endParaRPr b="0" lang="fr-FR" sz="2000" spc="-1" strike="noStrike">
+            <a:endParaRPr b="0" lang="en-US" sz="2000" spc="-1" strike="noStrike">
               <a:solidFill>
                 <a:srgbClr val="000000"/>
               </a:solidFill>
@@ -731,7 +752,13 @@
           </a:p>
           <a:p>
             <a:pPr marL="216000" indent="-216000">
+              <a:lnSpc>
+                <a:spcPct val="100000"/>
+              </a:lnSpc>
               <a:buNone/>
+              <a:tabLst>
+                <a:tab algn="l" pos="0"/>
+              </a:tabLst>
             </a:pPr>
             <a:r>
               <a:rPr b="0" lang="en-US" sz="2000" spc="-1" strike="noStrike">
@@ -740,8 +767,25 @@
                 </a:solidFill>
                 <a:latin typeface="Arial"/>
               </a:rPr>
-              <a:t>- Final report: sections 1, 2.1, </a:t>
+              <a:t>- Final report: sections 1, 2.1, 2.2, 2.3, 9.1, 10.</a:t>
             </a:r>
+            <a:endParaRPr b="0" lang="en-US" sz="2000" spc="-1" strike="noStrike">
+              <a:solidFill>
+                <a:srgbClr val="000000"/>
+              </a:solidFill>
+              <a:latin typeface="Arial"/>
+            </a:endParaRPr>
+          </a:p>
+          <a:p>
+            <a:pPr marL="216000" indent="0">
+              <a:lnSpc>
+                <a:spcPct val="100000"/>
+              </a:lnSpc>
+              <a:buNone/>
+              <a:tabLst>
+                <a:tab algn="l" pos="0"/>
+              </a:tabLst>
+            </a:pPr>
             <a:r>
               <a:rPr b="0" lang="en-US" sz="2000" spc="-1" strike="noStrike">
                 <a:solidFill>
@@ -749,43 +793,20 @@
                 </a:solidFill>
                 <a:latin typeface="Arial"/>
               </a:rPr>
-              <a:t>2.2, 2.3, 9.1, 10.</a:t>
-            </a:r>
-            <a:endParaRPr b="0" lang="fr-FR" sz="2000" spc="-1" strike="noStrike">
-              <a:solidFill>
-                <a:srgbClr val="000000"/>
-              </a:solidFill>
-              <a:latin typeface="Arial"/>
-            </a:endParaRPr>
-          </a:p>
-          <a:p>
-            <a:pPr marL="216000" indent="0">
-              <a:lnSpc>
-                <a:spcPct val="100000"/>
-              </a:lnSpc>
-              <a:buNone/>
-            </a:pPr>
-            <a:r>
-              <a:rPr b="0" lang="en-US" sz="2000" spc="-1" strike="noStrike">
-                <a:solidFill>
-                  <a:srgbClr val="000000"/>
-                </a:solidFill>
-                <a:latin typeface="Arial"/>
-              </a:rPr>
               <a:t>[/Sources]</a:t>
             </a:r>
-            <a:endParaRPr b="0" lang="fr-FR" sz="2000" spc="-1" strike="noStrike">
-              <a:solidFill>
-                <a:srgbClr val="000000"/>
-              </a:solidFill>
-              <a:latin typeface="Arial"/>
-            </a:endParaRPr>
-          </a:p>
-        </p:txBody>
-      </p:sp>
-      <p:sp>
-        <p:nvSpPr>
-          <p:cNvPr id="145" name="PlaceHolder 3"/>
+            <a:endParaRPr b="0" lang="en-US" sz="2000" spc="-1" strike="noStrike">
+              <a:solidFill>
+                <a:srgbClr val="000000"/>
+              </a:solidFill>
+              <a:latin typeface="Arial"/>
+            </a:endParaRPr>
+          </a:p>
+        </p:txBody>
+      </p:sp>
+      <p:sp>
+        <p:nvSpPr>
+          <p:cNvPr id="151" name="PlaceHolder 3"/>
           <p:cNvSpPr>
             <a:spLocks noGrp="1"/>
           </p:cNvSpPr>
@@ -796,7 +817,7 @@
         <p:spPr>
           <a:xfrm>
             <a:off x="3884760" y="8685360"/>
-            <a:ext cx="2971440" cy="458280"/>
+            <a:ext cx="2971080" cy="457920"/>
           </a:xfrm>
           <a:prstGeom prst="rect">
             <a:avLst/>
@@ -816,6 +837,9 @@
                 <a:spcPct val="100000"/>
               </a:lnSpc>
               <a:buNone/>
+              <a:tabLst>
+                <a:tab algn="l" pos="0"/>
+              </a:tabLst>
               <a:defRPr b="0" lang="en-US" sz="1200" spc="-1" strike="noStrike">
                 <a:solidFill>
                   <a:schemeClr val="dk1"/>
@@ -831,8 +855,11 @@
                 <a:spcPct val="100000"/>
               </a:lnSpc>
               <a:buNone/>
-            </a:pPr>
-            <a:fld id="{3B596BA9-0678-4154-B074-7E80ECE36251}" type="slidenum">
+              <a:tabLst>
+                <a:tab algn="l" pos="0"/>
+              </a:tabLst>
+            </a:pPr>
+            <a:fld id="{1599BE83-9AC4-4A83-BE91-57170B2ED819}" type="slidenum">
               <a:rPr b="0" lang="en-US" sz="1200" spc="-1" strike="noStrike">
                 <a:solidFill>
                   <a:schemeClr val="dk1"/>
@@ -840,9 +867,9 @@
                 <a:latin typeface="+mn-lt"/>
                 <a:ea typeface="+mn-ea"/>
               </a:rPr>
-              <a:t>&lt;numéro&gt;</a:t>
+              <a:t>&lt;number&gt;</a:t>
             </a:fld>
-            <a:endParaRPr b="0" lang="fr-FR" sz="1200" spc="-1" strike="noStrike">
+            <a:endParaRPr b="0" lang="en-US" sz="1200" spc="-1" strike="noStrike">
               <a:solidFill>
                 <a:srgbClr val="000000"/>
               </a:solidFill>
@@ -875,7 +902,7 @@
       </p:grpSpPr>
       <p:sp>
         <p:nvSpPr>
-          <p:cNvPr id="146" name="PlaceHolder 1"/>
+          <p:cNvPr id="152" name="PlaceHolder 1"/>
           <p:cNvSpPr>
             <a:spLocks noGrp="1"/>
           </p:cNvSpPr>
@@ -898,7 +925,7 @@
       </p:sp>
       <p:sp>
         <p:nvSpPr>
-          <p:cNvPr id="147" name="PlaceHolder 2"/>
+          <p:cNvPr id="153" name="PlaceHolder 2"/>
           <p:cNvSpPr>
             <a:spLocks noGrp="1"/>
           </p:cNvSpPr>
@@ -909,7 +936,7 @@
         <p:spPr>
           <a:xfrm>
             <a:off x="685800" y="4400640"/>
-            <a:ext cx="5486040" cy="3600000"/>
+            <a:ext cx="5485680" cy="3599640"/>
           </a:xfrm>
           <a:prstGeom prst="rect">
             <a:avLst/>
@@ -925,9 +952,15 @@
           </a:bodyPr>
           <a:p>
             <a:pPr marL="216000" indent="-216000">
+              <a:lnSpc>
+                <a:spcPct val="100000"/>
+              </a:lnSpc>
               <a:buNone/>
-            </a:pPr>
-            <a:endParaRPr b="0" lang="fr-FR" sz="2000" spc="-1" strike="noStrike">
+              <a:tabLst>
+                <a:tab algn="l" pos="0"/>
+              </a:tabLst>
+            </a:pPr>
+            <a:endParaRPr b="0" lang="en-US" sz="2000" spc="-1" strike="noStrike">
               <a:solidFill>
                 <a:srgbClr val="000000"/>
               </a:solidFill>
@@ -936,7 +969,13 @@
           </a:p>
           <a:p>
             <a:pPr marL="216000" indent="-216000">
+              <a:lnSpc>
+                <a:spcPct val="100000"/>
+              </a:lnSpc>
               <a:buNone/>
+              <a:tabLst>
+                <a:tab algn="l" pos="0"/>
+              </a:tabLst>
             </a:pPr>
             <a:r>
               <a:rPr b="0" lang="en-US" sz="2000" spc="-1" strike="noStrike">
@@ -947,7 +986,7 @@
               </a:rPr>
               <a:t>[Sources]</a:t>
             </a:r>
-            <a:endParaRPr b="0" lang="fr-FR" sz="2000" spc="-1" strike="noStrike">
+            <a:endParaRPr b="0" lang="en-US" sz="2000" spc="-1" strike="noStrike">
               <a:solidFill>
                 <a:srgbClr val="000000"/>
               </a:solidFill>
@@ -956,7 +995,13 @@
           </a:p>
           <a:p>
             <a:pPr marL="216000" indent="-216000">
+              <a:lnSpc>
+                <a:spcPct val="100000"/>
+              </a:lnSpc>
               <a:buNone/>
+              <a:tabLst>
+                <a:tab algn="l" pos="0"/>
+              </a:tabLst>
             </a:pPr>
             <a:r>
               <a:rPr b="0" lang="en-US" sz="2000" spc="-1" strike="noStrike">
@@ -965,8 +1010,25 @@
                 </a:solidFill>
                 <a:latin typeface="Arial"/>
               </a:rPr>
-              <a:t>- Final report: sections 2.2 </a:t>
+              <a:t>- Final report: sections 2.2 and 2.3.</a:t>
             </a:r>
+            <a:endParaRPr b="0" lang="en-US" sz="2000" spc="-1" strike="noStrike">
+              <a:solidFill>
+                <a:srgbClr val="000000"/>
+              </a:solidFill>
+              <a:latin typeface="Arial"/>
+            </a:endParaRPr>
+          </a:p>
+          <a:p>
+            <a:pPr marL="216000" indent="0">
+              <a:lnSpc>
+                <a:spcPct val="100000"/>
+              </a:lnSpc>
+              <a:buNone/>
+              <a:tabLst>
+                <a:tab algn="l" pos="0"/>
+              </a:tabLst>
+            </a:pPr>
             <a:r>
               <a:rPr b="0" lang="en-US" sz="2000" spc="-1" strike="noStrike">
                 <a:solidFill>
@@ -974,43 +1036,20 @@
                 </a:solidFill>
                 <a:latin typeface="Arial"/>
               </a:rPr>
-              <a:t>and 2.3.</a:t>
-            </a:r>
-            <a:endParaRPr b="0" lang="fr-FR" sz="2000" spc="-1" strike="noStrike">
-              <a:solidFill>
-                <a:srgbClr val="000000"/>
-              </a:solidFill>
-              <a:latin typeface="Arial"/>
-            </a:endParaRPr>
-          </a:p>
-          <a:p>
-            <a:pPr marL="216000" indent="0">
-              <a:lnSpc>
-                <a:spcPct val="100000"/>
-              </a:lnSpc>
-              <a:buNone/>
-            </a:pPr>
-            <a:r>
-              <a:rPr b="0" lang="en-US" sz="2000" spc="-1" strike="noStrike">
-                <a:solidFill>
-                  <a:srgbClr val="000000"/>
-                </a:solidFill>
-                <a:latin typeface="Arial"/>
-              </a:rPr>
               <a:t>[/Sources]</a:t>
             </a:r>
-            <a:endParaRPr b="0" lang="fr-FR" sz="2000" spc="-1" strike="noStrike">
-              <a:solidFill>
-                <a:srgbClr val="000000"/>
-              </a:solidFill>
-              <a:latin typeface="Arial"/>
-            </a:endParaRPr>
-          </a:p>
-        </p:txBody>
-      </p:sp>
-      <p:sp>
-        <p:nvSpPr>
-          <p:cNvPr id="148" name="PlaceHolder 3"/>
+            <a:endParaRPr b="0" lang="en-US" sz="2000" spc="-1" strike="noStrike">
+              <a:solidFill>
+                <a:srgbClr val="000000"/>
+              </a:solidFill>
+              <a:latin typeface="Arial"/>
+            </a:endParaRPr>
+          </a:p>
+        </p:txBody>
+      </p:sp>
+      <p:sp>
+        <p:nvSpPr>
+          <p:cNvPr id="154" name="PlaceHolder 3"/>
           <p:cNvSpPr>
             <a:spLocks noGrp="1"/>
           </p:cNvSpPr>
@@ -1021,7 +1060,7 @@
         <p:spPr>
           <a:xfrm>
             <a:off x="3884760" y="8685360"/>
-            <a:ext cx="2971440" cy="458280"/>
+            <a:ext cx="2971080" cy="457920"/>
           </a:xfrm>
           <a:prstGeom prst="rect">
             <a:avLst/>
@@ -1041,6 +1080,9 @@
                 <a:spcPct val="100000"/>
               </a:lnSpc>
               <a:buNone/>
+              <a:tabLst>
+                <a:tab algn="l" pos="0"/>
+              </a:tabLst>
               <a:defRPr b="0" lang="en-US" sz="1200" spc="-1" strike="noStrike">
                 <a:solidFill>
                   <a:schemeClr val="dk1"/>
@@ -1056,8 +1098,11 @@
                 <a:spcPct val="100000"/>
               </a:lnSpc>
               <a:buNone/>
-            </a:pPr>
-            <a:fld id="{8D79A69F-6385-4685-BDFF-ED009D35B2A5}" type="slidenum">
+              <a:tabLst>
+                <a:tab algn="l" pos="0"/>
+              </a:tabLst>
+            </a:pPr>
+            <a:fld id="{40630135-ACEE-42E7-8ED4-07D2A3EB8D02}" type="slidenum">
               <a:rPr b="0" lang="en-US" sz="1200" spc="-1" strike="noStrike">
                 <a:solidFill>
                   <a:schemeClr val="dk1"/>
@@ -1065,9 +1110,9 @@
                 <a:latin typeface="+mn-lt"/>
                 <a:ea typeface="+mn-ea"/>
               </a:rPr>
-              <a:t>&lt;numéro&gt;</a:t>
+              <a:t>&lt;number&gt;</a:t>
             </a:fld>
-            <a:endParaRPr b="0" lang="fr-FR" sz="1200" spc="-1" strike="noStrike">
+            <a:endParaRPr b="0" lang="en-US" sz="1200" spc="-1" strike="noStrike">
               <a:solidFill>
                 <a:srgbClr val="000000"/>
               </a:solidFill>
@@ -1100,7 +1145,7 @@
       </p:grpSpPr>
       <p:sp>
         <p:nvSpPr>
-          <p:cNvPr id="149" name="PlaceHolder 1"/>
+          <p:cNvPr id="155" name="PlaceHolder 1"/>
           <p:cNvSpPr>
             <a:spLocks noGrp="1"/>
           </p:cNvSpPr>
@@ -1123,7 +1168,7 @@
       </p:sp>
       <p:sp>
         <p:nvSpPr>
-          <p:cNvPr id="150" name="PlaceHolder 2"/>
+          <p:cNvPr id="156" name="PlaceHolder 2"/>
           <p:cNvSpPr>
             <a:spLocks noGrp="1"/>
           </p:cNvSpPr>
@@ -1134,7 +1179,7 @@
         <p:spPr>
           <a:xfrm>
             <a:off x="685800" y="4400640"/>
-            <a:ext cx="5486040" cy="3600000"/>
+            <a:ext cx="5485680" cy="3599640"/>
           </a:xfrm>
           <a:prstGeom prst="rect">
             <a:avLst/>
@@ -1150,9 +1195,15 @@
           </a:bodyPr>
           <a:p>
             <a:pPr marL="216000" indent="-216000">
+              <a:lnSpc>
+                <a:spcPct val="100000"/>
+              </a:lnSpc>
               <a:buNone/>
-            </a:pPr>
-            <a:endParaRPr b="0" lang="fr-FR" sz="2000" spc="-1" strike="noStrike">
+              <a:tabLst>
+                <a:tab algn="l" pos="0"/>
+              </a:tabLst>
+            </a:pPr>
+            <a:endParaRPr b="0" lang="en-US" sz="2000" spc="-1" strike="noStrike">
               <a:solidFill>
                 <a:srgbClr val="000000"/>
               </a:solidFill>
@@ -1161,7 +1212,13 @@
           </a:p>
           <a:p>
             <a:pPr marL="216000" indent="-216000">
+              <a:lnSpc>
+                <a:spcPct val="100000"/>
+              </a:lnSpc>
               <a:buNone/>
+              <a:tabLst>
+                <a:tab algn="l" pos="0"/>
+              </a:tabLst>
             </a:pPr>
             <a:r>
               <a:rPr b="0" lang="en-US" sz="2000" spc="-1" strike="noStrike">
@@ -1172,7 +1229,7 @@
               </a:rPr>
               <a:t>[Sources]</a:t>
             </a:r>
-            <a:endParaRPr b="0" lang="fr-FR" sz="2000" spc="-1" strike="noStrike">
+            <a:endParaRPr b="0" lang="en-US" sz="2000" spc="-1" strike="noStrike">
               <a:solidFill>
                 <a:srgbClr val="000000"/>
               </a:solidFill>
@@ -1181,7 +1238,13 @@
           </a:p>
           <a:p>
             <a:pPr marL="216000" indent="-216000">
+              <a:lnSpc>
+                <a:spcPct val="100000"/>
+              </a:lnSpc>
               <a:buNone/>
+              <a:tabLst>
+                <a:tab algn="l" pos="0"/>
+              </a:tabLst>
             </a:pPr>
             <a:r>
               <a:rPr b="0" lang="en-US" sz="2000" spc="-1" strike="noStrike">
@@ -1190,8 +1253,25 @@
                 </a:solidFill>
                 <a:latin typeface="Arial"/>
               </a:rPr>
-              <a:t>- Final report: sections 6.1, </a:t>
+              <a:t>- Final report: sections 6.1, 6.2, 6.3, 6.6 and figure descriptions for Figures 2, 3, 4.</a:t>
             </a:r>
+            <a:endParaRPr b="0" lang="en-US" sz="2000" spc="-1" strike="noStrike">
+              <a:solidFill>
+                <a:srgbClr val="000000"/>
+              </a:solidFill>
+              <a:latin typeface="Arial"/>
+            </a:endParaRPr>
+          </a:p>
+          <a:p>
+            <a:pPr marL="216000" indent="0">
+              <a:lnSpc>
+                <a:spcPct val="100000"/>
+              </a:lnSpc>
+              <a:buNone/>
+              <a:tabLst>
+                <a:tab algn="l" pos="0"/>
+              </a:tabLst>
+            </a:pPr>
             <a:r>
               <a:rPr b="0" lang="en-US" sz="2000" spc="-1" strike="noStrike">
                 <a:solidFill>
@@ -1199,61 +1279,20 @@
                 </a:solidFill>
                 <a:latin typeface="Arial"/>
               </a:rPr>
-              <a:t>6.2, 6.3, 6.6 and figure </a:t>
-            </a:r>
-            <a:r>
-              <a:rPr b="0" lang="en-US" sz="2000" spc="-1" strike="noStrike">
-                <a:solidFill>
-                  <a:srgbClr val="000000"/>
-                </a:solidFill>
-                <a:latin typeface="Arial"/>
-              </a:rPr>
-              <a:t>descriptions for Figures 2, </a:t>
-            </a:r>
-            <a:r>
-              <a:rPr b="0" lang="en-US" sz="2000" spc="-1" strike="noStrike">
-                <a:solidFill>
-                  <a:srgbClr val="000000"/>
-                </a:solidFill>
-                <a:latin typeface="Arial"/>
-              </a:rPr>
-              <a:t>3, 4.</a:t>
-            </a:r>
-            <a:endParaRPr b="0" lang="fr-FR" sz="2000" spc="-1" strike="noStrike">
-              <a:solidFill>
-                <a:srgbClr val="000000"/>
-              </a:solidFill>
-              <a:latin typeface="Arial"/>
-            </a:endParaRPr>
-          </a:p>
-          <a:p>
-            <a:pPr marL="216000" indent="0">
-              <a:lnSpc>
-                <a:spcPct val="100000"/>
-              </a:lnSpc>
-              <a:buNone/>
-            </a:pPr>
-            <a:r>
-              <a:rPr b="0" lang="en-US" sz="2000" spc="-1" strike="noStrike">
-                <a:solidFill>
-                  <a:srgbClr val="000000"/>
-                </a:solidFill>
-                <a:latin typeface="Arial"/>
-              </a:rPr>
               <a:t>[/Sources]</a:t>
             </a:r>
-            <a:endParaRPr b="0" lang="fr-FR" sz="2000" spc="-1" strike="noStrike">
-              <a:solidFill>
-                <a:srgbClr val="000000"/>
-              </a:solidFill>
-              <a:latin typeface="Arial"/>
-            </a:endParaRPr>
-          </a:p>
-        </p:txBody>
-      </p:sp>
-      <p:sp>
-        <p:nvSpPr>
-          <p:cNvPr id="151" name="PlaceHolder 3"/>
+            <a:endParaRPr b="0" lang="en-US" sz="2000" spc="-1" strike="noStrike">
+              <a:solidFill>
+                <a:srgbClr val="000000"/>
+              </a:solidFill>
+              <a:latin typeface="Arial"/>
+            </a:endParaRPr>
+          </a:p>
+        </p:txBody>
+      </p:sp>
+      <p:sp>
+        <p:nvSpPr>
+          <p:cNvPr id="157" name="PlaceHolder 3"/>
           <p:cNvSpPr>
             <a:spLocks noGrp="1"/>
           </p:cNvSpPr>
@@ -1264,7 +1303,7 @@
         <p:spPr>
           <a:xfrm>
             <a:off x="3884760" y="8685360"/>
-            <a:ext cx="2971440" cy="458280"/>
+            <a:ext cx="2971080" cy="457920"/>
           </a:xfrm>
           <a:prstGeom prst="rect">
             <a:avLst/>
@@ -1284,6 +1323,9 @@
                 <a:spcPct val="100000"/>
               </a:lnSpc>
               <a:buNone/>
+              <a:tabLst>
+                <a:tab algn="l" pos="0"/>
+              </a:tabLst>
               <a:defRPr b="0" lang="en-US" sz="1200" spc="-1" strike="noStrike">
                 <a:solidFill>
                   <a:schemeClr val="dk1"/>
@@ -1299,8 +1341,11 @@
                 <a:spcPct val="100000"/>
               </a:lnSpc>
               <a:buNone/>
-            </a:pPr>
-            <a:fld id="{D1F07F3D-F53A-4D38-87E3-45A7455B79B0}" type="slidenum">
+              <a:tabLst>
+                <a:tab algn="l" pos="0"/>
+              </a:tabLst>
+            </a:pPr>
+            <a:fld id="{40DF8E1B-D7F5-4DB0-BC18-B7C6AA40AA6D}" type="slidenum">
               <a:rPr b="0" lang="en-US" sz="1200" spc="-1" strike="noStrike">
                 <a:solidFill>
                   <a:schemeClr val="dk1"/>
@@ -1308,9 +1353,9 @@
                 <a:latin typeface="+mn-lt"/>
                 <a:ea typeface="+mn-ea"/>
               </a:rPr>
-              <a:t>&lt;numéro&gt;</a:t>
+              <a:t>&lt;number&gt;</a:t>
             </a:fld>
-            <a:endParaRPr b="0" lang="fr-FR" sz="1200" spc="-1" strike="noStrike">
+            <a:endParaRPr b="0" lang="en-US" sz="1200" spc="-1" strike="noStrike">
               <a:solidFill>
                 <a:srgbClr val="000000"/>
               </a:solidFill>
@@ -1343,7 +1388,7 @@
       </p:grpSpPr>
       <p:sp>
         <p:nvSpPr>
-          <p:cNvPr id="152" name="PlaceHolder 1"/>
+          <p:cNvPr id="158" name="PlaceHolder 1"/>
           <p:cNvSpPr>
             <a:spLocks noGrp="1"/>
           </p:cNvSpPr>
@@ -1366,7 +1411,7 @@
       </p:sp>
       <p:sp>
         <p:nvSpPr>
-          <p:cNvPr id="153" name="PlaceHolder 2"/>
+          <p:cNvPr id="159" name="PlaceHolder 2"/>
           <p:cNvSpPr>
             <a:spLocks noGrp="1"/>
           </p:cNvSpPr>
@@ -1377,7 +1422,7 @@
         <p:spPr>
           <a:xfrm>
             <a:off x="685800" y="4400640"/>
-            <a:ext cx="5486040" cy="3600000"/>
+            <a:ext cx="5485680" cy="3599640"/>
           </a:xfrm>
           <a:prstGeom prst="rect">
             <a:avLst/>
@@ -1393,9 +1438,15 @@
           </a:bodyPr>
           <a:p>
             <a:pPr marL="216000" indent="-216000">
+              <a:lnSpc>
+                <a:spcPct val="100000"/>
+              </a:lnSpc>
               <a:buNone/>
-            </a:pPr>
-            <a:endParaRPr b="0" lang="fr-FR" sz="2000" spc="-1" strike="noStrike">
+              <a:tabLst>
+                <a:tab algn="l" pos="0"/>
+              </a:tabLst>
+            </a:pPr>
+            <a:endParaRPr b="0" lang="en-US" sz="2000" spc="-1" strike="noStrike">
               <a:solidFill>
                 <a:srgbClr val="000000"/>
               </a:solidFill>
@@ -1404,7 +1455,13 @@
           </a:p>
           <a:p>
             <a:pPr marL="216000" indent="-216000">
+              <a:lnSpc>
+                <a:spcPct val="100000"/>
+              </a:lnSpc>
               <a:buNone/>
+              <a:tabLst>
+                <a:tab algn="l" pos="0"/>
+              </a:tabLst>
             </a:pPr>
             <a:r>
               <a:rPr b="0" lang="en-US" sz="2000" spc="-1" strike="noStrike">
@@ -1415,7 +1472,7 @@
               </a:rPr>
               <a:t>[Sources]</a:t>
             </a:r>
-            <a:endParaRPr b="0" lang="fr-FR" sz="2000" spc="-1" strike="noStrike">
+            <a:endParaRPr b="0" lang="en-US" sz="2000" spc="-1" strike="noStrike">
               <a:solidFill>
                 <a:srgbClr val="000000"/>
               </a:solidFill>
@@ -1424,7 +1481,13 @@
           </a:p>
           <a:p>
             <a:pPr marL="216000" indent="-216000">
+              <a:lnSpc>
+                <a:spcPct val="100000"/>
+              </a:lnSpc>
               <a:buNone/>
+              <a:tabLst>
+                <a:tab algn="l" pos="0"/>
+              </a:tabLst>
             </a:pPr>
             <a:r>
               <a:rPr b="0" lang="en-US" sz="2000" spc="-1" strike="noStrike">
@@ -1433,8 +1496,25 @@
                 </a:solidFill>
                 <a:latin typeface="Arial"/>
               </a:rPr>
-              <a:t>- Final report: sections 3.2, </a:t>
+              <a:t>- Final report: sections 3.2, 6.3, 6.4, 6.6.</a:t>
             </a:r>
+            <a:endParaRPr b="0" lang="en-US" sz="2000" spc="-1" strike="noStrike">
+              <a:solidFill>
+                <a:srgbClr val="000000"/>
+              </a:solidFill>
+              <a:latin typeface="Arial"/>
+            </a:endParaRPr>
+          </a:p>
+          <a:p>
+            <a:pPr marL="216000" indent="0">
+              <a:lnSpc>
+                <a:spcPct val="100000"/>
+              </a:lnSpc>
+              <a:buNone/>
+              <a:tabLst>
+                <a:tab algn="l" pos="0"/>
+              </a:tabLst>
+            </a:pPr>
             <a:r>
               <a:rPr b="0" lang="en-US" sz="2000" spc="-1" strike="noStrike">
                 <a:solidFill>
@@ -1442,43 +1522,20 @@
                 </a:solidFill>
                 <a:latin typeface="Arial"/>
               </a:rPr>
-              <a:t>6.3, 6.4, 6.6.</a:t>
-            </a:r>
-            <a:endParaRPr b="0" lang="fr-FR" sz="2000" spc="-1" strike="noStrike">
-              <a:solidFill>
-                <a:srgbClr val="000000"/>
-              </a:solidFill>
-              <a:latin typeface="Arial"/>
-            </a:endParaRPr>
-          </a:p>
-          <a:p>
-            <a:pPr marL="216000" indent="0">
-              <a:lnSpc>
-                <a:spcPct val="100000"/>
-              </a:lnSpc>
-              <a:buNone/>
-            </a:pPr>
-            <a:r>
-              <a:rPr b="0" lang="en-US" sz="2000" spc="-1" strike="noStrike">
-                <a:solidFill>
-                  <a:srgbClr val="000000"/>
-                </a:solidFill>
-                <a:latin typeface="Arial"/>
-              </a:rPr>
               <a:t>[/Sources]</a:t>
             </a:r>
-            <a:endParaRPr b="0" lang="fr-FR" sz="2000" spc="-1" strike="noStrike">
-              <a:solidFill>
-                <a:srgbClr val="000000"/>
-              </a:solidFill>
-              <a:latin typeface="Arial"/>
-            </a:endParaRPr>
-          </a:p>
-        </p:txBody>
-      </p:sp>
-      <p:sp>
-        <p:nvSpPr>
-          <p:cNvPr id="154" name="PlaceHolder 3"/>
+            <a:endParaRPr b="0" lang="en-US" sz="2000" spc="-1" strike="noStrike">
+              <a:solidFill>
+                <a:srgbClr val="000000"/>
+              </a:solidFill>
+              <a:latin typeface="Arial"/>
+            </a:endParaRPr>
+          </a:p>
+        </p:txBody>
+      </p:sp>
+      <p:sp>
+        <p:nvSpPr>
+          <p:cNvPr id="160" name="PlaceHolder 3"/>
           <p:cNvSpPr>
             <a:spLocks noGrp="1"/>
           </p:cNvSpPr>
@@ -1489,7 +1546,7 @@
         <p:spPr>
           <a:xfrm>
             <a:off x="3884760" y="8685360"/>
-            <a:ext cx="2971440" cy="458280"/>
+            <a:ext cx="2971080" cy="457920"/>
           </a:xfrm>
           <a:prstGeom prst="rect">
             <a:avLst/>
@@ -1509,6 +1566,9 @@
                 <a:spcPct val="100000"/>
               </a:lnSpc>
               <a:buNone/>
+              <a:tabLst>
+                <a:tab algn="l" pos="0"/>
+              </a:tabLst>
               <a:defRPr b="0" lang="en-US" sz="1200" spc="-1" strike="noStrike">
                 <a:solidFill>
                   <a:schemeClr val="dk1"/>
@@ -1524,8 +1584,11 @@
                 <a:spcPct val="100000"/>
               </a:lnSpc>
               <a:buNone/>
-            </a:pPr>
-            <a:fld id="{734E247A-2BA9-48A2-87FF-C50292F8FA92}" type="slidenum">
+              <a:tabLst>
+                <a:tab algn="l" pos="0"/>
+              </a:tabLst>
+            </a:pPr>
+            <a:fld id="{4681FF08-6226-4340-B552-8449F363C695}" type="slidenum">
               <a:rPr b="0" lang="en-US" sz="1200" spc="-1" strike="noStrike">
                 <a:solidFill>
                   <a:schemeClr val="dk1"/>
@@ -1533,9 +1596,9 @@
                 <a:latin typeface="+mn-lt"/>
                 <a:ea typeface="+mn-ea"/>
               </a:rPr>
-              <a:t>&lt;numéro&gt;</a:t>
+              <a:t>&lt;number&gt;</a:t>
             </a:fld>
-            <a:endParaRPr b="0" lang="fr-FR" sz="1200" spc="-1" strike="noStrike">
+            <a:endParaRPr b="0" lang="en-US" sz="1200" spc="-1" strike="noStrike">
               <a:solidFill>
                 <a:srgbClr val="000000"/>
               </a:solidFill>
@@ -1568,7 +1631,7 @@
       </p:grpSpPr>
       <p:sp>
         <p:nvSpPr>
-          <p:cNvPr id="155" name="PlaceHolder 1"/>
+          <p:cNvPr id="161" name="PlaceHolder 1"/>
           <p:cNvSpPr>
             <a:spLocks noGrp="1"/>
           </p:cNvSpPr>
@@ -1591,7 +1654,7 @@
       </p:sp>
       <p:sp>
         <p:nvSpPr>
-          <p:cNvPr id="156" name="PlaceHolder 2"/>
+          <p:cNvPr id="162" name="PlaceHolder 2"/>
           <p:cNvSpPr>
             <a:spLocks noGrp="1"/>
           </p:cNvSpPr>
@@ -1602,7 +1665,7 @@
         <p:spPr>
           <a:xfrm>
             <a:off x="685800" y="4400640"/>
-            <a:ext cx="5486040" cy="3600000"/>
+            <a:ext cx="5485680" cy="3599640"/>
           </a:xfrm>
           <a:prstGeom prst="rect">
             <a:avLst/>
@@ -1618,9 +1681,15 @@
           </a:bodyPr>
           <a:p>
             <a:pPr marL="216000" indent="-216000">
+              <a:lnSpc>
+                <a:spcPct val="100000"/>
+              </a:lnSpc>
               <a:buNone/>
-            </a:pPr>
-            <a:endParaRPr b="0" lang="fr-FR" sz="2000" spc="-1" strike="noStrike">
+              <a:tabLst>
+                <a:tab algn="l" pos="0"/>
+              </a:tabLst>
+            </a:pPr>
+            <a:endParaRPr b="0" lang="en-US" sz="2000" spc="-1" strike="noStrike">
               <a:solidFill>
                 <a:srgbClr val="000000"/>
               </a:solidFill>
@@ -1629,7 +1698,13 @@
           </a:p>
           <a:p>
             <a:pPr marL="216000" indent="-216000">
+              <a:lnSpc>
+                <a:spcPct val="100000"/>
+              </a:lnSpc>
               <a:buNone/>
+              <a:tabLst>
+                <a:tab algn="l" pos="0"/>
+              </a:tabLst>
             </a:pPr>
             <a:r>
               <a:rPr b="0" lang="en-US" sz="2000" spc="-1" strike="noStrike">
@@ -1640,7 +1715,7 @@
               </a:rPr>
               <a:t>[Sources]</a:t>
             </a:r>
-            <a:endParaRPr b="0" lang="fr-FR" sz="2000" spc="-1" strike="noStrike">
+            <a:endParaRPr b="0" lang="en-US" sz="2000" spc="-1" strike="noStrike">
               <a:solidFill>
                 <a:srgbClr val="000000"/>
               </a:solidFill>
@@ -1649,7 +1724,13 @@
           </a:p>
           <a:p>
             <a:pPr marL="216000" indent="-216000">
+              <a:lnSpc>
+                <a:spcPct val="100000"/>
+              </a:lnSpc>
               <a:buNone/>
+              <a:tabLst>
+                <a:tab algn="l" pos="0"/>
+              </a:tabLst>
             </a:pPr>
             <a:r>
               <a:rPr b="0" lang="en-US" sz="2000" spc="-1" strike="noStrike">
@@ -1658,8 +1739,25 @@
                 </a:solidFill>
                 <a:latin typeface="Arial"/>
               </a:rPr>
-              <a:t>- Final report: </a:t>
+              <a:t>- Final report: sections 5.1, 5.2, 5.3, 7.3, 7.4, 10.</a:t>
             </a:r>
+            <a:endParaRPr b="0" lang="en-US" sz="2000" spc="-1" strike="noStrike">
+              <a:solidFill>
+                <a:srgbClr val="000000"/>
+              </a:solidFill>
+              <a:latin typeface="Arial"/>
+            </a:endParaRPr>
+          </a:p>
+          <a:p>
+            <a:pPr marL="216000" indent="0">
+              <a:lnSpc>
+                <a:spcPct val="100000"/>
+              </a:lnSpc>
+              <a:buNone/>
+              <a:tabLst>
+                <a:tab algn="l" pos="0"/>
+              </a:tabLst>
+            </a:pPr>
             <a:r>
               <a:rPr b="0" lang="en-US" sz="2000" spc="-1" strike="noStrike">
                 <a:solidFill>
@@ -1667,61 +1765,20 @@
                 </a:solidFill>
                 <a:latin typeface="Arial"/>
               </a:rPr>
-              <a:t>sections 5.1, </a:t>
-            </a:r>
-            <a:r>
-              <a:rPr b="0" lang="en-US" sz="2000" spc="-1" strike="noStrike">
-                <a:solidFill>
-                  <a:srgbClr val="000000"/>
-                </a:solidFill>
-                <a:latin typeface="Arial"/>
-              </a:rPr>
-              <a:t>5.2, 5.3, 7.3, </a:t>
-            </a:r>
-            <a:r>
-              <a:rPr b="0" lang="en-US" sz="2000" spc="-1" strike="noStrike">
-                <a:solidFill>
-                  <a:srgbClr val="000000"/>
-                </a:solidFill>
-                <a:latin typeface="Arial"/>
-              </a:rPr>
-              <a:t>7.4, 10.</a:t>
-            </a:r>
-            <a:endParaRPr b="0" lang="fr-FR" sz="2000" spc="-1" strike="noStrike">
-              <a:solidFill>
-                <a:srgbClr val="000000"/>
-              </a:solidFill>
-              <a:latin typeface="Arial"/>
-            </a:endParaRPr>
-          </a:p>
-          <a:p>
-            <a:pPr marL="216000" indent="0">
-              <a:lnSpc>
-                <a:spcPct val="100000"/>
-              </a:lnSpc>
-              <a:buNone/>
-            </a:pPr>
-            <a:r>
-              <a:rPr b="0" lang="en-US" sz="2000" spc="-1" strike="noStrike">
-                <a:solidFill>
-                  <a:srgbClr val="000000"/>
-                </a:solidFill>
-                <a:latin typeface="Arial"/>
-              </a:rPr>
               <a:t>[/Sources]</a:t>
             </a:r>
-            <a:endParaRPr b="0" lang="fr-FR" sz="2000" spc="-1" strike="noStrike">
-              <a:solidFill>
-                <a:srgbClr val="000000"/>
-              </a:solidFill>
-              <a:latin typeface="Arial"/>
-            </a:endParaRPr>
-          </a:p>
-        </p:txBody>
-      </p:sp>
-      <p:sp>
-        <p:nvSpPr>
-          <p:cNvPr id="157" name="PlaceHolder 3"/>
+            <a:endParaRPr b="0" lang="en-US" sz="2000" spc="-1" strike="noStrike">
+              <a:solidFill>
+                <a:srgbClr val="000000"/>
+              </a:solidFill>
+              <a:latin typeface="Arial"/>
+            </a:endParaRPr>
+          </a:p>
+        </p:txBody>
+      </p:sp>
+      <p:sp>
+        <p:nvSpPr>
+          <p:cNvPr id="163" name="PlaceHolder 3"/>
           <p:cNvSpPr>
             <a:spLocks noGrp="1"/>
           </p:cNvSpPr>
@@ -1732,7 +1789,7 @@
         <p:spPr>
           <a:xfrm>
             <a:off x="3884760" y="8685360"/>
-            <a:ext cx="2971440" cy="458280"/>
+            <a:ext cx="2971080" cy="457920"/>
           </a:xfrm>
           <a:prstGeom prst="rect">
             <a:avLst/>
@@ -1752,6 +1809,9 @@
                 <a:spcPct val="100000"/>
               </a:lnSpc>
               <a:buNone/>
+              <a:tabLst>
+                <a:tab algn="l" pos="0"/>
+              </a:tabLst>
               <a:defRPr b="0" lang="en-US" sz="1200" spc="-1" strike="noStrike">
                 <a:solidFill>
                   <a:schemeClr val="dk1"/>
@@ -1767,8 +1827,11 @@
                 <a:spcPct val="100000"/>
               </a:lnSpc>
               <a:buNone/>
-            </a:pPr>
-            <a:fld id="{2E36B0FC-31D9-4CE9-84BC-9D90821FB12D}" type="slidenum">
+              <a:tabLst>
+                <a:tab algn="l" pos="0"/>
+              </a:tabLst>
+            </a:pPr>
+            <a:fld id="{45934D54-E931-46A1-AAA0-125F3C8D6045}" type="slidenum">
               <a:rPr b="0" lang="en-US" sz="1200" spc="-1" strike="noStrike">
                 <a:solidFill>
                   <a:schemeClr val="dk1"/>
@@ -1776,9 +1839,9 @@
                 <a:latin typeface="+mn-lt"/>
                 <a:ea typeface="+mn-ea"/>
               </a:rPr>
-              <a:t>&lt;numéro&gt;</a:t>
+              <a:t>&lt;number&gt;</a:t>
             </a:fld>
-            <a:endParaRPr b="0" lang="fr-FR" sz="1200" spc="-1" strike="noStrike">
+            <a:endParaRPr b="0" lang="en-US" sz="1200" spc="-1" strike="noStrike">
               <a:solidFill>
                 <a:srgbClr val="000000"/>
               </a:solidFill>
@@ -1811,7 +1874,7 @@
       </p:grpSpPr>
       <p:sp>
         <p:nvSpPr>
-          <p:cNvPr id="158" name="PlaceHolder 1"/>
+          <p:cNvPr id="164" name="PlaceHolder 1"/>
           <p:cNvSpPr>
             <a:spLocks noGrp="1"/>
           </p:cNvSpPr>
@@ -1834,7 +1897,7 @@
       </p:sp>
       <p:sp>
         <p:nvSpPr>
-          <p:cNvPr id="159" name="PlaceHolder 2"/>
+          <p:cNvPr id="165" name="PlaceHolder 2"/>
           <p:cNvSpPr>
             <a:spLocks noGrp="1"/>
           </p:cNvSpPr>
@@ -1845,7 +1908,7 @@
         <p:spPr>
           <a:xfrm>
             <a:off x="685800" y="4400640"/>
-            <a:ext cx="5486040" cy="3600000"/>
+            <a:ext cx="5485680" cy="3599640"/>
           </a:xfrm>
           <a:prstGeom prst="rect">
             <a:avLst/>
@@ -1861,9 +1924,15 @@
           </a:bodyPr>
           <a:p>
             <a:pPr marL="216000" indent="-216000">
+              <a:lnSpc>
+                <a:spcPct val="100000"/>
+              </a:lnSpc>
               <a:buNone/>
-            </a:pPr>
-            <a:endParaRPr b="0" lang="fr-FR" sz="2000" spc="-1" strike="noStrike">
+              <a:tabLst>
+                <a:tab algn="l" pos="0"/>
+              </a:tabLst>
+            </a:pPr>
+            <a:endParaRPr b="0" lang="en-US" sz="2000" spc="-1" strike="noStrike">
               <a:solidFill>
                 <a:srgbClr val="000000"/>
               </a:solidFill>
@@ -1872,7 +1941,13 @@
           </a:p>
           <a:p>
             <a:pPr marL="216000" indent="-216000">
+              <a:lnSpc>
+                <a:spcPct val="100000"/>
+              </a:lnSpc>
               <a:buNone/>
+              <a:tabLst>
+                <a:tab algn="l" pos="0"/>
+              </a:tabLst>
             </a:pPr>
             <a:r>
               <a:rPr b="0" lang="en-US" sz="2000" spc="-1" strike="noStrike">
@@ -1883,7 +1958,7 @@
               </a:rPr>
               <a:t>[Sources]</a:t>
             </a:r>
-            <a:endParaRPr b="0" lang="fr-FR" sz="2000" spc="-1" strike="noStrike">
+            <a:endParaRPr b="0" lang="en-US" sz="2000" spc="-1" strike="noStrike">
               <a:solidFill>
                 <a:srgbClr val="000000"/>
               </a:solidFill>
@@ -1892,7 +1967,13 @@
           </a:p>
           <a:p>
             <a:pPr marL="216000" indent="-216000">
+              <a:lnSpc>
+                <a:spcPct val="100000"/>
+              </a:lnSpc>
               <a:buNone/>
+              <a:tabLst>
+                <a:tab algn="l" pos="0"/>
+              </a:tabLst>
             </a:pPr>
             <a:r>
               <a:rPr b="0" lang="en-US" sz="2000" spc="-1" strike="noStrike">
@@ -1901,8 +1982,25 @@
                 </a:solidFill>
                 <a:latin typeface="Arial"/>
               </a:rPr>
-              <a:t>- Final report: sections </a:t>
+              <a:t>- Final report: sections 8.1, 8.2, 8.3, 8.4.</a:t>
             </a:r>
+            <a:endParaRPr b="0" lang="en-US" sz="2000" spc="-1" strike="noStrike">
+              <a:solidFill>
+                <a:srgbClr val="000000"/>
+              </a:solidFill>
+              <a:latin typeface="Arial"/>
+            </a:endParaRPr>
+          </a:p>
+          <a:p>
+            <a:pPr marL="216000" indent="0">
+              <a:lnSpc>
+                <a:spcPct val="100000"/>
+              </a:lnSpc>
+              <a:buNone/>
+              <a:tabLst>
+                <a:tab algn="l" pos="0"/>
+              </a:tabLst>
+            </a:pPr>
             <a:r>
               <a:rPr b="0" lang="en-US" sz="2000" spc="-1" strike="noStrike">
                 <a:solidFill>
@@ -1910,43 +2008,20 @@
                 </a:solidFill>
                 <a:latin typeface="Arial"/>
               </a:rPr>
-              <a:t>8.1, 8.2, 8.3, 8.4.</a:t>
-            </a:r>
-            <a:endParaRPr b="0" lang="fr-FR" sz="2000" spc="-1" strike="noStrike">
-              <a:solidFill>
-                <a:srgbClr val="000000"/>
-              </a:solidFill>
-              <a:latin typeface="Arial"/>
-            </a:endParaRPr>
-          </a:p>
-          <a:p>
-            <a:pPr marL="216000" indent="0">
-              <a:lnSpc>
-                <a:spcPct val="100000"/>
-              </a:lnSpc>
-              <a:buNone/>
-            </a:pPr>
-            <a:r>
-              <a:rPr b="0" lang="en-US" sz="2000" spc="-1" strike="noStrike">
-                <a:solidFill>
-                  <a:srgbClr val="000000"/>
-                </a:solidFill>
-                <a:latin typeface="Arial"/>
-              </a:rPr>
               <a:t>[/Sources]</a:t>
             </a:r>
-            <a:endParaRPr b="0" lang="fr-FR" sz="2000" spc="-1" strike="noStrike">
-              <a:solidFill>
-                <a:srgbClr val="000000"/>
-              </a:solidFill>
-              <a:latin typeface="Arial"/>
-            </a:endParaRPr>
-          </a:p>
-        </p:txBody>
-      </p:sp>
-      <p:sp>
-        <p:nvSpPr>
-          <p:cNvPr id="160" name="PlaceHolder 3"/>
+            <a:endParaRPr b="0" lang="en-US" sz="2000" spc="-1" strike="noStrike">
+              <a:solidFill>
+                <a:srgbClr val="000000"/>
+              </a:solidFill>
+              <a:latin typeface="Arial"/>
+            </a:endParaRPr>
+          </a:p>
+        </p:txBody>
+      </p:sp>
+      <p:sp>
+        <p:nvSpPr>
+          <p:cNvPr id="166" name="PlaceHolder 3"/>
           <p:cNvSpPr>
             <a:spLocks noGrp="1"/>
           </p:cNvSpPr>
@@ -1957,7 +2032,7 @@
         <p:spPr>
           <a:xfrm>
             <a:off x="3884760" y="8685360"/>
-            <a:ext cx="2971440" cy="458280"/>
+            <a:ext cx="2971080" cy="457920"/>
           </a:xfrm>
           <a:prstGeom prst="rect">
             <a:avLst/>
@@ -1977,6 +2052,9 @@
                 <a:spcPct val="100000"/>
               </a:lnSpc>
               <a:buNone/>
+              <a:tabLst>
+                <a:tab algn="l" pos="0"/>
+              </a:tabLst>
               <a:defRPr b="0" lang="en-US" sz="1200" spc="-1" strike="noStrike">
                 <a:solidFill>
                   <a:schemeClr val="dk1"/>
@@ -1992,8 +2070,11 @@
                 <a:spcPct val="100000"/>
               </a:lnSpc>
               <a:buNone/>
-            </a:pPr>
-            <a:fld id="{4E41FA57-B4B1-4F37-827F-E4DFB6B6B06E}" type="slidenum">
+              <a:tabLst>
+                <a:tab algn="l" pos="0"/>
+              </a:tabLst>
+            </a:pPr>
+            <a:fld id="{58C2F6AE-6677-4255-AFD6-2FB5F7CCCB9A}" type="slidenum">
               <a:rPr b="0" lang="en-US" sz="1200" spc="-1" strike="noStrike">
                 <a:solidFill>
                   <a:schemeClr val="dk1"/>
@@ -2001,9 +2082,9 @@
                 <a:latin typeface="+mn-lt"/>
                 <a:ea typeface="+mn-ea"/>
               </a:rPr>
-              <a:t>&lt;numéro&gt;</a:t>
+              <a:t>&lt;number&gt;</a:t>
             </a:fld>
-            <a:endParaRPr b="0" lang="fr-FR" sz="1200" spc="-1" strike="noStrike">
+            <a:endParaRPr b="0" lang="en-US" sz="1200" spc="-1" strike="noStrike">
               <a:solidFill>
                 <a:srgbClr val="000000"/>
               </a:solidFill>
@@ -2036,7 +2117,7 @@
       </p:grpSpPr>
       <p:sp>
         <p:nvSpPr>
-          <p:cNvPr id="161" name="PlaceHolder 1"/>
+          <p:cNvPr id="167" name="PlaceHolder 1"/>
           <p:cNvSpPr>
             <a:spLocks noGrp="1"/>
           </p:cNvSpPr>
@@ -2059,7 +2140,7 @@
       </p:sp>
       <p:sp>
         <p:nvSpPr>
-          <p:cNvPr id="162" name="PlaceHolder 2"/>
+          <p:cNvPr id="168" name="PlaceHolder 2"/>
           <p:cNvSpPr>
             <a:spLocks noGrp="1"/>
           </p:cNvSpPr>
@@ -2070,7 +2151,7 @@
         <p:spPr>
           <a:xfrm>
             <a:off x="685800" y="4400640"/>
-            <a:ext cx="5486040" cy="3600000"/>
+            <a:ext cx="5485680" cy="3599640"/>
           </a:xfrm>
           <a:prstGeom prst="rect">
             <a:avLst/>
@@ -2086,9 +2167,15 @@
           </a:bodyPr>
           <a:p>
             <a:pPr marL="216000" indent="-216000">
+              <a:lnSpc>
+                <a:spcPct val="100000"/>
+              </a:lnSpc>
               <a:buNone/>
-            </a:pPr>
-            <a:endParaRPr b="0" lang="fr-FR" sz="2000" spc="-1" strike="noStrike">
+              <a:tabLst>
+                <a:tab algn="l" pos="0"/>
+              </a:tabLst>
+            </a:pPr>
+            <a:endParaRPr b="0" lang="en-US" sz="2000" spc="-1" strike="noStrike">
               <a:solidFill>
                 <a:srgbClr val="000000"/>
               </a:solidFill>
@@ -2097,7 +2184,13 @@
           </a:p>
           <a:p>
             <a:pPr marL="216000" indent="-216000">
+              <a:lnSpc>
+                <a:spcPct val="100000"/>
+              </a:lnSpc>
               <a:buNone/>
+              <a:tabLst>
+                <a:tab algn="l" pos="0"/>
+              </a:tabLst>
             </a:pPr>
             <a:r>
               <a:rPr b="0" lang="en-US" sz="2000" spc="-1" strike="noStrike">
@@ -2108,7 +2201,7 @@
               </a:rPr>
               <a:t>[Sources]</a:t>
             </a:r>
-            <a:endParaRPr b="0" lang="fr-FR" sz="2000" spc="-1" strike="noStrike">
+            <a:endParaRPr b="0" lang="en-US" sz="2000" spc="-1" strike="noStrike">
               <a:solidFill>
                 <a:srgbClr val="000000"/>
               </a:solidFill>
@@ -2117,7 +2210,13 @@
           </a:p>
           <a:p>
             <a:pPr marL="216000" indent="-216000">
+              <a:lnSpc>
+                <a:spcPct val="100000"/>
+              </a:lnSpc>
               <a:buNone/>
+              <a:tabLst>
+                <a:tab algn="l" pos="0"/>
+              </a:tabLst>
             </a:pPr>
             <a:r>
               <a:rPr b="0" lang="en-US" sz="2000" spc="-1" strike="noStrike">
@@ -2126,8 +2225,25 @@
                 </a:solidFill>
                 <a:latin typeface="Arial"/>
               </a:rPr>
-              <a:t>- Final report: sections 9.1, </a:t>
+              <a:t>- Final report: sections 9.1, 9.2, 9.3, 10.</a:t>
             </a:r>
+            <a:endParaRPr b="0" lang="en-US" sz="2000" spc="-1" strike="noStrike">
+              <a:solidFill>
+                <a:srgbClr val="000000"/>
+              </a:solidFill>
+              <a:latin typeface="Arial"/>
+            </a:endParaRPr>
+          </a:p>
+          <a:p>
+            <a:pPr marL="216000" indent="0">
+              <a:lnSpc>
+                <a:spcPct val="100000"/>
+              </a:lnSpc>
+              <a:buNone/>
+              <a:tabLst>
+                <a:tab algn="l" pos="0"/>
+              </a:tabLst>
+            </a:pPr>
             <a:r>
               <a:rPr b="0" lang="en-US" sz="2000" spc="-1" strike="noStrike">
                 <a:solidFill>
@@ -2135,43 +2251,20 @@
                 </a:solidFill>
                 <a:latin typeface="Arial"/>
               </a:rPr>
-              <a:t>9.2, 9.3, 10.</a:t>
-            </a:r>
-            <a:endParaRPr b="0" lang="fr-FR" sz="2000" spc="-1" strike="noStrike">
-              <a:solidFill>
-                <a:srgbClr val="000000"/>
-              </a:solidFill>
-              <a:latin typeface="Arial"/>
-            </a:endParaRPr>
-          </a:p>
-          <a:p>
-            <a:pPr marL="216000" indent="0">
-              <a:lnSpc>
-                <a:spcPct val="100000"/>
-              </a:lnSpc>
-              <a:buNone/>
-            </a:pPr>
-            <a:r>
-              <a:rPr b="0" lang="en-US" sz="2000" spc="-1" strike="noStrike">
-                <a:solidFill>
-                  <a:srgbClr val="000000"/>
-                </a:solidFill>
-                <a:latin typeface="Arial"/>
-              </a:rPr>
               <a:t>[/Sources]</a:t>
             </a:r>
-            <a:endParaRPr b="0" lang="fr-FR" sz="2000" spc="-1" strike="noStrike">
-              <a:solidFill>
-                <a:srgbClr val="000000"/>
-              </a:solidFill>
-              <a:latin typeface="Arial"/>
-            </a:endParaRPr>
-          </a:p>
-        </p:txBody>
-      </p:sp>
-      <p:sp>
-        <p:nvSpPr>
-          <p:cNvPr id="163" name="PlaceHolder 3"/>
+            <a:endParaRPr b="0" lang="en-US" sz="2000" spc="-1" strike="noStrike">
+              <a:solidFill>
+                <a:srgbClr val="000000"/>
+              </a:solidFill>
+              <a:latin typeface="Arial"/>
+            </a:endParaRPr>
+          </a:p>
+        </p:txBody>
+      </p:sp>
+      <p:sp>
+        <p:nvSpPr>
+          <p:cNvPr id="169" name="PlaceHolder 3"/>
           <p:cNvSpPr>
             <a:spLocks noGrp="1"/>
           </p:cNvSpPr>
@@ -2182,7 +2275,7 @@
         <p:spPr>
           <a:xfrm>
             <a:off x="3884760" y="8685360"/>
-            <a:ext cx="2971440" cy="458280"/>
+            <a:ext cx="2971080" cy="457920"/>
           </a:xfrm>
           <a:prstGeom prst="rect">
             <a:avLst/>
@@ -2202,6 +2295,9 @@
                 <a:spcPct val="100000"/>
               </a:lnSpc>
               <a:buNone/>
+              <a:tabLst>
+                <a:tab algn="l" pos="0"/>
+              </a:tabLst>
               <a:defRPr b="0" lang="en-US" sz="1200" spc="-1" strike="noStrike">
                 <a:solidFill>
                   <a:schemeClr val="dk1"/>
@@ -2217,8 +2313,11 @@
                 <a:spcPct val="100000"/>
               </a:lnSpc>
               <a:buNone/>
-            </a:pPr>
-            <a:fld id="{D6BB5CCD-54F0-4F2F-B23E-504076425EBA}" type="slidenum">
+              <a:tabLst>
+                <a:tab algn="l" pos="0"/>
+              </a:tabLst>
+            </a:pPr>
+            <a:fld id="{7D1CAC66-0EA6-416B-863B-EA4BD9380EF2}" type="slidenum">
               <a:rPr b="0" lang="en-US" sz="1200" spc="-1" strike="noStrike">
                 <a:solidFill>
                   <a:schemeClr val="dk1"/>
@@ -2226,9 +2325,9 @@
                 <a:latin typeface="+mn-lt"/>
                 <a:ea typeface="+mn-ea"/>
               </a:rPr>
-              <a:t>&lt;numéro&gt;</a:t>
+              <a:t>&lt;number&gt;</a:t>
             </a:fld>
-            <a:endParaRPr b="0" lang="fr-FR" sz="1200" spc="-1" strike="noStrike">
+            <a:endParaRPr b="0" lang="en-US" sz="1200" spc="-1" strike="noStrike">
               <a:solidFill>
                 <a:srgbClr val="000000"/>
               </a:solidFill>
@@ -2295,7 +2394,7 @@
         <p:txBody>
           <a:bodyPr/>
           <a:p>
-            <a:fld id="{A7561D7F-248A-4CAB-9835-38E0068DA521}" type="slidenum">
+            <a:fld id="{6B364D04-541B-4F74-AF40-8DEB28A38F9C}" type="slidenum">
               <a:t>&lt;#&gt;</a:t>
             </a:fld>
           </a:p>
@@ -2372,7 +2471,7 @@
         <p:spPr>
           <a:xfrm>
             <a:off x="0" y="0"/>
-            <a:ext cx="12188520" cy="200880"/>
+            <a:ext cx="12188160" cy="200520"/>
           </a:xfrm>
           <a:prstGeom prst="rect">
             <a:avLst/>
@@ -2398,6 +2497,11 @@
             <a:noAutofit/>
           </a:bodyPr>
           <a:p>
+            <a:pPr defTabSz="914400">
+              <a:lnSpc>
+                <a:spcPct val="100000"/>
+              </a:lnSpc>
+            </a:pPr>
             <a:endParaRPr b="0" lang="fr-FR" sz="1800" spc="-1" strike="noStrike">
               <a:solidFill>
                 <a:srgbClr val="ffffff"/>
@@ -2416,7 +2520,7 @@
         <p:spPr>
           <a:xfrm>
             <a:off x="0" y="6565320"/>
-            <a:ext cx="12188520" cy="292320"/>
+            <a:ext cx="12188160" cy="291960"/>
           </a:xfrm>
           <a:prstGeom prst="rect">
             <a:avLst/>
@@ -2442,6 +2546,11 @@
             <a:noAutofit/>
           </a:bodyPr>
           <a:p>
+            <a:pPr defTabSz="914400">
+              <a:lnSpc>
+                <a:spcPct val="100000"/>
+              </a:lnSpc>
+            </a:pPr>
             <a:endParaRPr b="0" lang="fr-FR" sz="1800" spc="-1" strike="noStrike">
               <a:solidFill>
                 <a:srgbClr val="ffffff"/>
@@ -2460,7 +2569,7 @@
         <p:spPr>
           <a:xfrm>
             <a:off x="365760" y="6583680"/>
-            <a:ext cx="4114440" cy="182520"/>
+            <a:ext cx="4114080" cy="182160"/>
           </a:xfrm>
           <a:prstGeom prst="rect">
             <a:avLst/>
@@ -2498,7 +2607,7 @@
               </a:rPr>
               <a:t>INFO4 · Polytech Grenoble · S8 Project</a:t>
             </a:r>
-            <a:endParaRPr b="0" lang="fr-FR" sz="1000" spc="-1" strike="noStrike">
+            <a:endParaRPr b="0" lang="en-US" sz="1000" spc="-1" strike="noStrike">
               <a:solidFill>
                 <a:srgbClr val="000000"/>
               </a:solidFill>
@@ -2516,7 +2625,7 @@
         <p:spPr>
           <a:xfrm>
             <a:off x="10058400" y="6583680"/>
-            <a:ext cx="1645560" cy="182520"/>
+            <a:ext cx="1645200" cy="182160"/>
           </a:xfrm>
           <a:prstGeom prst="rect">
             <a:avLst/>
@@ -2554,7 +2663,7 @@
               </a:rPr>
               <a:t>Room Server</a:t>
             </a:r>
-            <a:endParaRPr b="0" lang="fr-FR" sz="1000" spc="-1" strike="noStrike">
+            <a:endParaRPr b="0" lang="en-US" sz="1000" spc="-1" strike="noStrike">
               <a:solidFill>
                 <a:srgbClr val="000000"/>
               </a:solidFill>
@@ -2576,7 +2685,7 @@
         <p:spPr>
           <a:xfrm>
             <a:off x="11750040" y="6583680"/>
-            <a:ext cx="228240" cy="182520"/>
+            <a:ext cx="227880" cy="182160"/>
           </a:xfrm>
           <a:prstGeom prst="rect">
             <a:avLst/>
@@ -2596,6 +2705,9 @@
                 <a:spcPct val="100000"/>
               </a:lnSpc>
               <a:buNone/>
+              <a:tabLst>
+                <a:tab algn="l" pos="0"/>
+              </a:tabLst>
               <a:defRPr b="0" lang="en-US" sz="1000" spc="-1" strike="noStrike">
                 <a:solidFill>
                   <a:srgbClr val="ffffff"/>
@@ -2610,17 +2722,20 @@
                 <a:spcPct val="100000"/>
               </a:lnSpc>
               <a:buNone/>
-            </a:pPr>
-            <a:fld id="{40786463-AFAA-49E7-A5B7-2D7AF0C8483D}" type="slidenum">
+              <a:tabLst>
+                <a:tab algn="l" pos="0"/>
+              </a:tabLst>
+            </a:pPr>
+            <a:fld id="{2A6E8F6B-EC2D-4D17-8025-E4BC68135B8E}" type="slidenum">
               <a:rPr b="0" lang="en-US" sz="1000" spc="-1" strike="noStrike">
                 <a:solidFill>
                   <a:srgbClr val="ffffff"/>
                 </a:solidFill>
                 <a:latin typeface="Aptos"/>
               </a:rPr>
-              <a:t>&lt;numéro&gt;</a:t>
+              <a:t>&lt;number&gt;</a:t>
             </a:fld>
-            <a:endParaRPr b="0" lang="fr-FR" sz="1000" spc="-1" strike="noStrike">
+            <a:endParaRPr b="0" lang="en-US" sz="1000" spc="-1" strike="noStrike">
               <a:solidFill>
                 <a:srgbClr val="000000"/>
               </a:solidFill>
@@ -2661,15 +2776,24 @@
               <a:buNone/>
             </a:pPr>
             <a:r>
-              <a:rPr b="0" lang="fr-FR" sz="1800" spc="-1" strike="noStrike">
+              <a:rPr b="0" lang="en-US" sz="1800" spc="-1" strike="noStrike">
                 <a:solidFill>
                   <a:schemeClr val="dk1"/>
                 </a:solidFill>
                 <a:latin typeface="Aptos"/>
               </a:rPr>
-              <a:t>Cliquez pour éditer le format du texte-titre</a:t>
+              <a:t>Click to edit the </a:t>
             </a:r>
-            <a:endParaRPr b="0" lang="fr-FR" sz="1800" spc="-1" strike="noStrike">
+            <a:r>
+              <a:rPr b="0" lang="en-US" sz="1800" spc="-1" strike="noStrike">
+                <a:solidFill>
+                  <a:schemeClr val="dk1"/>
+                </a:solidFill>
+                <a:latin typeface="Aptos"/>
+              </a:rPr>
+              <a:t>title text format</a:t>
+            </a:r>
+            <a:endParaRPr b="0" lang="en-US" sz="1800" spc="-1" strike="noStrike">
               <a:solidFill>
                 <a:schemeClr val="dk1"/>
               </a:solidFill>
@@ -2707,6 +2831,9 @@
           </a:bodyPr>
           <a:p>
             <a:pPr marL="432000" indent="-324000">
+              <a:lnSpc>
+                <a:spcPct val="90000"/>
+              </a:lnSpc>
               <a:spcBef>
                 <a:spcPts val="1417"/>
               </a:spcBef>
@@ -2718,15 +2845,15 @@
               <a:buChar char=""/>
             </a:pPr>
             <a:r>
-              <a:rPr b="0" lang="fr-FR" sz="3200" spc="-1" strike="noStrike">
+              <a:rPr b="0" lang="en-US" sz="2800" spc="-1" strike="noStrike">
                 <a:solidFill>
                   <a:schemeClr val="dk1"/>
                 </a:solidFill>
                 <a:latin typeface="Aptos"/>
               </a:rPr>
-              <a:t>Cliquez pour éditer le format du plan de texte</a:t>
+              <a:t>Click to edit the outline text format</a:t>
             </a:r>
-            <a:endParaRPr b="0" lang="fr-FR" sz="3200" spc="-1" strike="noStrike">
+            <a:endParaRPr b="0" lang="en-US" sz="2800" spc="-1" strike="noStrike">
               <a:solidFill>
                 <a:schemeClr val="dk1"/>
               </a:solidFill>
@@ -2735,6 +2862,9 @@
           </a:p>
           <a:p>
             <a:pPr lvl="1" marL="864000" indent="-324000">
+              <a:lnSpc>
+                <a:spcPct val="90000"/>
+              </a:lnSpc>
               <a:spcBef>
                 <a:spcPts val="1134"/>
               </a:spcBef>
@@ -2746,15 +2876,15 @@
               <a:buChar char=""/>
             </a:pPr>
             <a:r>
-              <a:rPr b="0" lang="fr-FR" sz="2400" spc="-1" strike="noStrike">
+              <a:rPr b="0" lang="en-US" sz="2000" spc="-1" strike="noStrike">
                 <a:solidFill>
                   <a:schemeClr val="dk1"/>
                 </a:solidFill>
                 <a:latin typeface="Aptos"/>
               </a:rPr>
-              <a:t>Second niveau de plan</a:t>
+              <a:t>Second Outline Level</a:t>
             </a:r>
-            <a:endParaRPr b="0" lang="fr-FR" sz="2400" spc="-1" strike="noStrike">
+            <a:endParaRPr b="0" lang="en-US" sz="2000" spc="-1" strike="noStrike">
               <a:solidFill>
                 <a:schemeClr val="dk1"/>
               </a:solidFill>
@@ -2763,6 +2893,9 @@
           </a:p>
           <a:p>
             <a:pPr lvl="2" marL="1296000" indent="-288000">
+              <a:lnSpc>
+                <a:spcPct val="90000"/>
+              </a:lnSpc>
               <a:spcBef>
                 <a:spcPts val="850"/>
               </a:spcBef>
@@ -2774,15 +2907,15 @@
               <a:buChar char=""/>
             </a:pPr>
             <a:r>
-              <a:rPr b="0" lang="fr-FR" sz="2000" spc="-1" strike="noStrike">
+              <a:rPr b="0" lang="en-US" sz="1800" spc="-1" strike="noStrike">
                 <a:solidFill>
                   <a:schemeClr val="dk1"/>
                 </a:solidFill>
                 <a:latin typeface="Aptos"/>
               </a:rPr>
-              <a:t>Troisième niveau de plan</a:t>
+              <a:t>Third Outline Level</a:t>
             </a:r>
-            <a:endParaRPr b="0" lang="fr-FR" sz="2000" spc="-1" strike="noStrike">
+            <a:endParaRPr b="0" lang="en-US" sz="1800" spc="-1" strike="noStrike">
               <a:solidFill>
                 <a:schemeClr val="dk1"/>
               </a:solidFill>
@@ -2791,6 +2924,9 @@
           </a:p>
           <a:p>
             <a:pPr lvl="3" marL="1728000" indent="-216000">
+              <a:lnSpc>
+                <a:spcPct val="90000"/>
+              </a:lnSpc>
               <a:spcBef>
                 <a:spcPts val="567"/>
               </a:spcBef>
@@ -2802,15 +2938,15 @@
               <a:buChar char=""/>
             </a:pPr>
             <a:r>
-              <a:rPr b="0" lang="fr-FR" sz="2000" spc="-1" strike="noStrike">
+              <a:rPr b="0" lang="en-US" sz="1800" spc="-1" strike="noStrike">
                 <a:solidFill>
                   <a:schemeClr val="dk1"/>
                 </a:solidFill>
                 <a:latin typeface="Aptos"/>
               </a:rPr>
-              <a:t>Quatrième niveau de plan</a:t>
+              <a:t>Fourth Outline Level</a:t>
             </a:r>
-            <a:endParaRPr b="0" lang="fr-FR" sz="2000" spc="-1" strike="noStrike">
+            <a:endParaRPr b="0" lang="en-US" sz="1800" spc="-1" strike="noStrike">
               <a:solidFill>
                 <a:schemeClr val="dk1"/>
               </a:solidFill>
@@ -2819,6 +2955,9 @@
           </a:p>
           <a:p>
             <a:pPr lvl="4" marL="2160000" indent="-216000">
+              <a:lnSpc>
+                <a:spcPct val="90000"/>
+              </a:lnSpc>
               <a:spcBef>
                 <a:spcPts val="283"/>
               </a:spcBef>
@@ -2830,15 +2969,15 @@
               <a:buChar char=""/>
             </a:pPr>
             <a:r>
-              <a:rPr b="0" lang="fr-FR" sz="2000" spc="-1" strike="noStrike">
+              <a:rPr b="0" lang="en-US" sz="2000" spc="-1" strike="noStrike">
                 <a:solidFill>
                   <a:schemeClr val="dk1"/>
                 </a:solidFill>
                 <a:latin typeface="Aptos"/>
               </a:rPr>
-              <a:t>Cinquième niveau de plan</a:t>
+              <a:t>Fifth Outline Level</a:t>
             </a:r>
-            <a:endParaRPr b="0" lang="fr-FR" sz="2000" spc="-1" strike="noStrike">
+            <a:endParaRPr b="0" lang="en-US" sz="2000" spc="-1" strike="noStrike">
               <a:solidFill>
                 <a:schemeClr val="dk1"/>
               </a:solidFill>
@@ -2847,6 +2986,9 @@
           </a:p>
           <a:p>
             <a:pPr lvl="5" marL="2592000" indent="-216000">
+              <a:lnSpc>
+                <a:spcPct val="90000"/>
+              </a:lnSpc>
               <a:spcBef>
                 <a:spcPts val="283"/>
               </a:spcBef>
@@ -2858,15 +3000,15 @@
               <a:buChar char=""/>
             </a:pPr>
             <a:r>
-              <a:rPr b="0" lang="fr-FR" sz="2000" spc="-1" strike="noStrike">
+              <a:rPr b="0" lang="en-US" sz="2000" spc="-1" strike="noStrike">
                 <a:solidFill>
                   <a:schemeClr val="dk1"/>
                 </a:solidFill>
                 <a:latin typeface="Aptos"/>
               </a:rPr>
-              <a:t>Sixième niveau de plan</a:t>
+              <a:t>Sixth Outline Level</a:t>
             </a:r>
-            <a:endParaRPr b="0" lang="fr-FR" sz="2000" spc="-1" strike="noStrike">
+            <a:endParaRPr b="0" lang="en-US" sz="2000" spc="-1" strike="noStrike">
               <a:solidFill>
                 <a:schemeClr val="dk1"/>
               </a:solidFill>
@@ -2875,6 +3017,9 @@
           </a:p>
           <a:p>
             <a:pPr lvl="6" marL="3024000" indent="-216000">
+              <a:lnSpc>
+                <a:spcPct val="90000"/>
+              </a:lnSpc>
               <a:spcBef>
                 <a:spcPts val="283"/>
               </a:spcBef>
@@ -2886,15 +3031,15 @@
               <a:buChar char=""/>
             </a:pPr>
             <a:r>
-              <a:rPr b="0" lang="fr-FR" sz="2000" spc="-1" strike="noStrike">
+              <a:rPr b="0" lang="en-US" sz="2000" spc="-1" strike="noStrike">
                 <a:solidFill>
                   <a:schemeClr val="dk1"/>
                 </a:solidFill>
                 <a:latin typeface="Aptos"/>
               </a:rPr>
-              <a:t>Septième niveau de plan</a:t>
+              <a:t>Seventh Outline Level</a:t>
             </a:r>
-            <a:endParaRPr b="0" lang="fr-FR" sz="2000" spc="-1" strike="noStrike">
+            <a:endParaRPr b="0" lang="en-US" sz="2000" spc="-1" strike="noStrike">
               <a:solidFill>
                 <a:schemeClr val="dk1"/>
               </a:solidFill>
@@ -2938,7 +3083,7 @@
         <p:spPr>
           <a:xfrm>
             <a:off x="594360" y="1143000"/>
-            <a:ext cx="10972440" cy="4388760"/>
+            <a:ext cx="10972080" cy="4388400"/>
           </a:xfrm>
           <a:prstGeom prst="roundRect">
             <a:avLst>
@@ -2955,7 +3100,7 @@
             <a:round/>
           </a:ln>
           <a:effectLst>
-            <a:outerShdw algn="bl" blurRad="25560" dir="2700000" dist="12218" kx="0" ky="0" rotWithShape="0" sx="100000" sy="100000">
+            <a:outerShdw algn="bl" blurRad="25560" dir="2700000" dist="12218" rotWithShape="0">
               <a:srgbClr val="000000">
                 <a:alpha val="12000"/>
               </a:srgbClr>
@@ -2973,6 +3118,11 @@
             <a:noAutofit/>
           </a:bodyPr>
           <a:p>
+            <a:pPr defTabSz="914400">
+              <a:lnSpc>
+                <a:spcPct val="100000"/>
+              </a:lnSpc>
+            </a:pPr>
             <a:endParaRPr b="0" lang="fr-FR" sz="1800" spc="-1" strike="noStrike">
               <a:solidFill>
                 <a:srgbClr val="000000"/>
@@ -2991,7 +3141,7 @@
         <p:spPr>
           <a:xfrm>
             <a:off x="594360" y="1143000"/>
-            <a:ext cx="200880" cy="4388760"/>
+            <a:ext cx="200520" cy="4388400"/>
           </a:xfrm>
           <a:prstGeom prst="rect">
             <a:avLst/>
@@ -3017,6 +3167,11 @@
             <a:noAutofit/>
           </a:bodyPr>
           <a:p>
+            <a:pPr defTabSz="914400">
+              <a:lnSpc>
+                <a:spcPct val="100000"/>
+              </a:lnSpc>
+            </a:pPr>
             <a:endParaRPr b="0" lang="fr-FR" sz="1800" spc="-1" strike="noStrike">
               <a:solidFill>
                 <a:srgbClr val="ffffff"/>
@@ -3035,7 +3190,7 @@
         <p:spPr>
           <a:xfrm>
             <a:off x="960120" y="1554480"/>
-            <a:ext cx="6217560" cy="639720"/>
+            <a:ext cx="6217200" cy="639360"/>
           </a:xfrm>
           <a:prstGeom prst="rect">
             <a:avLst/>
@@ -3074,7 +3229,7 @@
               </a:rPr>
               <a:t>Meshtastic LoRa Room Server</a:t>
             </a:r>
-            <a:endParaRPr b="0" lang="fr-FR" sz="2600" spc="-1" strike="noStrike">
+            <a:endParaRPr b="0" lang="en-US" sz="2600" spc="-1" strike="noStrike">
               <a:solidFill>
                 <a:srgbClr val="000000"/>
               </a:solidFill>
@@ -3092,7 +3247,7 @@
         <p:spPr>
           <a:xfrm>
             <a:off x="987480" y="2240280"/>
-            <a:ext cx="5303160" cy="319680"/>
+            <a:ext cx="5302800" cy="319320"/>
           </a:xfrm>
           <a:prstGeom prst="rect">
             <a:avLst/>
@@ -3130,7 +3285,7 @@
               </a:rPr>
               <a:t>Soutenance finale · Projet Semestre S8</a:t>
             </a:r>
-            <a:endParaRPr b="0" lang="fr-FR" sz="1600" spc="-1" strike="noStrike">
+            <a:endParaRPr b="0" lang="en-US" sz="1600" spc="-1" strike="noStrike">
               <a:solidFill>
                 <a:srgbClr val="000000"/>
               </a:solidFill>
@@ -3148,7 +3303,7 @@
         <p:spPr>
           <a:xfrm>
             <a:off x="987480" y="2788920"/>
-            <a:ext cx="5668920" cy="914040"/>
+            <a:ext cx="5668560" cy="913680"/>
           </a:xfrm>
           <a:prstGeom prst="rect">
             <a:avLst/>
@@ -3186,7 +3341,7 @@
               </a:rPr>
               <a:t>Objectif : ajouter une couche applicative de salons persistants au-dessus du réseau mesh Meshtastic, avec une architecture légère, robuste et adaptée aux contraintes LoRa.</a:t>
             </a:r>
-            <a:endParaRPr b="0" lang="fr-FR" sz="1700" spc="-1" strike="noStrike">
+            <a:endParaRPr b="0" lang="en-US" sz="1700" spc="-1" strike="noStrike">
               <a:solidFill>
                 <a:srgbClr val="000000"/>
               </a:solidFill>
@@ -3204,7 +3359,7 @@
         <p:spPr>
           <a:xfrm>
             <a:off x="987480" y="4069080"/>
-            <a:ext cx="1508400" cy="319680"/>
+            <a:ext cx="1508040" cy="319320"/>
           </a:xfrm>
           <a:prstGeom prst="roundRect">
             <a:avLst>
@@ -3232,6 +3387,11 @@
             <a:noAutofit/>
           </a:bodyPr>
           <a:p>
+            <a:pPr defTabSz="914400">
+              <a:lnSpc>
+                <a:spcPct val="100000"/>
+              </a:lnSpc>
+            </a:pPr>
             <a:endParaRPr b="0" lang="fr-FR" sz="1800" spc="-1" strike="noStrike">
               <a:solidFill>
                 <a:srgbClr val="ffffff"/>
@@ -3250,7 +3410,7 @@
         <p:spPr>
           <a:xfrm>
             <a:off x="1060560" y="4123800"/>
-            <a:ext cx="1362240" cy="164160"/>
+            <a:ext cx="1361880" cy="163800"/>
           </a:xfrm>
           <a:prstGeom prst="rect">
             <a:avLst/>
@@ -3288,7 +3448,7 @@
               </a:rPr>
               <a:t>INFO4 2025-2026</a:t>
             </a:r>
-            <a:endParaRPr b="0" lang="fr-FR" sz="1000" spc="-1" strike="noStrike">
+            <a:endParaRPr b="0" lang="en-US" sz="1000" spc="-1" strike="noStrike">
               <a:solidFill>
                 <a:srgbClr val="000000"/>
               </a:solidFill>
@@ -3306,7 +3466,7 @@
         <p:spPr>
           <a:xfrm>
             <a:off x="2633400" y="4069080"/>
-            <a:ext cx="1416960" cy="319680"/>
+            <a:ext cx="1416600" cy="319320"/>
           </a:xfrm>
           <a:prstGeom prst="roundRect">
             <a:avLst>
@@ -3334,6 +3494,11 @@
             <a:noAutofit/>
           </a:bodyPr>
           <a:p>
+            <a:pPr defTabSz="914400">
+              <a:lnSpc>
+                <a:spcPct val="100000"/>
+              </a:lnSpc>
+            </a:pPr>
             <a:endParaRPr b="0" lang="fr-FR" sz="1800" spc="-1" strike="noStrike">
               <a:solidFill>
                 <a:srgbClr val="ffffff"/>
@@ -3352,7 +3517,7 @@
         <p:spPr>
           <a:xfrm>
             <a:off x="2706480" y="4123800"/>
-            <a:ext cx="1270800" cy="164160"/>
+            <a:ext cx="1270440" cy="163800"/>
           </a:xfrm>
           <a:prstGeom prst="rect">
             <a:avLst/>
@@ -3390,7 +3555,7 @@
               </a:rPr>
               <a:t>Polytech</a:t>
             </a:r>
-            <a:endParaRPr b="0" lang="fr-FR" sz="1000" spc="-1" strike="noStrike">
+            <a:endParaRPr b="0" lang="en-US" sz="1000" spc="-1" strike="noStrike">
               <a:solidFill>
                 <a:srgbClr val="000000"/>
               </a:solidFill>
@@ -3408,7 +3573,7 @@
         <p:spPr>
           <a:xfrm>
             <a:off x="4187880" y="4069080"/>
-            <a:ext cx="1965600" cy="319680"/>
+            <a:ext cx="1965240" cy="319320"/>
           </a:xfrm>
           <a:prstGeom prst="roundRect">
             <a:avLst>
@@ -3436,6 +3601,11 @@
             <a:noAutofit/>
           </a:bodyPr>
           <a:p>
+            <a:pPr defTabSz="914400">
+              <a:lnSpc>
+                <a:spcPct val="100000"/>
+              </a:lnSpc>
+            </a:pPr>
             <a:endParaRPr b="0" lang="fr-FR" sz="1800" spc="-1" strike="noStrike">
               <a:solidFill>
                 <a:srgbClr val="ffffff"/>
@@ -3453,8 +3623,8 @@
         </p:nvSpPr>
         <p:spPr>
           <a:xfrm>
-            <a:off x="4260960" y="4123800"/>
-            <a:ext cx="1819440" cy="164160"/>
+            <a:off x="3976920" y="4123800"/>
+            <a:ext cx="2368440" cy="163800"/>
           </a:xfrm>
           <a:prstGeom prst="rect">
             <a:avLst/>
@@ -3484,6 +3654,15 @@
               </a:tabLst>
             </a:pPr>
             <a:r>
+              <a:rPr b="1" lang="fr-FR" sz="1000" spc="-1" strike="noStrike">
+                <a:solidFill>
+                  <a:srgbClr val="ffffff"/>
+                </a:solidFill>
+                <a:latin typeface="Aptos"/>
+              </a:rPr>
+              <a:t>Encadrant : </a:t>
+            </a:r>
+            <a:r>
               <a:rPr b="1" lang="en-US" sz="1000" spc="-1" strike="noStrike">
                 <a:solidFill>
                   <a:srgbClr val="ffffff"/>
@@ -3492,7 +3671,7 @@
               </a:rPr>
               <a:t>Francois Letellier</a:t>
             </a:r>
-            <a:endParaRPr b="0" lang="fr-FR" sz="1000" spc="-1" strike="noStrike">
+            <a:endParaRPr b="0" lang="en-US" sz="1000" spc="-1" strike="noStrike">
               <a:solidFill>
                 <a:srgbClr val="000000"/>
               </a:solidFill>
@@ -3510,7 +3689,7 @@
         <p:spPr>
           <a:xfrm>
             <a:off x="7315200" y="1554480"/>
-            <a:ext cx="3611520" cy="3200040"/>
+            <a:ext cx="3611160" cy="3199680"/>
           </a:xfrm>
           <a:prstGeom prst="roundRect">
             <a:avLst>
@@ -3538,7 +3717,103 @@
             <a:noAutofit/>
           </a:bodyPr>
           <a:p>
-            <a:endParaRPr b="0" lang="fr-FR" sz="1800" spc="-1" strike="noStrike">
+            <a:pPr defTabSz="914400">
+              <a:lnSpc>
+                <a:spcPct val="100000"/>
+              </a:lnSpc>
+            </a:pPr>
+            <a:endParaRPr b="0" lang="en-US" sz="1800" spc="-1" strike="noStrike">
+              <a:solidFill>
+                <a:srgbClr val="000000"/>
+              </a:solidFill>
+              <a:latin typeface="Arial"/>
+            </a:endParaRPr>
+          </a:p>
+          <a:p>
+            <a:pPr defTabSz="914400">
+              <a:lnSpc>
+                <a:spcPct val="100000"/>
+              </a:lnSpc>
+            </a:pPr>
+            <a:endParaRPr b="0" lang="en-US" sz="1800" spc="-1" strike="noStrike">
+              <a:solidFill>
+                <a:srgbClr val="000000"/>
+              </a:solidFill>
+              <a:latin typeface="Arial"/>
+            </a:endParaRPr>
+          </a:p>
+          <a:p>
+            <a:pPr defTabSz="914400">
+              <a:lnSpc>
+                <a:spcPct val="100000"/>
+              </a:lnSpc>
+            </a:pPr>
+            <a:endParaRPr b="0" lang="en-US" sz="1800" spc="-1" strike="noStrike">
+              <a:solidFill>
+                <a:srgbClr val="000000"/>
+              </a:solidFill>
+              <a:latin typeface="Arial"/>
+            </a:endParaRPr>
+          </a:p>
+          <a:p>
+            <a:pPr defTabSz="914400">
+              <a:lnSpc>
+                <a:spcPct val="100000"/>
+              </a:lnSpc>
+            </a:pPr>
+            <a:endParaRPr b="0" lang="en-US" sz="1800" spc="-1" strike="noStrike">
+              <a:solidFill>
+                <a:srgbClr val="000000"/>
+              </a:solidFill>
+              <a:latin typeface="Arial"/>
+            </a:endParaRPr>
+          </a:p>
+          <a:p>
+            <a:pPr defTabSz="914400">
+              <a:lnSpc>
+                <a:spcPct val="100000"/>
+              </a:lnSpc>
+            </a:pPr>
+            <a:endParaRPr b="0" lang="en-US" sz="1800" spc="-1" strike="noStrike">
+              <a:solidFill>
+                <a:srgbClr val="000000"/>
+              </a:solidFill>
+              <a:latin typeface="Arial"/>
+            </a:endParaRPr>
+          </a:p>
+          <a:p>
+            <a:pPr defTabSz="914400">
+              <a:lnSpc>
+                <a:spcPct val="100000"/>
+              </a:lnSpc>
+            </a:pPr>
+            <a:endParaRPr b="0" lang="en-US" sz="1800" spc="-1" strike="noStrike">
+              <a:solidFill>
+                <a:srgbClr val="000000"/>
+              </a:solidFill>
+              <a:latin typeface="Arial"/>
+            </a:endParaRPr>
+          </a:p>
+          <a:p>
+            <a:pPr defTabSz="914400">
+              <a:lnSpc>
+                <a:spcPct val="100000"/>
+              </a:lnSpc>
+            </a:pPr>
+            <a:endParaRPr b="0" lang="en-US" sz="1800" spc="-1" strike="noStrike">
+              <a:solidFill>
+                <a:srgbClr val="000000"/>
+              </a:solidFill>
+              <a:latin typeface="Arial"/>
+            </a:endParaRPr>
+          </a:p>
+          <a:p>
+            <a:pPr defTabSz="914400">
+              <a:lnSpc>
+                <a:spcPct val="100000"/>
+              </a:lnSpc>
+            </a:pPr>
+            <a:endParaRPr b="0" lang="en-US" sz="1800" spc="-1" strike="noStrike">
               <a:solidFill>
                 <a:srgbClr val="000000"/>
               </a:solidFill>
@@ -3556,7 +3831,7 @@
         <p:spPr>
           <a:xfrm>
             <a:off x="7589520" y="1920240"/>
-            <a:ext cx="914040" cy="273960"/>
+            <a:ext cx="913680" cy="273600"/>
           </a:xfrm>
           <a:prstGeom prst="rect">
             <a:avLst/>
@@ -3594,7 +3869,7 @@
               </a:rPr>
               <a:t>Équipe</a:t>
             </a:r>
-            <a:endParaRPr b="0" lang="fr-FR" sz="1600" spc="-1" strike="noStrike">
+            <a:endParaRPr b="0" lang="en-US" sz="1600" spc="-1" strike="noStrike">
               <a:solidFill>
                 <a:srgbClr val="000000"/>
               </a:solidFill>
@@ -3612,7 +3887,7 @@
         <p:spPr>
           <a:xfrm>
             <a:off x="7589520" y="2331720"/>
-            <a:ext cx="2102760" cy="731160"/>
+            <a:ext cx="2102400" cy="730800"/>
           </a:xfrm>
           <a:prstGeom prst="rect">
             <a:avLst/>
@@ -3650,7 +3925,7 @@
               </a:rPr>
               <a:t>TAWFIK Adam</a:t>
             </a:r>
-            <a:endParaRPr b="0" lang="fr-FR" sz="2200" spc="-1" strike="noStrike">
+            <a:endParaRPr b="0" lang="en-US" sz="2200" spc="-1" strike="noStrike">
               <a:solidFill>
                 <a:srgbClr val="000000"/>
               </a:solidFill>
@@ -3675,7 +3950,7 @@
               </a:rPr>
               <a:t>UNAY Arhan</a:t>
             </a:r>
-            <a:endParaRPr b="0" lang="fr-FR" sz="2200" spc="-1" strike="noStrike">
+            <a:endParaRPr b="0" lang="en-US" sz="2200" spc="-1" strike="noStrike">
               <a:solidFill>
                 <a:srgbClr val="000000"/>
               </a:solidFill>
@@ -3693,7 +3968,7 @@
         <p:spPr>
           <a:xfrm>
             <a:off x="7589520" y="3794760"/>
-            <a:ext cx="1919880" cy="273960"/>
+            <a:ext cx="1919520" cy="273600"/>
           </a:xfrm>
           <a:prstGeom prst="rect">
             <a:avLst/>
@@ -3731,7 +4006,7 @@
               </a:rPr>
               <a:t>Mars 2026</a:t>
             </a:r>
-            <a:endParaRPr b="0" lang="fr-FR" sz="1500" spc="-1" strike="noStrike">
+            <a:endParaRPr b="0" lang="en-US" sz="1500" spc="-1" strike="noStrike">
               <a:solidFill>
                 <a:srgbClr val="000000"/>
               </a:solidFill>
@@ -3749,7 +4024,7 @@
         <p:spPr>
           <a:xfrm>
             <a:off x="10195560" y="2148840"/>
-            <a:ext cx="822600" cy="1554120"/>
+            <a:ext cx="822240" cy="1553760"/>
           </a:xfrm>
           <a:prstGeom prst="rect">
             <a:avLst/>
@@ -3800,7 +4075,7 @@
         <p:spPr>
           <a:xfrm>
             <a:off x="11750040" y="6583680"/>
-            <a:ext cx="228240" cy="182520"/>
+            <a:ext cx="227880" cy="182160"/>
           </a:xfrm>
           <a:prstGeom prst="rect">
             <a:avLst/>
@@ -3820,6 +4095,9 @@
                 <a:spcPct val="100000"/>
               </a:lnSpc>
               <a:buNone/>
+              <a:tabLst>
+                <a:tab algn="l" pos="0"/>
+              </a:tabLst>
               <a:defRPr b="0" lang="en-US" sz="1000" spc="-1" strike="noStrike">
                 <a:solidFill>
                   <a:srgbClr val="ffffff"/>
@@ -3834,17 +4112,20 @@
                 <a:spcPct val="100000"/>
               </a:lnSpc>
               <a:buNone/>
-            </a:pPr>
-            <a:fld id="{FAD037EF-8022-48D2-919A-1284802A2A79}" type="slidenum">
+              <a:tabLst>
+                <a:tab algn="l" pos="0"/>
+              </a:tabLst>
+            </a:pPr>
+            <a:fld id="{0A30BDCB-2A51-4E67-84B1-99E86F95F2F5}" type="slidenum">
               <a:rPr b="0" lang="en-US" sz="1000" spc="-1" strike="noStrike">
                 <a:solidFill>
                   <a:srgbClr val="ffffff"/>
                 </a:solidFill>
                 <a:latin typeface="Aptos"/>
               </a:rPr>
-              <a:t>&lt;numéro&gt;</a:t>
+              <a:t>&lt;number&gt;</a:t>
             </a:fld>
-            <a:endParaRPr b="0" lang="fr-FR" sz="1000" spc="-1" strike="noStrike">
+            <a:endParaRPr b="0" lang="en-US" sz="1000" spc="-1" strike="noStrike">
               <a:solidFill>
                 <a:srgbClr val="000000"/>
               </a:solidFill>
@@ -3853,14 +4134,64 @@
           </a:p>
         </p:txBody>
       </p:sp>
+      <p:pic>
+        <p:nvPicPr>
+          <p:cNvPr id="30" name="Picture 3" descr=""/>
+          <p:cNvPicPr/>
+          <p:nvPr/>
+        </p:nvPicPr>
+        <p:blipFill>
+          <a:blip r:embed="rId1"/>
+          <a:stretch/>
+        </p:blipFill>
+        <p:spPr>
+          <a:xfrm>
+            <a:off x="77760" y="273600"/>
+            <a:ext cx="1920240" cy="640080"/>
+          </a:xfrm>
+          <a:prstGeom prst="rect">
+            <a:avLst/>
+          </a:prstGeom>
+          <a:ln w="0">
+            <a:noFill/>
+          </a:ln>
+        </p:spPr>
+      </p:pic>
+      <p:pic>
+        <p:nvPicPr>
+          <p:cNvPr id="31" name="Picture 4" descr=""/>
+          <p:cNvPicPr/>
+          <p:nvPr/>
+        </p:nvPicPr>
+        <p:blipFill>
+          <a:blip r:embed="rId2"/>
+          <a:stretch/>
+        </p:blipFill>
+        <p:spPr>
+          <a:xfrm>
+            <a:off x="5214600" y="1238400"/>
+            <a:ext cx="1880280" cy="1252800"/>
+          </a:xfrm>
+          <a:prstGeom prst="rect">
+            <a:avLst/>
+          </a:prstGeom>
+          <a:ln w="0">
+            <a:noFill/>
+          </a:ln>
+        </p:spPr>
+      </p:pic>
     </p:spTree>
   </p:cSld>
   <mc:AlternateContent>
     <mc:Choice Requires="p14">
-      <p:transition spd="slow" p14:dur="2000"/>
+      <p:transition spd="med" p14:dur="800">
+        <p:circle/>
+      </p:transition>
     </mc:Choice>
     <mc:Fallback>
-      <p:transition spd="slow"/>
+      <p:transition spd="med">
+        <p:circle/>
+      </p:transition>
     </mc:Fallback>
   </mc:AlternateContent>
 </p:sld>
@@ -3885,14 +4216,14 @@
       </p:grpSpPr>
       <p:sp>
         <p:nvSpPr>
-          <p:cNvPr id="30" name="Text 0"/>
+          <p:cNvPr id="32" name="Text 0"/>
           <p:cNvSpPr/>
           <p:nvPr/>
         </p:nvSpPr>
         <p:spPr>
           <a:xfrm>
             <a:off x="502920" y="411480"/>
-            <a:ext cx="7131960" cy="411120"/>
+            <a:ext cx="7131600" cy="410760"/>
           </a:xfrm>
           <a:prstGeom prst="rect">
             <a:avLst/>
@@ -3931,25 +4262,25 @@
               </a:rPr>
               <a:t>Contexte et besoin</a:t>
             </a:r>
-            <a:endParaRPr b="0" lang="fr-FR" sz="2400" spc="-1" strike="noStrike">
-              <a:solidFill>
-                <a:srgbClr val="000000"/>
-              </a:solidFill>
-              <a:latin typeface="Arial"/>
-            </a:endParaRPr>
-          </a:p>
-        </p:txBody>
-      </p:sp>
-      <p:sp>
-        <p:nvSpPr>
-          <p:cNvPr id="31" name="Text 1"/>
+            <a:endParaRPr b="0" lang="en-US" sz="2400" spc="-1" strike="noStrike">
+              <a:solidFill>
+                <a:srgbClr val="000000"/>
+              </a:solidFill>
+              <a:latin typeface="Arial"/>
+            </a:endParaRPr>
+          </a:p>
+        </p:txBody>
+      </p:sp>
+      <p:sp>
+        <p:nvSpPr>
+          <p:cNvPr id="33" name="Text 1"/>
           <p:cNvSpPr/>
           <p:nvPr/>
         </p:nvSpPr>
         <p:spPr>
           <a:xfrm>
             <a:off x="530280" y="841320"/>
-            <a:ext cx="7954920" cy="228240"/>
+            <a:ext cx="7954560" cy="227880"/>
           </a:xfrm>
           <a:prstGeom prst="rect">
             <a:avLst/>
@@ -3987,25 +4318,25 @@
               </a:rPr>
               <a:t>Pourquoi ce projet est utile dans un réseau LoRa mesh</a:t>
             </a:r>
-            <a:endParaRPr b="0" lang="fr-FR" sz="1050" spc="-1" strike="noStrike">
-              <a:solidFill>
-                <a:srgbClr val="000000"/>
-              </a:solidFill>
-              <a:latin typeface="Arial"/>
-            </a:endParaRPr>
-          </a:p>
-        </p:txBody>
-      </p:sp>
-      <p:sp>
-        <p:nvSpPr>
-          <p:cNvPr id="32" name="Shape 2"/>
+            <a:endParaRPr b="0" lang="en-US" sz="1050" spc="-1" strike="noStrike">
+              <a:solidFill>
+                <a:srgbClr val="000000"/>
+              </a:solidFill>
+              <a:latin typeface="Arial"/>
+            </a:endParaRPr>
+          </a:p>
+        </p:txBody>
+      </p:sp>
+      <p:sp>
+        <p:nvSpPr>
+          <p:cNvPr id="34" name="Shape 2"/>
           <p:cNvSpPr/>
           <p:nvPr/>
         </p:nvSpPr>
         <p:spPr>
           <a:xfrm>
             <a:off x="640080" y="1325880"/>
-            <a:ext cx="3657240" cy="1965600"/>
+            <a:ext cx="3656880" cy="1965240"/>
           </a:xfrm>
           <a:prstGeom prst="roundRect">
             <a:avLst>
@@ -4022,7 +4353,7 @@
             <a:round/>
           </a:ln>
           <a:effectLst>
-            <a:outerShdw algn="bl" blurRad="12600" dir="2700000" dist="6109" kx="0" ky="0" rotWithShape="0" sx="100000" sy="100000">
+            <a:outerShdw algn="bl" blurRad="12600" dir="2700000" dist="6109" rotWithShape="0">
               <a:srgbClr val="000000">
                 <a:alpha val="10000"/>
               </a:srgbClr>
@@ -4040,6 +4371,11 @@
             <a:noAutofit/>
           </a:bodyPr>
           <a:p>
+            <a:pPr defTabSz="914400">
+              <a:lnSpc>
+                <a:spcPct val="100000"/>
+              </a:lnSpc>
+            </a:pPr>
             <a:endParaRPr b="0" lang="fr-FR" sz="1800" spc="-1" strike="noStrike">
               <a:solidFill>
                 <a:srgbClr val="000000"/>
@@ -4051,14 +4387,14 @@
       </p:sp>
       <p:sp>
         <p:nvSpPr>
-          <p:cNvPr id="33" name="Text 3"/>
+          <p:cNvPr id="35" name="Text 3"/>
           <p:cNvSpPr/>
           <p:nvPr/>
         </p:nvSpPr>
         <p:spPr>
           <a:xfrm>
             <a:off x="777240" y="1463040"/>
-            <a:ext cx="3382920" cy="219240"/>
+            <a:ext cx="3382560" cy="218880"/>
           </a:xfrm>
           <a:prstGeom prst="rect">
             <a:avLst/>
@@ -4096,25 +4432,25 @@
               </a:rPr>
               <a:t>Constat initial</a:t>
             </a:r>
-            <a:endParaRPr b="0" lang="fr-FR" sz="1400" spc="-1" strike="noStrike">
-              <a:solidFill>
-                <a:srgbClr val="000000"/>
-              </a:solidFill>
-              <a:latin typeface="Arial"/>
-            </a:endParaRPr>
-          </a:p>
-        </p:txBody>
-      </p:sp>
-      <p:sp>
-        <p:nvSpPr>
-          <p:cNvPr id="34" name="Text 4"/>
+            <a:endParaRPr b="0" lang="en-US" sz="1400" spc="-1" strike="noStrike">
+              <a:solidFill>
+                <a:srgbClr val="000000"/>
+              </a:solidFill>
+              <a:latin typeface="Arial"/>
+            </a:endParaRPr>
+          </a:p>
+        </p:txBody>
+      </p:sp>
+      <p:sp>
+        <p:nvSpPr>
+          <p:cNvPr id="36" name="Text 4"/>
           <p:cNvSpPr/>
           <p:nvPr/>
         </p:nvSpPr>
         <p:spPr>
           <a:xfrm>
             <a:off x="777240" y="1737360"/>
-            <a:ext cx="3382920" cy="1435320"/>
+            <a:ext cx="3382560" cy="1434960"/>
           </a:xfrm>
           <a:prstGeom prst="rect">
             <a:avLst/>
@@ -4152,25 +4488,25 @@
               </a:rPr>
               <a:t>Meshtastic permet surtout de la messagerie texte diffuse. En revanche, il ne fournit pas nativement de salons persistants, d’historique structuré ni d’organisation des échanges.</a:t>
             </a:r>
-            <a:endParaRPr b="0" lang="fr-FR" sz="1150" spc="-1" strike="noStrike">
-              <a:solidFill>
-                <a:srgbClr val="000000"/>
-              </a:solidFill>
-              <a:latin typeface="Arial"/>
-            </a:endParaRPr>
-          </a:p>
-        </p:txBody>
-      </p:sp>
-      <p:sp>
-        <p:nvSpPr>
-          <p:cNvPr id="35" name="Shape 5"/>
+            <a:endParaRPr b="0" lang="en-US" sz="1150" spc="-1" strike="noStrike">
+              <a:solidFill>
+                <a:srgbClr val="000000"/>
+              </a:solidFill>
+              <a:latin typeface="Arial"/>
+            </a:endParaRPr>
+          </a:p>
+        </p:txBody>
+      </p:sp>
+      <p:sp>
+        <p:nvSpPr>
+          <p:cNvPr id="37" name="Shape 5"/>
           <p:cNvSpPr/>
           <p:nvPr/>
         </p:nvSpPr>
         <p:spPr>
           <a:xfrm>
             <a:off x="4526280" y="1325880"/>
-            <a:ext cx="3245760" cy="1965600"/>
+            <a:ext cx="3245400" cy="1965240"/>
           </a:xfrm>
           <a:prstGeom prst="roundRect">
             <a:avLst>
@@ -4187,7 +4523,7 @@
             <a:round/>
           </a:ln>
           <a:effectLst>
-            <a:outerShdw algn="bl" blurRad="12600" dir="2700000" dist="6109" kx="0" ky="0" rotWithShape="0" sx="100000" sy="100000">
+            <a:outerShdw algn="bl" blurRad="12600" dir="2700000" dist="6109" rotWithShape="0">
               <a:srgbClr val="000000">
                 <a:alpha val="10000"/>
               </a:srgbClr>
@@ -4205,6 +4541,11 @@
             <a:noAutofit/>
           </a:bodyPr>
           <a:p>
+            <a:pPr defTabSz="914400">
+              <a:lnSpc>
+                <a:spcPct val="100000"/>
+              </a:lnSpc>
+            </a:pPr>
             <a:endParaRPr b="0" lang="fr-FR" sz="1800" spc="-1" strike="noStrike">
               <a:solidFill>
                 <a:srgbClr val="000000"/>
@@ -4216,14 +4557,14 @@
       </p:sp>
       <p:sp>
         <p:nvSpPr>
-          <p:cNvPr id="36" name="Text 6"/>
+          <p:cNvPr id="38" name="Text 6"/>
           <p:cNvSpPr/>
           <p:nvPr/>
         </p:nvSpPr>
         <p:spPr>
           <a:xfrm>
             <a:off x="4663440" y="1463040"/>
-            <a:ext cx="2971440" cy="219240"/>
+            <a:ext cx="2971080" cy="218880"/>
           </a:xfrm>
           <a:prstGeom prst="rect">
             <a:avLst/>
@@ -4261,25 +4602,25 @@
               </a:rPr>
               <a:t>Besoin identifié</a:t>
             </a:r>
-            <a:endParaRPr b="0" lang="fr-FR" sz="1400" spc="-1" strike="noStrike">
-              <a:solidFill>
-                <a:srgbClr val="000000"/>
-              </a:solidFill>
-              <a:latin typeface="Arial"/>
-            </a:endParaRPr>
-          </a:p>
-        </p:txBody>
-      </p:sp>
-      <p:sp>
-        <p:nvSpPr>
-          <p:cNvPr id="37" name="Text 7"/>
+            <a:endParaRPr b="0" lang="en-US" sz="1400" spc="-1" strike="noStrike">
+              <a:solidFill>
+                <a:srgbClr val="000000"/>
+              </a:solidFill>
+              <a:latin typeface="Arial"/>
+            </a:endParaRPr>
+          </a:p>
+        </p:txBody>
+      </p:sp>
+      <p:sp>
+        <p:nvSpPr>
+          <p:cNvPr id="39" name="Text 7"/>
           <p:cNvSpPr/>
           <p:nvPr/>
         </p:nvSpPr>
         <p:spPr>
           <a:xfrm>
             <a:off x="4663440" y="1737360"/>
-            <a:ext cx="2971440" cy="1435320"/>
+            <a:ext cx="2971080" cy="1434960"/>
           </a:xfrm>
           <a:prstGeom prst="rect">
             <a:avLst/>
@@ -4317,25 +4658,25 @@
               </a:rPr>
               <a:t>Permettre à des utilisateurs de créer des rooms, publier des messages et relire un historique, même après redémarrage du serveur.</a:t>
             </a:r>
-            <a:endParaRPr b="0" lang="fr-FR" sz="1150" spc="-1" strike="noStrike">
-              <a:solidFill>
-                <a:srgbClr val="000000"/>
-              </a:solidFill>
-              <a:latin typeface="Arial"/>
-            </a:endParaRPr>
-          </a:p>
-        </p:txBody>
-      </p:sp>
-      <p:sp>
-        <p:nvSpPr>
-          <p:cNvPr id="38" name="Shape 8"/>
+            <a:endParaRPr b="0" lang="en-US" sz="1150" spc="-1" strike="noStrike">
+              <a:solidFill>
+                <a:srgbClr val="000000"/>
+              </a:solidFill>
+              <a:latin typeface="Arial"/>
+            </a:endParaRPr>
+          </a:p>
+        </p:txBody>
+      </p:sp>
+      <p:sp>
+        <p:nvSpPr>
+          <p:cNvPr id="40" name="Shape 8"/>
           <p:cNvSpPr/>
           <p:nvPr/>
         </p:nvSpPr>
         <p:spPr>
           <a:xfrm>
             <a:off x="8001000" y="1325880"/>
-            <a:ext cx="3520080" cy="1965600"/>
+            <a:ext cx="3519720" cy="1965240"/>
           </a:xfrm>
           <a:prstGeom prst="roundRect">
             <a:avLst>
@@ -4352,7 +4693,7 @@
             <a:round/>
           </a:ln>
           <a:effectLst>
-            <a:outerShdw algn="bl" blurRad="12600" dir="2700000" dist="6109" kx="0" ky="0" rotWithShape="0" sx="100000" sy="100000">
+            <a:outerShdw algn="bl" blurRad="12600" dir="2700000" dist="6109" rotWithShape="0">
               <a:srgbClr val="000000">
                 <a:alpha val="10000"/>
               </a:srgbClr>
@@ -4370,6 +4711,11 @@
             <a:noAutofit/>
           </a:bodyPr>
           <a:p>
+            <a:pPr defTabSz="914400">
+              <a:lnSpc>
+                <a:spcPct val="100000"/>
+              </a:lnSpc>
+            </a:pPr>
             <a:endParaRPr b="0" lang="fr-FR" sz="1800" spc="-1" strike="noStrike">
               <a:solidFill>
                 <a:srgbClr val="000000"/>
@@ -4381,14 +4727,14 @@
       </p:sp>
       <p:sp>
         <p:nvSpPr>
-          <p:cNvPr id="39" name="Text 9"/>
+          <p:cNvPr id="41" name="Text 9"/>
           <p:cNvSpPr/>
           <p:nvPr/>
         </p:nvSpPr>
         <p:spPr>
           <a:xfrm>
             <a:off x="8138160" y="1463040"/>
-            <a:ext cx="3245760" cy="219240"/>
+            <a:ext cx="3245400" cy="218880"/>
           </a:xfrm>
           <a:prstGeom prst="rect">
             <a:avLst/>
@@ -4426,25 +4772,25 @@
               </a:rPr>
               <a:t>Contexte d’usage</a:t>
             </a:r>
-            <a:endParaRPr b="0" lang="fr-FR" sz="1400" spc="-1" strike="noStrike">
-              <a:solidFill>
-                <a:srgbClr val="000000"/>
-              </a:solidFill>
-              <a:latin typeface="Arial"/>
-            </a:endParaRPr>
-          </a:p>
-        </p:txBody>
-      </p:sp>
-      <p:sp>
-        <p:nvSpPr>
-          <p:cNvPr id="40" name="Text 10"/>
+            <a:endParaRPr b="0" lang="en-US" sz="1400" spc="-1" strike="noStrike">
+              <a:solidFill>
+                <a:srgbClr val="000000"/>
+              </a:solidFill>
+              <a:latin typeface="Arial"/>
+            </a:endParaRPr>
+          </a:p>
+        </p:txBody>
+      </p:sp>
+      <p:sp>
+        <p:nvSpPr>
+          <p:cNvPr id="42" name="Text 10"/>
           <p:cNvSpPr/>
           <p:nvPr/>
         </p:nvSpPr>
         <p:spPr>
           <a:xfrm>
             <a:off x="8138160" y="1737360"/>
-            <a:ext cx="3245760" cy="1435320"/>
+            <a:ext cx="3245400" cy="1434960"/>
           </a:xfrm>
           <a:prstGeom prst="rect">
             <a:avLst/>
@@ -4482,25 +4828,25 @@
               </a:rPr>
               <a:t>Scénarios à infrastructure limitée : terrain, zones isolées, environnement dégradé ou besoin d’un service compact autonome.</a:t>
             </a:r>
-            <a:endParaRPr b="0" lang="fr-FR" sz="1150" spc="-1" strike="noStrike">
-              <a:solidFill>
-                <a:srgbClr val="000000"/>
-              </a:solidFill>
-              <a:latin typeface="Arial"/>
-            </a:endParaRPr>
-          </a:p>
-        </p:txBody>
-      </p:sp>
-      <p:sp>
-        <p:nvSpPr>
-          <p:cNvPr id="41" name="Shape 11"/>
+            <a:endParaRPr b="0" lang="en-US" sz="1150" spc="-1" strike="noStrike">
+              <a:solidFill>
+                <a:srgbClr val="000000"/>
+              </a:solidFill>
+              <a:latin typeface="Arial"/>
+            </a:endParaRPr>
+          </a:p>
+        </p:txBody>
+      </p:sp>
+      <p:sp>
+        <p:nvSpPr>
+          <p:cNvPr id="43" name="Shape 11"/>
           <p:cNvSpPr/>
           <p:nvPr/>
         </p:nvSpPr>
         <p:spPr>
           <a:xfrm>
             <a:off x="540000" y="3749040"/>
-            <a:ext cx="1980000" cy="502560"/>
+            <a:ext cx="1979640" cy="502200"/>
           </a:xfrm>
           <a:prstGeom prst="chevron">
             <a:avLst>
@@ -4528,6 +4874,11 @@
             <a:noAutofit/>
           </a:bodyPr>
           <a:p>
+            <a:pPr defTabSz="914400">
+              <a:lnSpc>
+                <a:spcPct val="100000"/>
+              </a:lnSpc>
+            </a:pPr>
             <a:endParaRPr b="0" lang="fr-FR" sz="1800" spc="-1" strike="noStrike">
               <a:solidFill>
                 <a:srgbClr val="ffffff"/>
@@ -4539,14 +4890,14 @@
       </p:sp>
       <p:sp>
         <p:nvSpPr>
-          <p:cNvPr id="42" name="Shape 12"/>
+          <p:cNvPr id="44" name="Shape 12"/>
           <p:cNvSpPr/>
           <p:nvPr/>
         </p:nvSpPr>
         <p:spPr>
           <a:xfrm>
             <a:off x="2323080" y="3749040"/>
-            <a:ext cx="1816920" cy="502560"/>
+            <a:ext cx="1816560" cy="502200"/>
           </a:xfrm>
           <a:prstGeom prst="chevron">
             <a:avLst>
@@ -4574,6 +4925,11 @@
             <a:noAutofit/>
           </a:bodyPr>
           <a:p>
+            <a:pPr defTabSz="914400">
+              <a:lnSpc>
+                <a:spcPct val="100000"/>
+              </a:lnSpc>
+            </a:pPr>
             <a:endParaRPr b="0" lang="fr-FR" sz="1800" spc="-1" strike="noStrike">
               <a:solidFill>
                 <a:srgbClr val="ffffff"/>
@@ -4585,14 +4941,14 @@
       </p:sp>
       <p:sp>
         <p:nvSpPr>
-          <p:cNvPr id="43" name="Shape 13"/>
+          <p:cNvPr id="45" name="Shape 13"/>
           <p:cNvSpPr/>
           <p:nvPr/>
         </p:nvSpPr>
         <p:spPr>
           <a:xfrm>
             <a:off x="3960000" y="3780000"/>
-            <a:ext cx="1800000" cy="471600"/>
+            <a:ext cx="1799640" cy="471240"/>
           </a:xfrm>
           <a:prstGeom prst="chevron">
             <a:avLst>
@@ -4620,6 +4976,11 @@
             <a:noAutofit/>
           </a:bodyPr>
           <a:p>
+            <a:pPr defTabSz="914400">
+              <a:lnSpc>
+                <a:spcPct val="100000"/>
+              </a:lnSpc>
+            </a:pPr>
             <a:endParaRPr b="0" lang="fr-FR" sz="1800" spc="-1" strike="noStrike">
               <a:solidFill>
                 <a:srgbClr val="ffffff"/>
@@ -4631,14 +4992,14 @@
       </p:sp>
       <p:sp>
         <p:nvSpPr>
-          <p:cNvPr id="44" name="Text 14"/>
+          <p:cNvPr id="46" name="Text 14"/>
           <p:cNvSpPr/>
           <p:nvPr/>
         </p:nvSpPr>
         <p:spPr>
           <a:xfrm>
-            <a:off x="713160" y="3840480"/>
-            <a:ext cx="1234080" cy="182520"/>
+            <a:off x="710280" y="3924720"/>
+            <a:ext cx="1233720" cy="98280"/>
           </a:xfrm>
           <a:prstGeom prst="rect">
             <a:avLst/>
@@ -4676,25 +5037,25 @@
               </a:rPr>
               <a:t>Diffusion simple</a:t>
             </a:r>
-            <a:endParaRPr b="0" lang="fr-FR" sz="1300" spc="-1" strike="noStrike">
-              <a:solidFill>
-                <a:srgbClr val="000000"/>
-              </a:solidFill>
-              <a:latin typeface="Arial"/>
-            </a:endParaRPr>
-          </a:p>
-        </p:txBody>
-      </p:sp>
-      <p:sp>
-        <p:nvSpPr>
-          <p:cNvPr id="45" name="Text 15"/>
+            <a:endParaRPr b="0" lang="en-US" sz="1300" spc="-1" strike="noStrike">
+              <a:solidFill>
+                <a:srgbClr val="000000"/>
+              </a:solidFill>
+              <a:latin typeface="Arial"/>
+            </a:endParaRPr>
+          </a:p>
+        </p:txBody>
+      </p:sp>
+      <p:sp>
+        <p:nvSpPr>
+          <p:cNvPr id="47" name="Text 15"/>
           <p:cNvSpPr/>
           <p:nvPr/>
         </p:nvSpPr>
         <p:spPr>
           <a:xfrm>
-            <a:off x="2304360" y="3840480"/>
-            <a:ext cx="1416960" cy="182520"/>
+            <a:off x="2323440" y="3974400"/>
+            <a:ext cx="1416600" cy="48240"/>
           </a:xfrm>
           <a:prstGeom prst="rect">
             <a:avLst/>
@@ -4732,25 +5093,25 @@
               </a:rPr>
               <a:t>Besoin de structure</a:t>
             </a:r>
-            <a:endParaRPr b="0" lang="fr-FR" sz="1300" spc="-1" strike="noStrike">
-              <a:solidFill>
-                <a:srgbClr val="000000"/>
-              </a:solidFill>
-              <a:latin typeface="Arial"/>
-            </a:endParaRPr>
-          </a:p>
-        </p:txBody>
-      </p:sp>
-      <p:sp>
-        <p:nvSpPr>
-          <p:cNvPr id="46" name="Text 16"/>
+            <a:endParaRPr b="0" lang="en-US" sz="1300" spc="-1" strike="noStrike">
+              <a:solidFill>
+                <a:srgbClr val="000000"/>
+              </a:solidFill>
+              <a:latin typeface="Arial"/>
+            </a:endParaRPr>
+          </a:p>
+        </p:txBody>
+      </p:sp>
+      <p:sp>
+        <p:nvSpPr>
+          <p:cNvPr id="48" name="Text 16"/>
           <p:cNvSpPr/>
           <p:nvPr/>
         </p:nvSpPr>
         <p:spPr>
           <a:xfrm>
-            <a:off x="4257360" y="3960000"/>
-            <a:ext cx="1142640" cy="182520"/>
+            <a:off x="4247640" y="3854880"/>
+            <a:ext cx="1142280" cy="263520"/>
           </a:xfrm>
           <a:prstGeom prst="rect">
             <a:avLst/>
@@ -4788,25 +5149,25 @@
               </a:rPr>
               <a:t>Room Server</a:t>
             </a:r>
-            <a:endParaRPr b="0" lang="fr-FR" sz="1300" spc="-1" strike="noStrike">
-              <a:solidFill>
-                <a:srgbClr val="000000"/>
-              </a:solidFill>
-              <a:latin typeface="Arial"/>
-            </a:endParaRPr>
-          </a:p>
-        </p:txBody>
-      </p:sp>
-      <p:sp>
-        <p:nvSpPr>
-          <p:cNvPr id="47" name="Text 17"/>
+            <a:endParaRPr b="0" lang="en-US" sz="1300" spc="-1" strike="noStrike">
+              <a:solidFill>
+                <a:srgbClr val="000000"/>
+              </a:solidFill>
+              <a:latin typeface="Arial"/>
+            </a:endParaRPr>
+          </a:p>
+        </p:txBody>
+      </p:sp>
+      <p:sp>
+        <p:nvSpPr>
+          <p:cNvPr id="49" name="Text 17"/>
           <p:cNvSpPr/>
           <p:nvPr/>
         </p:nvSpPr>
         <p:spPr>
           <a:xfrm>
-            <a:off x="6492240" y="3246120"/>
-            <a:ext cx="4571640" cy="2011320"/>
+            <a:off x="6432120" y="3520800"/>
+            <a:ext cx="4571280" cy="2010960"/>
           </a:xfrm>
           <a:prstGeom prst="rect">
             <a:avLst/>
@@ -4846,7 +5207,7 @@
               </a:rPr>
               <a:t>Ajouter une couche applicative sans modifier le protocole Meshtastic.</a:t>
             </a:r>
-            <a:endParaRPr b="0" lang="fr-FR" sz="1600" spc="-1" strike="noStrike">
+            <a:endParaRPr b="0" lang="en-US" sz="1600" spc="-1" strike="noStrike">
               <a:solidFill>
                 <a:srgbClr val="000000"/>
               </a:solidFill>
@@ -4873,7 +5234,7 @@
               </a:rPr>
               <a:t>Rester compatible avec du matériel standard : Raspberry Pi 3B + Wio-E5 Mini.</a:t>
             </a:r>
-            <a:endParaRPr b="0" lang="fr-FR" sz="1600" spc="-1" strike="noStrike">
+            <a:endParaRPr b="0" lang="en-US" sz="1600" spc="-1" strike="noStrike">
               <a:solidFill>
                 <a:srgbClr val="000000"/>
               </a:solidFill>
@@ -4900,18 +5261,18 @@
               </a:rPr>
               <a:t>Conserver une solution légère, démontrable et robuste.</a:t>
             </a:r>
-            <a:endParaRPr b="0" lang="fr-FR" sz="1600" spc="-1" strike="noStrike">
-              <a:solidFill>
-                <a:srgbClr val="000000"/>
-              </a:solidFill>
-              <a:latin typeface="Arial"/>
-            </a:endParaRPr>
-          </a:p>
-        </p:txBody>
-      </p:sp>
-      <p:sp>
-        <p:nvSpPr>
-          <p:cNvPr id="48" name="PlaceHolder 1"/>
+            <a:endParaRPr b="0" lang="en-US" sz="1600" spc="-1" strike="noStrike">
+              <a:solidFill>
+                <a:srgbClr val="000000"/>
+              </a:solidFill>
+              <a:latin typeface="Arial"/>
+            </a:endParaRPr>
+          </a:p>
+        </p:txBody>
+      </p:sp>
+      <p:sp>
+        <p:nvSpPr>
+          <p:cNvPr id="50" name="PlaceHolder 1"/>
           <p:cNvSpPr>
             <a:spLocks noGrp="1"/>
           </p:cNvSpPr>
@@ -4922,7 +5283,7 @@
         <p:spPr>
           <a:xfrm>
             <a:off x="11750040" y="6583680"/>
-            <a:ext cx="228240" cy="182520"/>
+            <a:ext cx="227880" cy="182160"/>
           </a:xfrm>
           <a:prstGeom prst="rect">
             <a:avLst/>
@@ -4942,6 +5303,9 @@
                 <a:spcPct val="100000"/>
               </a:lnSpc>
               <a:buNone/>
+              <a:tabLst>
+                <a:tab algn="l" pos="0"/>
+              </a:tabLst>
               <a:defRPr b="0" lang="en-US" sz="1000" spc="-1" strike="noStrike">
                 <a:solidFill>
                   <a:srgbClr val="ffffff"/>
@@ -4956,17 +5320,20 @@
                 <a:spcPct val="100000"/>
               </a:lnSpc>
               <a:buNone/>
-            </a:pPr>
-            <a:fld id="{0C5A4F11-C8FD-42E8-976E-9A54589DC37B}" type="slidenum">
+              <a:tabLst>
+                <a:tab algn="l" pos="0"/>
+              </a:tabLst>
+            </a:pPr>
+            <a:fld id="{8767451B-4DD6-4B76-A111-CA42AFF7C311}" type="slidenum">
               <a:rPr b="0" lang="en-US" sz="1000" spc="-1" strike="noStrike">
                 <a:solidFill>
                   <a:srgbClr val="ffffff"/>
                 </a:solidFill>
                 <a:latin typeface="Aptos"/>
               </a:rPr>
-              <a:t>&lt;numéro&gt;</a:t>
+              <a:t>&lt;number&gt;</a:t>
             </a:fld>
-            <a:endParaRPr b="0" lang="fr-FR" sz="1000" spc="-1" strike="noStrike">
+            <a:endParaRPr b="0" lang="en-US" sz="1000" spc="-1" strike="noStrike">
               <a:solidFill>
                 <a:srgbClr val="000000"/>
               </a:solidFill>
@@ -4975,11 +5342,41 @@
           </a:p>
         </p:txBody>
       </p:sp>
+      <p:pic>
+        <p:nvPicPr>
+          <p:cNvPr id="51" name="Picture 1" descr=""/>
+          <p:cNvPicPr/>
+          <p:nvPr/>
+        </p:nvPicPr>
+        <p:blipFill>
+          <a:blip r:embed="rId1"/>
+          <a:stretch/>
+        </p:blipFill>
+        <p:spPr>
+          <a:xfrm>
+            <a:off x="1458720" y="4392720"/>
+            <a:ext cx="2872080" cy="1913400"/>
+          </a:xfrm>
+          <a:prstGeom prst="rect">
+            <a:avLst/>
+          </a:prstGeom>
+          <a:ln w="0">
+            <a:noFill/>
+          </a:ln>
+          <a:effectLst>
+            <a:outerShdw algn="tr" blurRad="50760" dir="8100000" dist="75858" rotWithShape="0">
+              <a:srgbClr val="000000">
+                <a:alpha val="40000"/>
+              </a:srgbClr>
+            </a:outerShdw>
+          </a:effectLst>
+        </p:spPr>
+      </p:pic>
     </p:spTree>
   </p:cSld>
   <mc:AlternateContent>
     <mc:Choice Requires="p14">
-      <p:transition spd="slow" p14:dur="2000"/>
+      <p:transition spd="slow" p14:dur="6000"/>
     </mc:Choice>
     <mc:Fallback>
       <p:transition spd="slow"/>
@@ -5007,14 +5404,14 @@
       </p:grpSpPr>
       <p:sp>
         <p:nvSpPr>
-          <p:cNvPr id="49" name="Text 0"/>
+          <p:cNvPr id="52" name="Text 0"/>
           <p:cNvSpPr/>
           <p:nvPr/>
         </p:nvSpPr>
         <p:spPr>
           <a:xfrm>
             <a:off x="502920" y="411480"/>
-            <a:ext cx="7131960" cy="411120"/>
+            <a:ext cx="7131600" cy="410760"/>
           </a:xfrm>
           <a:prstGeom prst="rect">
             <a:avLst/>
@@ -5053,25 +5450,25 @@
               </a:rPr>
               <a:t>Objectifs et périmètre fonctionnel</a:t>
             </a:r>
-            <a:endParaRPr b="0" lang="fr-FR" sz="2400" spc="-1" strike="noStrike">
-              <a:solidFill>
-                <a:srgbClr val="000000"/>
-              </a:solidFill>
-              <a:latin typeface="Arial"/>
-            </a:endParaRPr>
-          </a:p>
-        </p:txBody>
-      </p:sp>
-      <p:sp>
-        <p:nvSpPr>
-          <p:cNvPr id="50" name="Text 1"/>
+            <a:endParaRPr b="0" lang="en-US" sz="2400" spc="-1" strike="noStrike">
+              <a:solidFill>
+                <a:srgbClr val="000000"/>
+              </a:solidFill>
+              <a:latin typeface="Arial"/>
+            </a:endParaRPr>
+          </a:p>
+        </p:txBody>
+      </p:sp>
+      <p:sp>
+        <p:nvSpPr>
+          <p:cNvPr id="53" name="Text 1"/>
           <p:cNvSpPr/>
           <p:nvPr/>
         </p:nvSpPr>
         <p:spPr>
           <a:xfrm>
             <a:off x="530280" y="841320"/>
-            <a:ext cx="7954920" cy="228240"/>
+            <a:ext cx="7954560" cy="227880"/>
           </a:xfrm>
           <a:prstGeom prst="rect">
             <a:avLst/>
@@ -5109,25 +5506,25 @@
               </a:rPr>
               <a:t>Ce que le système devait faire pendant le semestre</a:t>
             </a:r>
-            <a:endParaRPr b="0" lang="fr-FR" sz="1050" spc="-1" strike="noStrike">
-              <a:solidFill>
-                <a:srgbClr val="000000"/>
-              </a:solidFill>
-              <a:latin typeface="Arial"/>
-            </a:endParaRPr>
-          </a:p>
-        </p:txBody>
-      </p:sp>
-      <p:sp>
-        <p:nvSpPr>
-          <p:cNvPr id="51" name="Shape 2"/>
+            <a:endParaRPr b="0" lang="en-US" sz="1050" spc="-1" strike="noStrike">
+              <a:solidFill>
+                <a:srgbClr val="000000"/>
+              </a:solidFill>
+              <a:latin typeface="Arial"/>
+            </a:endParaRPr>
+          </a:p>
+        </p:txBody>
+      </p:sp>
+      <p:sp>
+        <p:nvSpPr>
+          <p:cNvPr id="54" name="Shape 2"/>
           <p:cNvSpPr/>
           <p:nvPr/>
         </p:nvSpPr>
         <p:spPr>
           <a:xfrm>
             <a:off x="731520" y="1325880"/>
-            <a:ext cx="3474360" cy="4480200"/>
+            <a:ext cx="3474000" cy="4479840"/>
           </a:xfrm>
           <a:prstGeom prst="roundRect">
             <a:avLst>
@@ -5144,7 +5541,7 @@
             <a:round/>
           </a:ln>
           <a:effectLst>
-            <a:outerShdw algn="bl" blurRad="12600" dir="2700000" dist="6109" kx="0" ky="0" rotWithShape="0" sx="100000" sy="100000">
+            <a:outerShdw algn="bl" blurRad="12600" dir="2700000" dist="6109" rotWithShape="0">
               <a:srgbClr val="000000">
                 <a:alpha val="10000"/>
               </a:srgbClr>
@@ -5162,6 +5559,11 @@
             <a:noAutofit/>
           </a:bodyPr>
           <a:p>
+            <a:pPr defTabSz="914400">
+              <a:lnSpc>
+                <a:spcPct val="100000"/>
+              </a:lnSpc>
+            </a:pPr>
             <a:endParaRPr b="0" lang="fr-FR" sz="1800" spc="-1" strike="noStrike">
               <a:solidFill>
                 <a:srgbClr val="000000"/>
@@ -5173,14 +5575,14 @@
       </p:sp>
       <p:sp>
         <p:nvSpPr>
-          <p:cNvPr id="52" name="Text 3"/>
+          <p:cNvPr id="55" name="Text 3"/>
           <p:cNvSpPr/>
           <p:nvPr/>
         </p:nvSpPr>
         <p:spPr>
           <a:xfrm>
             <a:off x="868680" y="1463040"/>
-            <a:ext cx="3200040" cy="219240"/>
+            <a:ext cx="3199680" cy="218880"/>
           </a:xfrm>
           <a:prstGeom prst="rect">
             <a:avLst/>
@@ -5218,25 +5620,25 @@
               </a:rPr>
               <a:t>Objectifs principaux</a:t>
             </a:r>
-            <a:endParaRPr b="0" lang="fr-FR" sz="1400" spc="-1" strike="noStrike">
-              <a:solidFill>
-                <a:srgbClr val="000000"/>
-              </a:solidFill>
-              <a:latin typeface="Arial"/>
-            </a:endParaRPr>
-          </a:p>
-        </p:txBody>
-      </p:sp>
-      <p:sp>
-        <p:nvSpPr>
-          <p:cNvPr id="53" name="Text 4"/>
+            <a:endParaRPr b="0" lang="en-US" sz="1400" spc="-1" strike="noStrike">
+              <a:solidFill>
+                <a:srgbClr val="000000"/>
+              </a:solidFill>
+              <a:latin typeface="Arial"/>
+            </a:endParaRPr>
+          </a:p>
+        </p:txBody>
+      </p:sp>
+      <p:sp>
+        <p:nvSpPr>
+          <p:cNvPr id="56" name="Text 4"/>
           <p:cNvSpPr/>
           <p:nvPr/>
         </p:nvSpPr>
         <p:spPr>
           <a:xfrm>
             <a:off x="868680" y="1737360"/>
-            <a:ext cx="3200040" cy="3949920"/>
+            <a:ext cx="3199680" cy="3949560"/>
           </a:xfrm>
           <a:prstGeom prst="rect">
             <a:avLst/>
@@ -5283,7 +5685,7 @@
               </a:rPr>
               <a:t>Interface par commandes</a:t>
             </a:r>
-            <a:endParaRPr b="0" lang="fr-FR" sz="1150" spc="-1" strike="noStrike">
+            <a:endParaRPr b="0" lang="en-US" sz="1150" spc="-1" strike="noStrike">
               <a:solidFill>
                 <a:srgbClr val="000000"/>
               </a:solidFill>
@@ -5317,7 +5719,7 @@
               </a:rPr>
               <a:t>Persistance locale</a:t>
             </a:r>
-            <a:endParaRPr b="0" lang="fr-FR" sz="1150" spc="-1" strike="noStrike">
+            <a:endParaRPr b="0" lang="en-US" sz="1150" spc="-1" strike="noStrike">
               <a:solidFill>
                 <a:srgbClr val="000000"/>
               </a:solidFill>
@@ -5351,7 +5753,7 @@
               </a:rPr>
               <a:t>Déploiement sur Raspberry Pi</a:t>
             </a:r>
-            <a:endParaRPr b="0" lang="fr-FR" sz="1150" spc="-1" strike="noStrike">
+            <a:endParaRPr b="0" lang="en-US" sz="1150" spc="-1" strike="noStrike">
               <a:solidFill>
                 <a:srgbClr val="000000"/>
               </a:solidFill>
@@ -5385,7 +5787,7 @@
               </a:rPr>
               <a:t>Robustesse après reboot</a:t>
             </a:r>
-            <a:endParaRPr b="0" lang="fr-FR" sz="1150" spc="-1" strike="noStrike">
+            <a:endParaRPr b="0" lang="en-US" sz="1150" spc="-1" strike="noStrike">
               <a:solidFill>
                 <a:srgbClr val="000000"/>
               </a:solidFill>
@@ -5419,7 +5821,7 @@
               </a:rPr>
               <a:t>Démonstrateur réel + documentation</a:t>
             </a:r>
-            <a:endParaRPr b="0" lang="fr-FR" sz="1150" spc="-1" strike="noStrike">
+            <a:endParaRPr b="0" lang="en-US" sz="1150" spc="-1" strike="noStrike">
               <a:solidFill>
                 <a:srgbClr val="000000"/>
               </a:solidFill>
@@ -5435,7 +5837,7 @@
                 <a:tab algn="l" pos="0"/>
               </a:tabLst>
             </a:pPr>
-            <a:endParaRPr b="0" lang="fr-FR" sz="1150" spc="-1" strike="noStrike">
+            <a:endParaRPr b="0" lang="en-US" sz="1150" spc="-1" strike="noStrike">
               <a:solidFill>
                 <a:srgbClr val="000000"/>
               </a:solidFill>
@@ -5460,25 +5862,25 @@
               </a:rPr>
               <a:t>Le choix a été de viser un noyau fonctionnel fiable avant toute extension.</a:t>
             </a:r>
-            <a:endParaRPr b="0" lang="fr-FR" sz="1150" spc="-1" strike="noStrike">
-              <a:solidFill>
-                <a:srgbClr val="000000"/>
-              </a:solidFill>
-              <a:latin typeface="Arial"/>
-            </a:endParaRPr>
-          </a:p>
-        </p:txBody>
-      </p:sp>
-      <p:sp>
-        <p:nvSpPr>
-          <p:cNvPr id="54" name="Shape 5"/>
+            <a:endParaRPr b="0" lang="en-US" sz="1150" spc="-1" strike="noStrike">
+              <a:solidFill>
+                <a:srgbClr val="000000"/>
+              </a:solidFill>
+              <a:latin typeface="Arial"/>
+            </a:endParaRPr>
+          </a:p>
+        </p:txBody>
+      </p:sp>
+      <p:sp>
+        <p:nvSpPr>
+          <p:cNvPr id="57" name="Shape 5"/>
           <p:cNvSpPr/>
           <p:nvPr/>
         </p:nvSpPr>
         <p:spPr>
           <a:xfrm>
             <a:off x="4526280" y="1325880"/>
-            <a:ext cx="6857640" cy="4480200"/>
+            <a:ext cx="6857280" cy="4479840"/>
           </a:xfrm>
           <a:prstGeom prst="roundRect">
             <a:avLst>
@@ -5506,6 +5908,11 @@
             <a:noAutofit/>
           </a:bodyPr>
           <a:p>
+            <a:pPr defTabSz="914400">
+              <a:lnSpc>
+                <a:spcPct val="100000"/>
+              </a:lnSpc>
+            </a:pPr>
             <a:endParaRPr b="0" lang="fr-FR" sz="1800" spc="-1" strike="noStrike">
               <a:solidFill>
                 <a:srgbClr val="000000"/>
@@ -5517,14 +5924,14 @@
       </p:sp>
       <p:sp>
         <p:nvSpPr>
-          <p:cNvPr id="55" name="Text 6"/>
+          <p:cNvPr id="58" name="Text 6"/>
           <p:cNvSpPr/>
           <p:nvPr/>
         </p:nvSpPr>
         <p:spPr>
           <a:xfrm>
             <a:off x="4754880" y="1572840"/>
-            <a:ext cx="2468520" cy="273960"/>
+            <a:ext cx="5068440" cy="164160"/>
           </a:xfrm>
           <a:prstGeom prst="rect">
             <a:avLst/>
@@ -5562,7 +5969,7 @@
               </a:rPr>
               <a:t>Fonctionnalités réalisées</a:t>
             </a:r>
-            <a:endParaRPr b="0" lang="fr-FR" sz="1800" spc="-1" strike="noStrike">
+            <a:endParaRPr b="0" lang="en-US" sz="1800" spc="-1" strike="noStrike">
               <a:solidFill>
                 <a:srgbClr val="000000"/>
               </a:solidFill>
@@ -5573,13 +5980,13 @@
       </p:sp>
       <p:graphicFrame>
         <p:nvGraphicFramePr>
-          <p:cNvPr id="56" name="Table 0"/>
+          <p:cNvPr id="59" name="Table 0"/>
           <p:cNvGraphicFramePr/>
           <p:nvPr/>
         </p:nvGraphicFramePr>
         <p:xfrm>
           <a:off x="4709160" y="1938600"/>
-          <a:ext cx="6400440" cy="3008160"/>
+          <a:ext cx="6400440" cy="3675960"/>
         </p:xfrm>
         <a:graphic>
           <a:graphicData uri="http://schemas.openxmlformats.org/drawingml/2006/table">
@@ -5614,7 +6021,7 @@
                         </a:rPr>
                         <a:t>Create room</a:t>
                       </a:r>
-                      <a:endParaRPr b="0" lang="fr-FR" sz="1120" spc="-1" strike="noStrike">
+                      <a:endParaRPr b="0" lang="en-US" sz="1120" spc="-1" strike="noStrike">
                         <a:solidFill>
                           <a:srgbClr val="000000"/>
                         </a:solidFill>
@@ -5675,7 +6082,7 @@
                         </a:rPr>
                         <a:t>Implémenté</a:t>
                       </a:r>
-                      <a:endParaRPr b="0" lang="fr-FR" sz="1120" spc="-1" strike="noStrike">
+                      <a:endParaRPr b="0" lang="en-US" sz="1120" spc="-1" strike="noStrike">
                         <a:solidFill>
                           <a:srgbClr val="000000"/>
                         </a:solidFill>
@@ -5736,7 +6143,7 @@
                         </a:rPr>
                         <a:t>Création d’une room par nom unique</a:t>
                       </a:r>
-                      <a:endParaRPr b="0" lang="fr-FR" sz="1120" spc="-1" strike="noStrike">
+                      <a:endParaRPr b="0" lang="en-US" sz="1120" spc="-1" strike="noStrike">
                         <a:solidFill>
                           <a:srgbClr val="000000"/>
                         </a:solidFill>
@@ -5799,7 +6206,7 @@
                         </a:rPr>
                         <a:t>Annonce Messages</a:t>
                       </a:r>
-                      <a:endParaRPr b="1" lang="fr-FR" sz="1120" spc="-1" strike="noStrike">
+                      <a:endParaRPr b="0" lang="en-US" sz="1120" spc="-1" strike="noStrike">
                         <a:solidFill>
                           <a:srgbClr val="000000"/>
                         </a:solidFill>
@@ -5860,11 +6267,11 @@
                         </a:rPr>
                         <a:t>Implémenté</a:t>
                       </a:r>
-                      <a:endParaRPr b="0" lang="fr-FR" sz="1120" spc="-1" strike="noStrike">
+                      <a:endParaRPr b="0" lang="en-US" sz="1120" spc="-1" strike="noStrike">
                         <a:solidFill>
                           <a:srgbClr val="000000"/>
                         </a:solidFill>
-                        <a:latin typeface="Times New Roman"/>
+                        <a:latin typeface="Arial"/>
                       </a:endParaRPr>
                     </a:p>
                   </a:txBody>
@@ -5927,7 +6334,7 @@
                         </a:rPr>
                         <a:t>Diffusion d’un message global d’annonce à toutes les rooms / tous les utilisateurs selon votre logique serveur</a:t>
                       </a:r>
-                      <a:endParaRPr b="0" lang="fr-FR" sz="1120" spc="-1" strike="noStrike">
+                      <a:endParaRPr b="0" lang="en-US" sz="1120" spc="-1" strike="noStrike">
                         <a:solidFill>
                           <a:srgbClr val="000000"/>
                         </a:solidFill>
@@ -5990,7 +6397,7 @@
                         </a:rPr>
                         <a:t>List rooms</a:t>
                       </a:r>
-                      <a:endParaRPr b="0" lang="fr-FR" sz="1120" spc="-1" strike="noStrike">
+                      <a:endParaRPr b="0" lang="en-US" sz="1120" spc="-1" strike="noStrike">
                         <a:solidFill>
                           <a:srgbClr val="000000"/>
                         </a:solidFill>
@@ -6051,7 +6458,7 @@
                         </a:rPr>
                         <a:t>Implémenté</a:t>
                       </a:r>
-                      <a:endParaRPr b="0" lang="fr-FR" sz="1120" spc="-1" strike="noStrike">
+                      <a:endParaRPr b="0" lang="en-US" sz="1120" spc="-1" strike="noStrike">
                         <a:solidFill>
                           <a:srgbClr val="000000"/>
                         </a:solidFill>
@@ -6112,7 +6519,7 @@
                         </a:rPr>
                         <a:t>Retour de la liste des rooms stockées</a:t>
                       </a:r>
-                      <a:endParaRPr b="0" lang="fr-FR" sz="1120" spc="-1" strike="noStrike">
+                      <a:endParaRPr b="0" lang="en-US" sz="1120" spc="-1" strike="noStrike">
                         <a:solidFill>
                           <a:srgbClr val="000000"/>
                         </a:solidFill>
@@ -6175,7 +6582,7 @@
                         </a:rPr>
                         <a:t>Post message</a:t>
                       </a:r>
-                      <a:endParaRPr b="0" lang="fr-FR" sz="1120" spc="-1" strike="noStrike">
+                      <a:endParaRPr b="0" lang="en-US" sz="1120" spc="-1" strike="noStrike">
                         <a:solidFill>
                           <a:srgbClr val="000000"/>
                         </a:solidFill>
@@ -6236,7 +6643,7 @@
                         </a:rPr>
                         <a:t>Implémenté</a:t>
                       </a:r>
-                      <a:endParaRPr b="0" lang="fr-FR" sz="1120" spc="-1" strike="noStrike">
+                      <a:endParaRPr b="0" lang="en-US" sz="1120" spc="-1" strike="noStrike">
                         <a:solidFill>
                           <a:srgbClr val="000000"/>
                         </a:solidFill>
@@ -6297,7 +6704,7 @@
                         </a:rPr>
                         <a:t>Ajout d’un message dans une room</a:t>
                       </a:r>
-                      <a:endParaRPr b="0" lang="fr-FR" sz="1120" spc="-1" strike="noStrike">
+                      <a:endParaRPr b="0" lang="en-US" sz="1120" spc="-1" strike="noStrike">
                         <a:solidFill>
                           <a:srgbClr val="000000"/>
                         </a:solidFill>
@@ -6360,7 +6767,7 @@
                         </a:rPr>
                         <a:t>Read history</a:t>
                       </a:r>
-                      <a:endParaRPr b="0" lang="fr-FR" sz="1120" spc="-1" strike="noStrike">
+                      <a:endParaRPr b="0" lang="en-US" sz="1120" spc="-1" strike="noStrike">
                         <a:solidFill>
                           <a:srgbClr val="000000"/>
                         </a:solidFill>
@@ -6421,7 +6828,7 @@
                         </a:rPr>
                         <a:t>Implémenté</a:t>
                       </a:r>
-                      <a:endParaRPr b="0" lang="fr-FR" sz="1120" spc="-1" strike="noStrike">
+                      <a:endParaRPr b="0" lang="en-US" sz="1120" spc="-1" strike="noStrike">
                         <a:solidFill>
                           <a:srgbClr val="000000"/>
                         </a:solidFill>
@@ -6482,7 +6889,7 @@
                         </a:rPr>
                         <a:t>Lecture des N derniers messages avec limites</a:t>
                       </a:r>
-                      <a:endParaRPr b="0" lang="fr-FR" sz="1120" spc="-1" strike="noStrike">
+                      <a:endParaRPr b="0" lang="en-US" sz="1120" spc="-1" strike="noStrike">
                         <a:solidFill>
                           <a:srgbClr val="000000"/>
                         </a:solidFill>
@@ -6545,7 +6952,7 @@
                         </a:rPr>
                         <a:t>Help command</a:t>
                       </a:r>
-                      <a:endParaRPr b="0" lang="fr-FR" sz="1120" spc="-1" strike="noStrike">
+                      <a:endParaRPr b="0" lang="en-US" sz="1120" spc="-1" strike="noStrike">
                         <a:solidFill>
                           <a:srgbClr val="000000"/>
                         </a:solidFill>
@@ -6606,7 +7013,7 @@
                         </a:rPr>
                         <a:t>Implémenté</a:t>
                       </a:r>
-                      <a:endParaRPr b="0" lang="fr-FR" sz="1120" spc="-1" strike="noStrike">
+                      <a:endParaRPr b="0" lang="en-US" sz="1120" spc="-1" strike="noStrike">
                         <a:solidFill>
                           <a:srgbClr val="000000"/>
                         </a:solidFill>
@@ -6667,7 +7074,7 @@
                         </a:rPr>
                         <a:t>Résumé concis des commandes</a:t>
                       </a:r>
-                      <a:endParaRPr b="0" lang="fr-FR" sz="1120" spc="-1" strike="noStrike">
+                      <a:endParaRPr b="0" lang="en-US" sz="1120" spc="-1" strike="noStrike">
                         <a:solidFill>
                           <a:srgbClr val="000000"/>
                         </a:solidFill>
@@ -6730,7 +7137,7 @@
                         </a:rPr>
                         <a:t>Persistence after reboot</a:t>
                       </a:r>
-                      <a:endParaRPr b="0" lang="fr-FR" sz="1120" spc="-1" strike="noStrike">
+                      <a:endParaRPr b="0" lang="en-US" sz="1120" spc="-1" strike="noStrike">
                         <a:solidFill>
                           <a:srgbClr val="000000"/>
                         </a:solidFill>
@@ -6791,7 +7198,7 @@
                         </a:rPr>
                         <a:t>Implémenté</a:t>
                       </a:r>
-                      <a:endParaRPr b="0" lang="fr-FR" sz="1120" spc="-1" strike="noStrike">
+                      <a:endParaRPr b="0" lang="en-US" sz="1120" spc="-1" strike="noStrike">
                         <a:solidFill>
                           <a:srgbClr val="000000"/>
                         </a:solidFill>
@@ -6852,7 +7259,7 @@
                         </a:rPr>
                         <a:t>Données conservées après redémarrage</a:t>
                       </a:r>
-                      <a:endParaRPr b="0" lang="fr-FR" sz="1120" spc="-1" strike="noStrike">
+                      <a:endParaRPr b="0" lang="en-US" sz="1120" spc="-1" strike="noStrike">
                         <a:solidFill>
                           <a:srgbClr val="000000"/>
                         </a:solidFill>
@@ -6921,7 +7328,7 @@
                         </a:rPr>
                         <a:t>Room info</a:t>
                       </a:r>
-                      <a:endParaRPr b="0" lang="fr-FR" sz="1120" spc="-1" strike="noStrike">
+                      <a:endParaRPr b="0" lang="en-US" sz="1120" spc="-1" strike="noStrike">
                         <a:solidFill>
                           <a:srgbClr val="000000"/>
                         </a:solidFill>
@@ -6982,7 +7389,7 @@
                         </a:rPr>
                         <a:t>Implémenté</a:t>
                       </a:r>
-                      <a:endParaRPr b="0" lang="fr-FR" sz="1120" spc="-1" strike="noStrike">
+                      <a:endParaRPr b="0" lang="en-US" sz="1120" spc="-1" strike="noStrike">
                         <a:solidFill>
                           <a:srgbClr val="000000"/>
                         </a:solidFill>
@@ -7049,7 +7456,7 @@
                         </a:rPr>
                         <a:t>Affichage des informations d’une room (nom, description, métadonnées utiles)</a:t>
                       </a:r>
-                      <a:endParaRPr b="0" lang="fr-FR" sz="1120" spc="-1" strike="noStrike">
+                      <a:endParaRPr b="0" lang="en-US" sz="1120" spc="-1" strike="noStrike">
                         <a:solidFill>
                           <a:srgbClr val="000000"/>
                         </a:solidFill>
@@ -7094,7 +7501,7 @@
       </p:graphicFrame>
       <p:sp>
         <p:nvSpPr>
-          <p:cNvPr id="57" name="PlaceHolder 1"/>
+          <p:cNvPr id="60" name="PlaceHolder 1"/>
           <p:cNvSpPr>
             <a:spLocks noGrp="1"/>
           </p:cNvSpPr>
@@ -7105,7 +7512,7 @@
         <p:spPr>
           <a:xfrm>
             <a:off x="11750040" y="6583680"/>
-            <a:ext cx="228240" cy="182520"/>
+            <a:ext cx="227880" cy="182160"/>
           </a:xfrm>
           <a:prstGeom prst="rect">
             <a:avLst/>
@@ -7125,6 +7532,9 @@
                 <a:spcPct val="100000"/>
               </a:lnSpc>
               <a:buNone/>
+              <a:tabLst>
+                <a:tab algn="l" pos="0"/>
+              </a:tabLst>
               <a:defRPr b="0" lang="en-US" sz="1000" spc="-1" strike="noStrike">
                 <a:solidFill>
                   <a:srgbClr val="ffffff"/>
@@ -7139,17 +7549,20 @@
                 <a:spcPct val="100000"/>
               </a:lnSpc>
               <a:buNone/>
-            </a:pPr>
-            <a:fld id="{B3575026-91EA-444C-885F-E1B84B855DC3}" type="slidenum">
+              <a:tabLst>
+                <a:tab algn="l" pos="0"/>
+              </a:tabLst>
+            </a:pPr>
+            <a:fld id="{8CE397D9-6451-4025-A81D-4662946D0BDC}" type="slidenum">
               <a:rPr b="0" lang="en-US" sz="1000" spc="-1" strike="noStrike">
                 <a:solidFill>
                   <a:srgbClr val="ffffff"/>
                 </a:solidFill>
                 <a:latin typeface="Aptos"/>
               </a:rPr>
-              <a:t>&lt;numéro&gt;</a:t>
+              <a:t>&lt;number&gt;</a:t>
             </a:fld>
-            <a:endParaRPr b="0" lang="fr-FR" sz="1000" spc="-1" strike="noStrike">
+            <a:endParaRPr b="0" lang="en-US" sz="1000" spc="-1" strike="noStrike">
               <a:solidFill>
                 <a:srgbClr val="000000"/>
               </a:solidFill>
@@ -7158,6 +7571,51 @@
           </a:p>
         </p:txBody>
       </p:sp>
+      <p:pic>
+        <p:nvPicPr>
+          <p:cNvPr id="61" name="Picture 1" descr=""/>
+          <p:cNvPicPr/>
+          <p:nvPr/>
+        </p:nvPicPr>
+        <p:blipFill>
+          <a:blip r:embed="rId1"/>
+          <a:stretch/>
+        </p:blipFill>
+        <p:spPr>
+          <a:xfrm>
+            <a:off x="920880" y="3429000"/>
+            <a:ext cx="1365120" cy="2049120"/>
+          </a:xfrm>
+          <a:prstGeom prst="rect">
+            <a:avLst/>
+          </a:prstGeom>
+          <a:ln cap="sq" w="88900">
+            <a:solidFill>
+              <a:srgbClr val="ffffff"/>
+            </a:solidFill>
+            <a:miter/>
+          </a:ln>
+          <a:effectLst>
+            <a:outerShdw algn="t" blurRad="50760" dir="5400000" dist="76320" rotWithShape="0">
+              <a:srgbClr val="000000">
+                <a:alpha val="40000"/>
+              </a:srgbClr>
+            </a:outerShdw>
+          </a:effectLst>
+          <a:scene3d>
+            <a:camera prst="orthographicFront"/>
+            <a:lightRig dir="t" rig="twoPt">
+              <a:rot lat="0" lon="0" rev="7200000"/>
+            </a:lightRig>
+          </a:scene3d>
+          <a:sp3d>
+            <a:bevelT w="25400" h="19050"/>
+            <a:contourClr>
+              <a:srgbClr val="ffffff"/>
+            </a:contourClr>
+          </a:sp3d>
+        </p:spPr>
+      </p:pic>
     </p:spTree>
   </p:cSld>
   <mc:AlternateContent>
@@ -7190,14 +7648,14 @@
       </p:grpSpPr>
       <p:sp>
         <p:nvSpPr>
-          <p:cNvPr id="58" name="Text 0"/>
+          <p:cNvPr id="62" name="Text 0"/>
           <p:cNvSpPr/>
           <p:nvPr/>
         </p:nvSpPr>
         <p:spPr>
           <a:xfrm>
             <a:off x="502920" y="411480"/>
-            <a:ext cx="7131960" cy="411120"/>
+            <a:ext cx="7131600" cy="410760"/>
           </a:xfrm>
           <a:prstGeom prst="rect">
             <a:avLst/>
@@ -7236,25 +7694,25 @@
               </a:rPr>
               <a:t>Architecture de la solution</a:t>
             </a:r>
-            <a:endParaRPr b="0" lang="fr-FR" sz="2400" spc="-1" strike="noStrike">
-              <a:solidFill>
-                <a:srgbClr val="000000"/>
-              </a:solidFill>
-              <a:latin typeface="Arial"/>
-            </a:endParaRPr>
-          </a:p>
-        </p:txBody>
-      </p:sp>
-      <p:sp>
-        <p:nvSpPr>
-          <p:cNvPr id="59" name="Text 1"/>
+            <a:endParaRPr b="0" lang="en-US" sz="2400" spc="-1" strike="noStrike">
+              <a:solidFill>
+                <a:srgbClr val="000000"/>
+              </a:solidFill>
+              <a:latin typeface="Arial"/>
+            </a:endParaRPr>
+          </a:p>
+        </p:txBody>
+      </p:sp>
+      <p:sp>
+        <p:nvSpPr>
+          <p:cNvPr id="63" name="Text 1"/>
           <p:cNvSpPr/>
           <p:nvPr/>
         </p:nvSpPr>
         <p:spPr>
           <a:xfrm>
             <a:off x="530280" y="841320"/>
-            <a:ext cx="7954920" cy="228240"/>
+            <a:ext cx="7954560" cy="227880"/>
           </a:xfrm>
           <a:prstGeom prst="rect">
             <a:avLst/>
@@ -7292,25 +7750,25 @@
               </a:rPr>
               <a:t>Chaîne complète : client LoRa → Room Server → base SQLite</a:t>
             </a:r>
-            <a:endParaRPr b="0" lang="fr-FR" sz="1050" spc="-1" strike="noStrike">
-              <a:solidFill>
-                <a:srgbClr val="000000"/>
-              </a:solidFill>
-              <a:latin typeface="Arial"/>
-            </a:endParaRPr>
-          </a:p>
-        </p:txBody>
-      </p:sp>
-      <p:sp>
-        <p:nvSpPr>
-          <p:cNvPr id="60" name="Shape 2"/>
+            <a:endParaRPr b="0" lang="en-US" sz="1050" spc="-1" strike="noStrike">
+              <a:solidFill>
+                <a:srgbClr val="000000"/>
+              </a:solidFill>
+              <a:latin typeface="Arial"/>
+            </a:endParaRPr>
+          </a:p>
+        </p:txBody>
+      </p:sp>
+      <p:sp>
+        <p:nvSpPr>
+          <p:cNvPr id="64" name="Shape 2"/>
           <p:cNvSpPr/>
           <p:nvPr/>
         </p:nvSpPr>
         <p:spPr>
           <a:xfrm>
             <a:off x="640080" y="1828800"/>
-            <a:ext cx="1737000" cy="914040"/>
+            <a:ext cx="1736640" cy="913680"/>
           </a:xfrm>
           <a:prstGeom prst="roundRect">
             <a:avLst>
@@ -7338,6 +7796,11 @@
             <a:noAutofit/>
           </a:bodyPr>
           <a:p>
+            <a:pPr defTabSz="914400">
+              <a:lnSpc>
+                <a:spcPct val="100000"/>
+              </a:lnSpc>
+            </a:pPr>
             <a:endParaRPr b="0" lang="fr-FR" sz="1800" spc="-1" strike="noStrike">
               <a:solidFill>
                 <a:srgbClr val="000000"/>
@@ -7349,14 +7812,14 @@
       </p:sp>
       <p:sp>
         <p:nvSpPr>
-          <p:cNvPr id="61" name="Text 3"/>
+          <p:cNvPr id="65" name="Text 3"/>
           <p:cNvSpPr/>
           <p:nvPr/>
         </p:nvSpPr>
         <p:spPr>
           <a:xfrm>
             <a:off x="713160" y="2030040"/>
-            <a:ext cx="1590840" cy="456840"/>
+            <a:ext cx="1590480" cy="456480"/>
           </a:xfrm>
           <a:prstGeom prst="rect">
             <a:avLst/>
@@ -7394,25 +7857,25 @@
               </a:rPr>
               <a:t>Smartphone / client</a:t>
             </a:r>
-            <a:endParaRPr b="0" lang="fr-FR" sz="1600" spc="-1" strike="noStrike">
-              <a:solidFill>
-                <a:srgbClr val="000000"/>
-              </a:solidFill>
-              <a:latin typeface="Arial"/>
-            </a:endParaRPr>
-          </a:p>
-        </p:txBody>
-      </p:sp>
-      <p:sp>
-        <p:nvSpPr>
-          <p:cNvPr id="62" name="Shape 4"/>
+            <a:endParaRPr b="0" lang="en-US" sz="1600" spc="-1" strike="noStrike">
+              <a:solidFill>
+                <a:srgbClr val="000000"/>
+              </a:solidFill>
+              <a:latin typeface="Arial"/>
+            </a:endParaRPr>
+          </a:p>
+        </p:txBody>
+      </p:sp>
+      <p:sp>
+        <p:nvSpPr>
+          <p:cNvPr id="66" name="Shape 4"/>
           <p:cNvSpPr/>
           <p:nvPr/>
         </p:nvSpPr>
         <p:spPr>
           <a:xfrm>
             <a:off x="2697480" y="1828800"/>
-            <a:ext cx="1599840" cy="914040"/>
+            <a:ext cx="1599480" cy="913680"/>
           </a:xfrm>
           <a:prstGeom prst="roundRect">
             <a:avLst>
@@ -7440,6 +7903,11 @@
             <a:noAutofit/>
           </a:bodyPr>
           <a:p>
+            <a:pPr defTabSz="914400">
+              <a:lnSpc>
+                <a:spcPct val="100000"/>
+              </a:lnSpc>
+            </a:pPr>
             <a:endParaRPr b="0" lang="fr-FR" sz="1800" spc="-1" strike="noStrike">
               <a:solidFill>
                 <a:srgbClr val="000000"/>
@@ -7451,14 +7919,14 @@
       </p:sp>
       <p:sp>
         <p:nvSpPr>
-          <p:cNvPr id="63" name="Text 5"/>
+          <p:cNvPr id="67" name="Text 5"/>
           <p:cNvSpPr/>
           <p:nvPr/>
         </p:nvSpPr>
         <p:spPr>
           <a:xfrm>
             <a:off x="2770560" y="2030040"/>
-            <a:ext cx="1453680" cy="456840"/>
+            <a:ext cx="1453320" cy="456480"/>
           </a:xfrm>
           <a:prstGeom prst="rect">
             <a:avLst/>
@@ -7496,25 +7964,25 @@
               </a:rPr>
               <a:t>Noeud LoRa client</a:t>
             </a:r>
-            <a:endParaRPr b="0" lang="fr-FR" sz="1600" spc="-1" strike="noStrike">
-              <a:solidFill>
-                <a:srgbClr val="000000"/>
-              </a:solidFill>
-              <a:latin typeface="Arial"/>
-            </a:endParaRPr>
-          </a:p>
-        </p:txBody>
-      </p:sp>
-      <p:sp>
-        <p:nvSpPr>
-          <p:cNvPr id="64" name="Shape 6"/>
+            <a:endParaRPr b="0" lang="en-US" sz="1600" spc="-1" strike="noStrike">
+              <a:solidFill>
+                <a:srgbClr val="000000"/>
+              </a:solidFill>
+              <a:latin typeface="Arial"/>
+            </a:endParaRPr>
+          </a:p>
+        </p:txBody>
+      </p:sp>
+      <p:sp>
+        <p:nvSpPr>
+          <p:cNvPr id="68" name="Shape 6"/>
           <p:cNvSpPr/>
           <p:nvPr/>
         </p:nvSpPr>
         <p:spPr>
           <a:xfrm>
             <a:off x="4617720" y="1828800"/>
-            <a:ext cx="1828440" cy="914040"/>
+            <a:ext cx="1828080" cy="913680"/>
           </a:xfrm>
           <a:prstGeom prst="roundRect">
             <a:avLst>
@@ -7542,6 +8010,11 @@
             <a:noAutofit/>
           </a:bodyPr>
           <a:p>
+            <a:pPr defTabSz="914400">
+              <a:lnSpc>
+                <a:spcPct val="100000"/>
+              </a:lnSpc>
+            </a:pPr>
             <a:endParaRPr b="0" lang="fr-FR" sz="1800" spc="-1" strike="noStrike">
               <a:solidFill>
                 <a:srgbClr val="000000"/>
@@ -7553,14 +8026,14 @@
       </p:sp>
       <p:sp>
         <p:nvSpPr>
-          <p:cNvPr id="65" name="Text 7"/>
+          <p:cNvPr id="69" name="Text 7"/>
           <p:cNvSpPr/>
           <p:nvPr/>
         </p:nvSpPr>
         <p:spPr>
           <a:xfrm>
             <a:off x="4690800" y="2030040"/>
-            <a:ext cx="1682280" cy="456840"/>
+            <a:ext cx="1681920" cy="456480"/>
           </a:xfrm>
           <a:prstGeom prst="rect">
             <a:avLst/>
@@ -7598,7 +8071,7 @@
               </a:rPr>
               <a:t>Noeud serveur</a:t>
             </a:r>
-            <a:endParaRPr b="0" lang="fr-FR" sz="1600" spc="-1" strike="noStrike">
+            <a:endParaRPr b="0" lang="en-US" sz="1600" spc="-1" strike="noStrike">
               <a:solidFill>
                 <a:srgbClr val="000000"/>
               </a:solidFill>
@@ -7623,25 +8096,25 @@
               </a:rPr>
               <a:t>Wio-E5</a:t>
             </a:r>
-            <a:endParaRPr b="0" lang="fr-FR" sz="1600" spc="-1" strike="noStrike">
-              <a:solidFill>
-                <a:srgbClr val="000000"/>
-              </a:solidFill>
-              <a:latin typeface="Arial"/>
-            </a:endParaRPr>
-          </a:p>
-        </p:txBody>
-      </p:sp>
-      <p:sp>
-        <p:nvSpPr>
-          <p:cNvPr id="66" name="Shape 8"/>
+            <a:endParaRPr b="0" lang="en-US" sz="1600" spc="-1" strike="noStrike">
+              <a:solidFill>
+                <a:srgbClr val="000000"/>
+              </a:solidFill>
+              <a:latin typeface="Arial"/>
+            </a:endParaRPr>
+          </a:p>
+        </p:txBody>
+      </p:sp>
+      <p:sp>
+        <p:nvSpPr>
+          <p:cNvPr id="70" name="Shape 8"/>
           <p:cNvSpPr/>
           <p:nvPr/>
         </p:nvSpPr>
         <p:spPr>
           <a:xfrm>
             <a:off x="6812280" y="1828800"/>
-            <a:ext cx="1828440" cy="914040"/>
+            <a:ext cx="1828080" cy="913680"/>
           </a:xfrm>
           <a:prstGeom prst="roundRect">
             <a:avLst>
@@ -7669,6 +8142,11 @@
             <a:noAutofit/>
           </a:bodyPr>
           <a:p>
+            <a:pPr defTabSz="914400">
+              <a:lnSpc>
+                <a:spcPct val="100000"/>
+              </a:lnSpc>
+            </a:pPr>
             <a:endParaRPr b="0" lang="fr-FR" sz="1800" spc="-1" strike="noStrike">
               <a:solidFill>
                 <a:srgbClr val="000000"/>
@@ -7680,14 +8158,14 @@
       </p:sp>
       <p:sp>
         <p:nvSpPr>
-          <p:cNvPr id="67" name="Text 9"/>
+          <p:cNvPr id="71" name="Text 9"/>
           <p:cNvSpPr/>
           <p:nvPr/>
         </p:nvSpPr>
         <p:spPr>
           <a:xfrm>
             <a:off x="6885360" y="2030040"/>
-            <a:ext cx="1682280" cy="456840"/>
+            <a:ext cx="1681920" cy="456480"/>
           </a:xfrm>
           <a:prstGeom prst="rect">
             <a:avLst/>
@@ -7725,25 +8203,25 @@
               </a:rPr>
               <a:t>Raspberry Pi 3B</a:t>
             </a:r>
-            <a:endParaRPr b="0" lang="fr-FR" sz="1600" spc="-1" strike="noStrike">
-              <a:solidFill>
-                <a:srgbClr val="000000"/>
-              </a:solidFill>
-              <a:latin typeface="Arial"/>
-            </a:endParaRPr>
-          </a:p>
-        </p:txBody>
-      </p:sp>
-      <p:sp>
-        <p:nvSpPr>
-          <p:cNvPr id="68" name="Shape 10"/>
+            <a:endParaRPr b="0" lang="en-US" sz="1600" spc="-1" strike="noStrike">
+              <a:solidFill>
+                <a:srgbClr val="000000"/>
+              </a:solidFill>
+              <a:latin typeface="Arial"/>
+            </a:endParaRPr>
+          </a:p>
+        </p:txBody>
+      </p:sp>
+      <p:sp>
+        <p:nvSpPr>
+          <p:cNvPr id="72" name="Shape 10"/>
           <p:cNvSpPr/>
           <p:nvPr/>
         </p:nvSpPr>
         <p:spPr>
           <a:xfrm>
             <a:off x="9006840" y="1828800"/>
-            <a:ext cx="2011320" cy="914040"/>
+            <a:ext cx="2010960" cy="913680"/>
           </a:xfrm>
           <a:prstGeom prst="roundRect">
             <a:avLst>
@@ -7771,6 +8249,11 @@
             <a:noAutofit/>
           </a:bodyPr>
           <a:p>
+            <a:pPr defTabSz="914400">
+              <a:lnSpc>
+                <a:spcPct val="100000"/>
+              </a:lnSpc>
+            </a:pPr>
             <a:endParaRPr b="0" lang="fr-FR" sz="1800" spc="-1" strike="noStrike">
               <a:solidFill>
                 <a:srgbClr val="000000"/>
@@ -7782,14 +8265,14 @@
       </p:sp>
       <p:sp>
         <p:nvSpPr>
-          <p:cNvPr id="69" name="Text 11"/>
+          <p:cNvPr id="73" name="Text 11"/>
           <p:cNvSpPr/>
           <p:nvPr/>
         </p:nvSpPr>
         <p:spPr>
           <a:xfrm>
             <a:off x="9079920" y="2030040"/>
-            <a:ext cx="1865160" cy="456840"/>
+            <a:ext cx="1864800" cy="456480"/>
           </a:xfrm>
           <a:prstGeom prst="rect">
             <a:avLst/>
@@ -7827,7 +8310,7 @@
               </a:rPr>
               <a:t>Application Python</a:t>
             </a:r>
-            <a:endParaRPr b="0" lang="fr-FR" sz="1600" spc="-1" strike="noStrike">
+            <a:endParaRPr b="0" lang="en-US" sz="1600" spc="-1" strike="noStrike">
               <a:solidFill>
                 <a:srgbClr val="000000"/>
               </a:solidFill>
@@ -7852,25 +8335,25 @@
               </a:rPr>
               <a:t>Room Server</a:t>
             </a:r>
-            <a:endParaRPr b="0" lang="fr-FR" sz="1600" spc="-1" strike="noStrike">
-              <a:solidFill>
-                <a:srgbClr val="000000"/>
-              </a:solidFill>
-              <a:latin typeface="Arial"/>
-            </a:endParaRPr>
-          </a:p>
-        </p:txBody>
-      </p:sp>
-      <p:sp>
-        <p:nvSpPr>
-          <p:cNvPr id="70" name="Shape 12"/>
+            <a:endParaRPr b="0" lang="en-US" sz="1600" spc="-1" strike="noStrike">
+              <a:solidFill>
+                <a:srgbClr val="000000"/>
+              </a:solidFill>
+              <a:latin typeface="Arial"/>
+            </a:endParaRPr>
+          </a:p>
+        </p:txBody>
+      </p:sp>
+      <p:sp>
+        <p:nvSpPr>
+          <p:cNvPr id="74" name="Shape 12"/>
           <p:cNvSpPr/>
           <p:nvPr/>
         </p:nvSpPr>
         <p:spPr>
           <a:xfrm>
             <a:off x="2395800" y="2075760"/>
-            <a:ext cx="456840" cy="328680"/>
+            <a:ext cx="456480" cy="328320"/>
           </a:xfrm>
           <a:prstGeom prst="chevron">
             <a:avLst>
@@ -7898,6 +8381,11 @@
             <a:noAutofit/>
           </a:bodyPr>
           <a:p>
+            <a:pPr defTabSz="914400">
+              <a:lnSpc>
+                <a:spcPct val="100000"/>
+              </a:lnSpc>
+            </a:pPr>
             <a:endParaRPr b="0" lang="fr-FR" sz="1800" spc="-1" strike="noStrike">
               <a:solidFill>
                 <a:srgbClr val="ffffff"/>
@@ -7909,14 +8397,14 @@
       </p:sp>
       <p:sp>
         <p:nvSpPr>
-          <p:cNvPr id="71" name="Shape 13"/>
+          <p:cNvPr id="75" name="Shape 13"/>
           <p:cNvSpPr/>
           <p:nvPr/>
         </p:nvSpPr>
         <p:spPr>
           <a:xfrm>
             <a:off x="4316040" y="2075760"/>
-            <a:ext cx="456840" cy="328680"/>
+            <a:ext cx="456480" cy="328320"/>
           </a:xfrm>
           <a:prstGeom prst="chevron">
             <a:avLst>
@@ -7944,6 +8432,11 @@
             <a:noAutofit/>
           </a:bodyPr>
           <a:p>
+            <a:pPr defTabSz="914400">
+              <a:lnSpc>
+                <a:spcPct val="100000"/>
+              </a:lnSpc>
+            </a:pPr>
             <a:endParaRPr b="0" lang="fr-FR" sz="1800" spc="-1" strike="noStrike">
               <a:solidFill>
                 <a:srgbClr val="ffffff"/>
@@ -7955,14 +8448,14 @@
       </p:sp>
       <p:sp>
         <p:nvSpPr>
-          <p:cNvPr id="72" name="Shape 14"/>
+          <p:cNvPr id="76" name="Shape 14"/>
           <p:cNvSpPr/>
           <p:nvPr/>
         </p:nvSpPr>
         <p:spPr>
           <a:xfrm>
             <a:off x="6510600" y="2075760"/>
-            <a:ext cx="456840" cy="328680"/>
+            <a:ext cx="456480" cy="328320"/>
           </a:xfrm>
           <a:prstGeom prst="chevron">
             <a:avLst>
@@ -7990,6 +8483,11 @@
             <a:noAutofit/>
           </a:bodyPr>
           <a:p>
+            <a:pPr defTabSz="914400">
+              <a:lnSpc>
+                <a:spcPct val="100000"/>
+              </a:lnSpc>
+            </a:pPr>
             <a:endParaRPr b="0" lang="fr-FR" sz="1800" spc="-1" strike="noStrike">
               <a:solidFill>
                 <a:srgbClr val="ffffff"/>
@@ -8001,14 +8499,14 @@
       </p:sp>
       <p:sp>
         <p:nvSpPr>
-          <p:cNvPr id="73" name="Shape 15"/>
+          <p:cNvPr id="77" name="Shape 15"/>
           <p:cNvSpPr/>
           <p:nvPr/>
         </p:nvSpPr>
         <p:spPr>
           <a:xfrm>
             <a:off x="8705160" y="2075760"/>
-            <a:ext cx="456840" cy="328680"/>
+            <a:ext cx="456480" cy="328320"/>
           </a:xfrm>
           <a:prstGeom prst="chevron">
             <a:avLst>
@@ -8036,6 +8534,11 @@
             <a:noAutofit/>
           </a:bodyPr>
           <a:p>
+            <a:pPr defTabSz="914400">
+              <a:lnSpc>
+                <a:spcPct val="100000"/>
+              </a:lnSpc>
+            </a:pPr>
             <a:endParaRPr b="0" lang="fr-FR" sz="1800" spc="-1" strike="noStrike">
               <a:solidFill>
                 <a:srgbClr val="ffffff"/>
@@ -8047,14 +8550,14 @@
       </p:sp>
       <p:sp>
         <p:nvSpPr>
-          <p:cNvPr id="74" name="Shape 16"/>
+          <p:cNvPr id="78" name="Shape 16"/>
           <p:cNvSpPr/>
           <p:nvPr/>
         </p:nvSpPr>
         <p:spPr>
           <a:xfrm>
             <a:off x="4498920" y="3246120"/>
-            <a:ext cx="2057040" cy="1051200"/>
+            <a:ext cx="2056680" cy="1050840"/>
           </a:xfrm>
           <a:prstGeom prst="roundRect">
             <a:avLst>
@@ -8082,6 +8585,11 @@
             <a:noAutofit/>
           </a:bodyPr>
           <a:p>
+            <a:pPr defTabSz="914400">
+              <a:lnSpc>
+                <a:spcPct val="100000"/>
+              </a:lnSpc>
+            </a:pPr>
             <a:endParaRPr b="0" lang="fr-FR" sz="1800" spc="-1" strike="noStrike">
               <a:solidFill>
                 <a:srgbClr val="000000"/>
@@ -8093,14 +8601,14 @@
       </p:sp>
       <p:sp>
         <p:nvSpPr>
-          <p:cNvPr id="75" name="Text 17"/>
+          <p:cNvPr id="79" name="Text 17"/>
           <p:cNvSpPr/>
           <p:nvPr/>
         </p:nvSpPr>
         <p:spPr>
           <a:xfrm>
             <a:off x="4663440" y="3611880"/>
-            <a:ext cx="1737000" cy="273960"/>
+            <a:ext cx="1736640" cy="273600"/>
           </a:xfrm>
           <a:prstGeom prst="rect">
             <a:avLst/>
@@ -8138,25 +8646,25 @@
               </a:rPr>
               <a:t>Meshtastic serial interface</a:t>
             </a:r>
-            <a:endParaRPr b="0" lang="fr-FR" sz="1400" spc="-1" strike="noStrike">
-              <a:solidFill>
-                <a:srgbClr val="000000"/>
-              </a:solidFill>
-              <a:latin typeface="Arial"/>
-            </a:endParaRPr>
-          </a:p>
-        </p:txBody>
-      </p:sp>
-      <p:sp>
-        <p:nvSpPr>
-          <p:cNvPr id="76" name="Shape 18"/>
+            <a:endParaRPr b="0" lang="en-US" sz="1400" spc="-1" strike="noStrike">
+              <a:solidFill>
+                <a:srgbClr val="000000"/>
+              </a:solidFill>
+              <a:latin typeface="Arial"/>
+            </a:endParaRPr>
+          </a:p>
+        </p:txBody>
+      </p:sp>
+      <p:sp>
+        <p:nvSpPr>
+          <p:cNvPr id="80" name="Shape 18"/>
           <p:cNvSpPr/>
           <p:nvPr/>
         </p:nvSpPr>
         <p:spPr>
           <a:xfrm>
             <a:off x="7086600" y="3246120"/>
-            <a:ext cx="1965600" cy="1051200"/>
+            <a:ext cx="1965240" cy="1050840"/>
           </a:xfrm>
           <a:prstGeom prst="roundRect">
             <a:avLst>
@@ -8184,6 +8692,11 @@
             <a:noAutofit/>
           </a:bodyPr>
           <a:p>
+            <a:pPr defTabSz="914400">
+              <a:lnSpc>
+                <a:spcPct val="100000"/>
+              </a:lnSpc>
+            </a:pPr>
             <a:endParaRPr b="0" lang="fr-FR" sz="1800" spc="-1" strike="noStrike">
               <a:solidFill>
                 <a:srgbClr val="000000"/>
@@ -8195,14 +8708,14 @@
       </p:sp>
       <p:sp>
         <p:nvSpPr>
-          <p:cNvPr id="77" name="Text 19"/>
+          <p:cNvPr id="81" name="Text 19"/>
           <p:cNvSpPr/>
           <p:nvPr/>
         </p:nvSpPr>
         <p:spPr>
           <a:xfrm>
             <a:off x="7269480" y="3611880"/>
-            <a:ext cx="1599840" cy="273960"/>
+            <a:ext cx="1599480" cy="273600"/>
           </a:xfrm>
           <a:prstGeom prst="rect">
             <a:avLst/>
@@ -8240,25 +8753,25 @@
               </a:rPr>
               <a:t>Parser + RoomManager</a:t>
             </a:r>
-            <a:endParaRPr b="0" lang="fr-FR" sz="1400" spc="-1" strike="noStrike">
-              <a:solidFill>
-                <a:srgbClr val="000000"/>
-              </a:solidFill>
-              <a:latin typeface="Arial"/>
-            </a:endParaRPr>
-          </a:p>
-        </p:txBody>
-      </p:sp>
-      <p:sp>
-        <p:nvSpPr>
-          <p:cNvPr id="78" name="Shape 20"/>
+            <a:endParaRPr b="0" lang="en-US" sz="1400" spc="-1" strike="noStrike">
+              <a:solidFill>
+                <a:srgbClr val="000000"/>
+              </a:solidFill>
+              <a:latin typeface="Arial"/>
+            </a:endParaRPr>
+          </a:p>
+        </p:txBody>
+      </p:sp>
+      <p:sp>
+        <p:nvSpPr>
+          <p:cNvPr id="82" name="Shape 20"/>
           <p:cNvSpPr/>
           <p:nvPr/>
         </p:nvSpPr>
         <p:spPr>
           <a:xfrm>
             <a:off x="9555480" y="3246120"/>
-            <a:ext cx="1782720" cy="1051200"/>
+            <a:ext cx="1782360" cy="1050840"/>
           </a:xfrm>
           <a:prstGeom prst="roundRect">
             <a:avLst>
@@ -8286,6 +8799,11 @@
             <a:noAutofit/>
           </a:bodyPr>
           <a:p>
+            <a:pPr defTabSz="914400">
+              <a:lnSpc>
+                <a:spcPct val="100000"/>
+              </a:lnSpc>
+            </a:pPr>
             <a:endParaRPr b="0" lang="fr-FR" sz="1800" spc="-1" strike="noStrike">
               <a:solidFill>
                 <a:srgbClr val="000000"/>
@@ -8297,14 +8815,14 @@
       </p:sp>
       <p:sp>
         <p:nvSpPr>
-          <p:cNvPr id="79" name="Text 21"/>
+          <p:cNvPr id="83" name="Text 21"/>
           <p:cNvSpPr/>
           <p:nvPr/>
         </p:nvSpPr>
         <p:spPr>
           <a:xfrm>
             <a:off x="9875520" y="3584520"/>
-            <a:ext cx="1096920" cy="273960"/>
+            <a:ext cx="1096560" cy="273600"/>
           </a:xfrm>
           <a:prstGeom prst="rect">
             <a:avLst/>
@@ -8342,25 +8860,25 @@
               </a:rPr>
               <a:t>SQLite</a:t>
             </a:r>
-            <a:endParaRPr b="0" lang="fr-FR" sz="1800" spc="-1" strike="noStrike">
-              <a:solidFill>
-                <a:srgbClr val="000000"/>
-              </a:solidFill>
-              <a:latin typeface="Arial"/>
-            </a:endParaRPr>
-          </a:p>
-        </p:txBody>
-      </p:sp>
-      <p:sp>
-        <p:nvSpPr>
-          <p:cNvPr id="80" name="Shape 22"/>
+            <a:endParaRPr b="0" lang="en-US" sz="1800" spc="-1" strike="noStrike">
+              <a:solidFill>
+                <a:srgbClr val="000000"/>
+              </a:solidFill>
+              <a:latin typeface="Arial"/>
+            </a:endParaRPr>
+          </a:p>
+        </p:txBody>
+      </p:sp>
+      <p:sp>
+        <p:nvSpPr>
+          <p:cNvPr id="84" name="Shape 22"/>
           <p:cNvSpPr/>
           <p:nvPr/>
         </p:nvSpPr>
         <p:spPr>
           <a:xfrm>
             <a:off x="6565320" y="3657600"/>
-            <a:ext cx="365400" cy="255600"/>
+            <a:ext cx="365040" cy="255240"/>
           </a:xfrm>
           <a:prstGeom prst="chevron">
             <a:avLst>
@@ -8388,6 +8906,11 @@
             <a:noAutofit/>
           </a:bodyPr>
           <a:p>
+            <a:pPr defTabSz="914400">
+              <a:lnSpc>
+                <a:spcPct val="100000"/>
+              </a:lnSpc>
+            </a:pPr>
             <a:endParaRPr b="0" lang="fr-FR" sz="1800" spc="-1" strike="noStrike">
               <a:solidFill>
                 <a:srgbClr val="ffffff"/>
@@ -8399,14 +8922,14 @@
       </p:sp>
       <p:sp>
         <p:nvSpPr>
-          <p:cNvPr id="81" name="Shape 23"/>
+          <p:cNvPr id="85" name="Shape 23"/>
           <p:cNvSpPr/>
           <p:nvPr/>
         </p:nvSpPr>
         <p:spPr>
           <a:xfrm>
             <a:off x="9098280" y="3657600"/>
-            <a:ext cx="365400" cy="255600"/>
+            <a:ext cx="365040" cy="255240"/>
           </a:xfrm>
           <a:prstGeom prst="chevron">
             <a:avLst>
@@ -8434,6 +8957,11 @@
             <a:noAutofit/>
           </a:bodyPr>
           <a:p>
+            <a:pPr defTabSz="914400">
+              <a:lnSpc>
+                <a:spcPct val="100000"/>
+              </a:lnSpc>
+            </a:pPr>
             <a:endParaRPr b="0" lang="fr-FR" sz="1800" spc="-1" strike="noStrike">
               <a:solidFill>
                 <a:srgbClr val="ffffff"/>
@@ -8445,14 +8973,14 @@
       </p:sp>
       <p:sp>
         <p:nvSpPr>
-          <p:cNvPr id="82" name="Text 24"/>
+          <p:cNvPr id="86" name="Text 24"/>
           <p:cNvSpPr/>
           <p:nvPr/>
         </p:nvSpPr>
         <p:spPr>
           <a:xfrm>
-            <a:off x="868680" y="4709160"/>
-            <a:ext cx="10332360" cy="1096920"/>
+            <a:off x="4498920" y="4773240"/>
+            <a:ext cx="10332000" cy="1087200"/>
           </a:xfrm>
           <a:prstGeom prst="rect">
             <a:avLst/>
@@ -8492,7 +9020,7 @@
               </a:rPr>
               <a:t>Architecture modulaire : transport, parsing, logique métier, persistance.</a:t>
             </a:r>
-            <a:endParaRPr b="0" lang="fr-FR" sz="1550" spc="-1" strike="noStrike">
+            <a:endParaRPr b="0" lang="en-US" sz="1550" spc="-1" strike="noStrike">
               <a:solidFill>
                 <a:srgbClr val="000000"/>
               </a:solidFill>
@@ -8519,7 +9047,7 @@
               </a:rPr>
               <a:t>Pas de modification du protocole radio : la valeur est ajoutée côté application.</a:t>
             </a:r>
-            <a:endParaRPr b="0" lang="fr-FR" sz="1550" spc="-1" strike="noStrike">
+            <a:endParaRPr b="0" lang="en-US" sz="1550" spc="-1" strike="noStrike">
               <a:solidFill>
                 <a:srgbClr val="000000"/>
               </a:solidFill>
@@ -8546,18 +9074,18 @@
               </a:rPr>
               <a:t>Déploiement réel sur matériel embarqué.</a:t>
             </a:r>
-            <a:endParaRPr b="0" lang="fr-FR" sz="1550" spc="-1" strike="noStrike">
-              <a:solidFill>
-                <a:srgbClr val="000000"/>
-              </a:solidFill>
-              <a:latin typeface="Arial"/>
-            </a:endParaRPr>
-          </a:p>
-        </p:txBody>
-      </p:sp>
-      <p:sp>
-        <p:nvSpPr>
-          <p:cNvPr id="83" name="PlaceHolder 1"/>
+            <a:endParaRPr b="0" lang="en-US" sz="1550" spc="-1" strike="noStrike">
+              <a:solidFill>
+                <a:srgbClr val="000000"/>
+              </a:solidFill>
+              <a:latin typeface="Arial"/>
+            </a:endParaRPr>
+          </a:p>
+        </p:txBody>
+      </p:sp>
+      <p:sp>
+        <p:nvSpPr>
+          <p:cNvPr id="87" name="PlaceHolder 1"/>
           <p:cNvSpPr>
             <a:spLocks noGrp="1"/>
           </p:cNvSpPr>
@@ -8568,7 +9096,7 @@
         <p:spPr>
           <a:xfrm>
             <a:off x="11750040" y="6583680"/>
-            <a:ext cx="228240" cy="182520"/>
+            <a:ext cx="227880" cy="182160"/>
           </a:xfrm>
           <a:prstGeom prst="rect">
             <a:avLst/>
@@ -8588,6 +9116,9 @@
                 <a:spcPct val="100000"/>
               </a:lnSpc>
               <a:buNone/>
+              <a:tabLst>
+                <a:tab algn="l" pos="0"/>
+              </a:tabLst>
               <a:defRPr b="0" lang="en-US" sz="1000" spc="-1" strike="noStrike">
                 <a:solidFill>
                   <a:srgbClr val="ffffff"/>
@@ -8602,17 +9133,20 @@
                 <a:spcPct val="100000"/>
               </a:lnSpc>
               <a:buNone/>
-            </a:pPr>
-            <a:fld id="{EA740217-DA0D-41AF-A3EF-73F39FFD552F}" type="slidenum">
+              <a:tabLst>
+                <a:tab algn="l" pos="0"/>
+              </a:tabLst>
+            </a:pPr>
+            <a:fld id="{68B45D52-868E-4D6C-B56B-41A3FD007B65}" type="slidenum">
               <a:rPr b="0" lang="en-US" sz="1000" spc="-1" strike="noStrike">
                 <a:solidFill>
                   <a:srgbClr val="ffffff"/>
                 </a:solidFill>
                 <a:latin typeface="Aptos"/>
               </a:rPr>
-              <a:t>&lt;numéro&gt;</a:t>
+              <a:t>&lt;number&gt;</a:t>
             </a:fld>
-            <a:endParaRPr b="0" lang="fr-FR" sz="1000" spc="-1" strike="noStrike">
+            <a:endParaRPr b="0" lang="en-US" sz="1000" spc="-1" strike="noStrike">
               <a:solidFill>
                 <a:srgbClr val="000000"/>
               </a:solidFill>
@@ -8621,6 +9155,36 @@
           </a:p>
         </p:txBody>
       </p:sp>
+      <p:pic>
+        <p:nvPicPr>
+          <p:cNvPr id="88" name="Picture 3" descr=""/>
+          <p:cNvPicPr/>
+          <p:nvPr/>
+        </p:nvPicPr>
+        <p:blipFill>
+          <a:blip r:embed="rId1"/>
+          <a:stretch/>
+        </p:blipFill>
+        <p:spPr>
+          <a:xfrm>
+            <a:off x="427680" y="2989800"/>
+            <a:ext cx="3895920" cy="3083760"/>
+          </a:xfrm>
+          <a:prstGeom prst="rect">
+            <a:avLst/>
+          </a:prstGeom>
+          <a:ln w="0">
+            <a:noFill/>
+          </a:ln>
+          <a:effectLst>
+            <a:outerShdw algn="r" blurRad="50760" dir="10800000" dist="76320" rotWithShape="0">
+              <a:srgbClr val="000000">
+                <a:alpha val="40000"/>
+              </a:srgbClr>
+            </a:outerShdw>
+          </a:effectLst>
+        </p:spPr>
+      </p:pic>
     </p:spTree>
   </p:cSld>
   <mc:AlternateContent>
@@ -8653,14 +9217,14 @@
       </p:grpSpPr>
       <p:sp>
         <p:nvSpPr>
-          <p:cNvPr id="84" name="Text 0"/>
+          <p:cNvPr id="89" name="Text 0"/>
           <p:cNvSpPr/>
           <p:nvPr/>
         </p:nvSpPr>
         <p:spPr>
           <a:xfrm>
             <a:off x="502920" y="411480"/>
-            <a:ext cx="7131960" cy="411120"/>
+            <a:ext cx="7131600" cy="410760"/>
           </a:xfrm>
           <a:prstGeom prst="rect">
             <a:avLst/>
@@ -8699,25 +9263,25 @@
               </a:rPr>
               <a:t>Fonctionnement logiciel</a:t>
             </a:r>
-            <a:endParaRPr b="0" lang="fr-FR" sz="2400" spc="-1" strike="noStrike">
-              <a:solidFill>
-                <a:srgbClr val="000000"/>
-              </a:solidFill>
-              <a:latin typeface="Arial"/>
-            </a:endParaRPr>
-          </a:p>
-        </p:txBody>
-      </p:sp>
-      <p:sp>
-        <p:nvSpPr>
-          <p:cNvPr id="85" name="Text 1"/>
+            <a:endParaRPr b="0" lang="en-US" sz="2400" spc="-1" strike="noStrike">
+              <a:solidFill>
+                <a:srgbClr val="000000"/>
+              </a:solidFill>
+              <a:latin typeface="Arial"/>
+            </a:endParaRPr>
+          </a:p>
+        </p:txBody>
+      </p:sp>
+      <p:sp>
+        <p:nvSpPr>
+          <p:cNvPr id="90" name="Text 1"/>
           <p:cNvSpPr/>
           <p:nvPr/>
         </p:nvSpPr>
         <p:spPr>
           <a:xfrm>
             <a:off x="530280" y="841320"/>
-            <a:ext cx="7954920" cy="228240"/>
+            <a:ext cx="7954560" cy="227880"/>
           </a:xfrm>
           <a:prstGeom prst="rect">
             <a:avLst/>
@@ -8755,7 +9319,7 @@
               </a:rPr>
               <a:t>Modules principaux et rôle de chaque composant</a:t>
             </a:r>
-            <a:endParaRPr b="0" lang="fr-FR" sz="1050" spc="-1" strike="noStrike">
+            <a:endParaRPr b="0" lang="en-US" sz="1050" spc="-1" strike="noStrike">
               <a:solidFill>
                 <a:srgbClr val="000000"/>
               </a:solidFill>
@@ -8766,7 +9330,7 @@
       </p:sp>
       <p:graphicFrame>
         <p:nvGraphicFramePr>
-          <p:cNvPr id="86" name="Table 0"/>
+          <p:cNvPr id="91" name="Table 0"/>
           <p:cNvGraphicFramePr/>
           <p:nvPr/>
         </p:nvGraphicFramePr>
@@ -8806,7 +9370,7 @@
                         </a:rPr>
                         <a:t>main.py</a:t>
                       </a:r>
-                      <a:endParaRPr b="0" lang="fr-FR" sz="1200" spc="-1" strike="noStrike">
+                      <a:endParaRPr b="0" lang="en-US" sz="1200" spc="-1" strike="noStrike">
                         <a:solidFill>
                           <a:srgbClr val="000000"/>
                         </a:solidFill>
@@ -8867,7 +9431,7 @@
                         </a:rPr>
                         <a:t>Orchestrateur : initialise DB, RoomManager et connexion matérielle</a:t>
                       </a:r>
-                      <a:endParaRPr b="0" lang="fr-FR" sz="1200" spc="-1" strike="noStrike">
+                      <a:endParaRPr b="0" lang="en-US" sz="1200" spc="-1" strike="noStrike">
                         <a:solidFill>
                           <a:srgbClr val="000000"/>
                         </a:solidFill>
@@ -8930,7 +9494,7 @@
                         </a:rPr>
                         <a:t>parser.py</a:t>
                       </a:r>
-                      <a:endParaRPr b="0" lang="fr-FR" sz="1200" spc="-1" strike="noStrike">
+                      <a:endParaRPr b="0" lang="en-US" sz="1200" spc="-1" strike="noStrike">
                         <a:solidFill>
                           <a:srgbClr val="000000"/>
                         </a:solidFill>
@@ -8991,7 +9555,7 @@
                         </a:rPr>
                         <a:t>Analyse la syntaxe des commandes /room et extrait les arguments</a:t>
                       </a:r>
-                      <a:endParaRPr b="0" lang="fr-FR" sz="1200" spc="-1" strike="noStrike">
+                      <a:endParaRPr b="0" lang="en-US" sz="1200" spc="-1" strike="noStrike">
                         <a:solidFill>
                           <a:srgbClr val="000000"/>
                         </a:solidFill>
@@ -9054,7 +9618,7 @@
                         </a:rPr>
                         <a:t>room_manager.py</a:t>
                       </a:r>
-                      <a:endParaRPr b="0" lang="fr-FR" sz="1200" spc="-1" strike="noStrike">
+                      <a:endParaRPr b="0" lang="en-US" sz="1200" spc="-1" strike="noStrike">
                         <a:solidFill>
                           <a:srgbClr val="000000"/>
                         </a:solidFill>
@@ -9115,7 +9679,7 @@
                         </a:rPr>
                         <a:t>Cœur métier : rooms, anti-spam, formatage, lecture et écriture</a:t>
                       </a:r>
-                      <a:endParaRPr b="0" lang="fr-FR" sz="1200" spc="-1" strike="noStrike">
+                      <a:endParaRPr b="0" lang="en-US" sz="1200" spc="-1" strike="noStrike">
                         <a:solidFill>
                           <a:srgbClr val="000000"/>
                         </a:solidFill>
@@ -9178,7 +9742,7 @@
                         </a:rPr>
                         <a:t>database.py</a:t>
                       </a:r>
-                      <a:endParaRPr b="0" lang="fr-FR" sz="1200" spc="-1" strike="noStrike">
+                      <a:endParaRPr b="0" lang="en-US" sz="1200" spc="-1" strike="noStrike">
                         <a:solidFill>
                           <a:srgbClr val="000000"/>
                         </a:solidFill>
@@ -9239,7 +9803,7 @@
                         </a:rPr>
                         <a:t>Stockage SQLite : tables rooms/messages et opérations CRUD</a:t>
                       </a:r>
-                      <a:endParaRPr b="0" lang="fr-FR" sz="1200" spc="-1" strike="noStrike">
+                      <a:endParaRPr b="0" lang="en-US" sz="1200" spc="-1" strike="noStrike">
                         <a:solidFill>
                           <a:srgbClr val="000000"/>
                         </a:solidFill>
@@ -9302,7 +9866,7 @@
                         </a:rPr>
                         <a:t>meshtastic_comm_hw.py</a:t>
                       </a:r>
-                      <a:endParaRPr b="0" lang="fr-FR" sz="1200" spc="-1" strike="noStrike">
+                      <a:endParaRPr b="0" lang="en-US" sz="1200" spc="-1" strike="noStrike">
                         <a:solidFill>
                           <a:srgbClr val="000000"/>
                         </a:solidFill>
@@ -9363,7 +9927,7 @@
                         </a:rPr>
                         <a:t>Interface réelle avec le module LoRa via /dev/ttyUSB*</a:t>
                       </a:r>
-                      <a:endParaRPr b="0" lang="fr-FR" sz="1200" spc="-1" strike="noStrike">
+                      <a:endParaRPr b="0" lang="en-US" sz="1200" spc="-1" strike="noStrike">
                         <a:solidFill>
                           <a:srgbClr val="000000"/>
                         </a:solidFill>
@@ -9426,7 +9990,7 @@
                         </a:rPr>
                         <a:t>client.py</a:t>
                       </a:r>
-                      <a:endParaRPr b="0" lang="fr-FR" sz="1200" spc="-1" strike="noStrike">
+                      <a:endParaRPr b="0" lang="en-US" sz="1200" spc="-1" strike="noStrike">
                         <a:solidFill>
                           <a:srgbClr val="000000"/>
                         </a:solidFill>
@@ -9487,7 +10051,7 @@
                         </a:rPr>
                         <a:t>Client de test pour envoyer les commandes au serveur</a:t>
                       </a:r>
-                      <a:endParaRPr b="0" lang="fr-FR" sz="1200" spc="-1" strike="noStrike">
+                      <a:endParaRPr b="0" lang="en-US" sz="1200" spc="-1" strike="noStrike">
                         <a:solidFill>
                           <a:srgbClr val="000000"/>
                         </a:solidFill>
@@ -9550,7 +10114,7 @@
                         </a:rPr>
                         <a:t>logger.py / reset_db.py</a:t>
                       </a:r>
-                      <a:endParaRPr b="0" lang="fr-FR" sz="1200" spc="-1" strike="noStrike">
+                      <a:endParaRPr b="0" lang="en-US" sz="1200" spc="-1" strike="noStrike">
                         <a:solidFill>
                           <a:srgbClr val="000000"/>
                         </a:solidFill>
@@ -9611,7 +10175,7 @@
                         </a:rPr>
                         <a:t>Supervision, debugging et maintenance</a:t>
                       </a:r>
-                      <a:endParaRPr b="0" lang="fr-FR" sz="1200" spc="-1" strike="noStrike">
+                      <a:endParaRPr b="0" lang="en-US" sz="1200" spc="-1" strike="noStrike">
                         <a:solidFill>
                           <a:srgbClr val="000000"/>
                         </a:solidFill>
@@ -9656,14 +10220,14 @@
       </p:graphicFrame>
       <p:sp>
         <p:nvSpPr>
-          <p:cNvPr id="87" name="Shape 2"/>
+          <p:cNvPr id="92" name="Shape 2"/>
           <p:cNvSpPr/>
           <p:nvPr/>
         </p:nvSpPr>
         <p:spPr>
           <a:xfrm>
             <a:off x="7726680" y="1508760"/>
-            <a:ext cx="3565800" cy="1325520"/>
+            <a:ext cx="3565440" cy="1325160"/>
           </a:xfrm>
           <a:prstGeom prst="roundRect">
             <a:avLst>
@@ -9680,7 +10244,7 @@
             <a:round/>
           </a:ln>
           <a:effectLst>
-            <a:outerShdw algn="bl" blurRad="12600" dir="2700000" dist="6109" kx="0" ky="0" rotWithShape="0" sx="100000" sy="100000">
+            <a:outerShdw algn="bl" blurRad="12600" dir="2700000" dist="6109" rotWithShape="0">
               <a:srgbClr val="000000">
                 <a:alpha val="10000"/>
               </a:srgbClr>
@@ -9698,6 +10262,11 @@
             <a:noAutofit/>
           </a:bodyPr>
           <a:p>
+            <a:pPr defTabSz="914400">
+              <a:lnSpc>
+                <a:spcPct val="100000"/>
+              </a:lnSpc>
+            </a:pPr>
             <a:endParaRPr b="0" lang="fr-FR" sz="1800" spc="-1" strike="noStrike">
               <a:solidFill>
                 <a:srgbClr val="000000"/>
@@ -9709,14 +10278,14 @@
       </p:sp>
       <p:sp>
         <p:nvSpPr>
-          <p:cNvPr id="88" name="Text 3"/>
+          <p:cNvPr id="93" name="Text 3"/>
           <p:cNvSpPr/>
           <p:nvPr/>
         </p:nvSpPr>
         <p:spPr>
           <a:xfrm>
             <a:off x="7863840" y="1645920"/>
-            <a:ext cx="3291480" cy="219240"/>
+            <a:ext cx="3291120" cy="218880"/>
           </a:xfrm>
           <a:prstGeom prst="rect">
             <a:avLst/>
@@ -9754,25 +10323,25 @@
               </a:rPr>
               <a:t>Structure choisie</a:t>
             </a:r>
-            <a:endParaRPr b="0" lang="fr-FR" sz="1400" spc="-1" strike="noStrike">
-              <a:solidFill>
-                <a:srgbClr val="000000"/>
-              </a:solidFill>
-              <a:latin typeface="Arial"/>
-            </a:endParaRPr>
-          </a:p>
-        </p:txBody>
-      </p:sp>
-      <p:sp>
-        <p:nvSpPr>
-          <p:cNvPr id="89" name="Text 4"/>
+            <a:endParaRPr b="0" lang="en-US" sz="1400" spc="-1" strike="noStrike">
+              <a:solidFill>
+                <a:srgbClr val="000000"/>
+              </a:solidFill>
+              <a:latin typeface="Arial"/>
+            </a:endParaRPr>
+          </a:p>
+        </p:txBody>
+      </p:sp>
+      <p:sp>
+        <p:nvSpPr>
+          <p:cNvPr id="94" name="Text 4"/>
           <p:cNvSpPr/>
           <p:nvPr/>
         </p:nvSpPr>
         <p:spPr>
           <a:xfrm>
             <a:off x="7863840" y="1920240"/>
-            <a:ext cx="3291480" cy="795240"/>
+            <a:ext cx="3291120" cy="794880"/>
           </a:xfrm>
           <a:prstGeom prst="rect">
             <a:avLst/>
@@ -9810,25 +10379,25 @@
               </a:rPr>
               <a:t>Chaque module a une responsabilité claire. Cela facilite les tests, le debug et la maintenance.</a:t>
             </a:r>
-            <a:endParaRPr b="0" lang="fr-FR" sz="1150" spc="-1" strike="noStrike">
-              <a:solidFill>
-                <a:srgbClr val="000000"/>
-              </a:solidFill>
-              <a:latin typeface="Arial"/>
-            </a:endParaRPr>
-          </a:p>
-        </p:txBody>
-      </p:sp>
-      <p:sp>
-        <p:nvSpPr>
-          <p:cNvPr id="90" name="Shape 5"/>
+            <a:endParaRPr b="0" lang="en-US" sz="1150" spc="-1" strike="noStrike">
+              <a:solidFill>
+                <a:srgbClr val="000000"/>
+              </a:solidFill>
+              <a:latin typeface="Arial"/>
+            </a:endParaRPr>
+          </a:p>
+        </p:txBody>
+      </p:sp>
+      <p:sp>
+        <p:nvSpPr>
+          <p:cNvPr id="95" name="Shape 5"/>
           <p:cNvSpPr/>
           <p:nvPr/>
         </p:nvSpPr>
         <p:spPr>
           <a:xfrm>
             <a:off x="7726680" y="3017520"/>
-            <a:ext cx="3565800" cy="1325520"/>
+            <a:ext cx="3565440" cy="1325160"/>
           </a:xfrm>
           <a:prstGeom prst="roundRect">
             <a:avLst>
@@ -9845,7 +10414,7 @@
             <a:round/>
           </a:ln>
           <a:effectLst>
-            <a:outerShdw algn="bl" blurRad="12600" dir="2700000" dist="6109" kx="0" ky="0" rotWithShape="0" sx="100000" sy="100000">
+            <a:outerShdw algn="bl" blurRad="12600" dir="2700000" dist="6109" rotWithShape="0">
               <a:srgbClr val="000000">
                 <a:alpha val="10000"/>
               </a:srgbClr>
@@ -9863,6 +10432,11 @@
             <a:noAutofit/>
           </a:bodyPr>
           <a:p>
+            <a:pPr defTabSz="914400">
+              <a:lnSpc>
+                <a:spcPct val="100000"/>
+              </a:lnSpc>
+            </a:pPr>
             <a:endParaRPr b="0" lang="fr-FR" sz="1800" spc="-1" strike="noStrike">
               <a:solidFill>
                 <a:srgbClr val="000000"/>
@@ -9874,14 +10448,14 @@
       </p:sp>
       <p:sp>
         <p:nvSpPr>
-          <p:cNvPr id="91" name="Text 6"/>
+          <p:cNvPr id="96" name="Text 6"/>
           <p:cNvSpPr/>
           <p:nvPr/>
         </p:nvSpPr>
         <p:spPr>
           <a:xfrm>
             <a:off x="7863840" y="3154680"/>
-            <a:ext cx="3291480" cy="219240"/>
+            <a:ext cx="3291120" cy="218880"/>
           </a:xfrm>
           <a:prstGeom prst="rect">
             <a:avLst/>
@@ -9919,25 +10493,25 @@
               </a:rPr>
               <a:t>Persistance</a:t>
             </a:r>
-            <a:endParaRPr b="0" lang="fr-FR" sz="1400" spc="-1" strike="noStrike">
-              <a:solidFill>
-                <a:srgbClr val="000000"/>
-              </a:solidFill>
-              <a:latin typeface="Arial"/>
-            </a:endParaRPr>
-          </a:p>
-        </p:txBody>
-      </p:sp>
-      <p:sp>
-        <p:nvSpPr>
-          <p:cNvPr id="92" name="Text 7"/>
+            <a:endParaRPr b="0" lang="en-US" sz="1400" spc="-1" strike="noStrike">
+              <a:solidFill>
+                <a:srgbClr val="000000"/>
+              </a:solidFill>
+              <a:latin typeface="Arial"/>
+            </a:endParaRPr>
+          </a:p>
+        </p:txBody>
+      </p:sp>
+      <p:sp>
+        <p:nvSpPr>
+          <p:cNvPr id="97" name="Text 7"/>
           <p:cNvSpPr/>
           <p:nvPr/>
         </p:nvSpPr>
         <p:spPr>
           <a:xfrm>
             <a:off x="7863840" y="3429000"/>
-            <a:ext cx="3291480" cy="795240"/>
+            <a:ext cx="3291120" cy="794880"/>
           </a:xfrm>
           <a:prstGeom prst="rect">
             <a:avLst/>
@@ -9975,25 +10549,25 @@
               </a:rPr>
               <a:t>SQLite a été retenu pour ses transactions atomiques et sa meilleure robustesse qu’un simple fichier JSON.</a:t>
             </a:r>
-            <a:endParaRPr b="0" lang="fr-FR" sz="1150" spc="-1" strike="noStrike">
-              <a:solidFill>
-                <a:srgbClr val="000000"/>
-              </a:solidFill>
-              <a:latin typeface="Arial"/>
-            </a:endParaRPr>
-          </a:p>
-        </p:txBody>
-      </p:sp>
-      <p:sp>
-        <p:nvSpPr>
-          <p:cNvPr id="93" name="Shape 8"/>
+            <a:endParaRPr b="0" lang="en-US" sz="1150" spc="-1" strike="noStrike">
+              <a:solidFill>
+                <a:srgbClr val="000000"/>
+              </a:solidFill>
+              <a:latin typeface="Arial"/>
+            </a:endParaRPr>
+          </a:p>
+        </p:txBody>
+      </p:sp>
+      <p:sp>
+        <p:nvSpPr>
+          <p:cNvPr id="98" name="Shape 8"/>
           <p:cNvSpPr/>
           <p:nvPr/>
         </p:nvSpPr>
         <p:spPr>
           <a:xfrm>
             <a:off x="7726680" y="4526280"/>
-            <a:ext cx="3565800" cy="1325520"/>
+            <a:ext cx="3565440" cy="1325160"/>
           </a:xfrm>
           <a:prstGeom prst="roundRect">
             <a:avLst>
@@ -10010,7 +10584,7 @@
             <a:round/>
           </a:ln>
           <a:effectLst>
-            <a:outerShdw algn="bl" blurRad="12600" dir="2700000" dist="6109" kx="0" ky="0" rotWithShape="0" sx="100000" sy="100000">
+            <a:outerShdw algn="bl" blurRad="12600" dir="2700000" dist="6109" rotWithShape="0">
               <a:srgbClr val="000000">
                 <a:alpha val="10000"/>
               </a:srgbClr>
@@ -10028,6 +10602,11 @@
             <a:noAutofit/>
           </a:bodyPr>
           <a:p>
+            <a:pPr defTabSz="914400">
+              <a:lnSpc>
+                <a:spcPct val="100000"/>
+              </a:lnSpc>
+            </a:pPr>
             <a:endParaRPr b="0" lang="fr-FR" sz="1800" spc="-1" strike="noStrike">
               <a:solidFill>
                 <a:srgbClr val="000000"/>
@@ -10039,14 +10618,14 @@
       </p:sp>
       <p:sp>
         <p:nvSpPr>
-          <p:cNvPr id="94" name="Text 9"/>
+          <p:cNvPr id="99" name="Text 9"/>
           <p:cNvSpPr/>
           <p:nvPr/>
         </p:nvSpPr>
         <p:spPr>
           <a:xfrm>
             <a:off x="7863840" y="4663440"/>
-            <a:ext cx="3291480" cy="219240"/>
+            <a:ext cx="3291120" cy="218880"/>
           </a:xfrm>
           <a:prstGeom prst="rect">
             <a:avLst/>
@@ -10084,25 +10663,25 @@
               </a:rPr>
               <a:t>Contributions</a:t>
             </a:r>
-            <a:endParaRPr b="0" lang="fr-FR" sz="1400" spc="-1" strike="noStrike">
-              <a:solidFill>
-                <a:srgbClr val="000000"/>
-              </a:solidFill>
-              <a:latin typeface="Arial"/>
-            </a:endParaRPr>
-          </a:p>
-        </p:txBody>
-      </p:sp>
-      <p:sp>
-        <p:nvSpPr>
-          <p:cNvPr id="95" name="Text 10"/>
+            <a:endParaRPr b="0" lang="en-US" sz="1400" spc="-1" strike="noStrike">
+              <a:solidFill>
+                <a:srgbClr val="000000"/>
+              </a:solidFill>
+              <a:latin typeface="Arial"/>
+            </a:endParaRPr>
+          </a:p>
+        </p:txBody>
+      </p:sp>
+      <p:sp>
+        <p:nvSpPr>
+          <p:cNvPr id="100" name="Text 10"/>
           <p:cNvSpPr/>
           <p:nvPr/>
         </p:nvSpPr>
         <p:spPr>
           <a:xfrm>
             <a:off x="7863840" y="4937760"/>
-            <a:ext cx="3291480" cy="795240"/>
+            <a:ext cx="3291120" cy="794880"/>
           </a:xfrm>
           <a:prstGeom prst="rect">
             <a:avLst/>
@@ -10140,7 +10719,7 @@
               </a:rPr>
               <a:t>Adam : parsing, hardware comm, client, orchestration.</a:t>
             </a:r>
-            <a:endParaRPr b="0" lang="fr-FR" sz="1150" spc="-1" strike="noStrike">
+            <a:endParaRPr b="0" lang="en-US" sz="1150" spc="-1" strike="noStrike">
               <a:solidFill>
                 <a:srgbClr val="000000"/>
               </a:solidFill>
@@ -10165,18 +10744,18 @@
               </a:rPr>
               <a:t>Arhan : DB, room management, simulation, logging, maintenance.</a:t>
             </a:r>
-            <a:endParaRPr b="0" lang="fr-FR" sz="1150" spc="-1" strike="noStrike">
-              <a:solidFill>
-                <a:srgbClr val="000000"/>
-              </a:solidFill>
-              <a:latin typeface="Arial"/>
-            </a:endParaRPr>
-          </a:p>
-        </p:txBody>
-      </p:sp>
-      <p:sp>
-        <p:nvSpPr>
-          <p:cNvPr id="96" name="PlaceHolder 1"/>
+            <a:endParaRPr b="0" lang="en-US" sz="1150" spc="-1" strike="noStrike">
+              <a:solidFill>
+                <a:srgbClr val="000000"/>
+              </a:solidFill>
+              <a:latin typeface="Arial"/>
+            </a:endParaRPr>
+          </a:p>
+        </p:txBody>
+      </p:sp>
+      <p:sp>
+        <p:nvSpPr>
+          <p:cNvPr id="101" name="PlaceHolder 1"/>
           <p:cNvSpPr>
             <a:spLocks noGrp="1"/>
           </p:cNvSpPr>
@@ -10187,7 +10766,7 @@
         <p:spPr>
           <a:xfrm>
             <a:off x="11750040" y="6583680"/>
-            <a:ext cx="228240" cy="182520"/>
+            <a:ext cx="227880" cy="182160"/>
           </a:xfrm>
           <a:prstGeom prst="rect">
             <a:avLst/>
@@ -10207,6 +10786,9 @@
                 <a:spcPct val="100000"/>
               </a:lnSpc>
               <a:buNone/>
+              <a:tabLst>
+                <a:tab algn="l" pos="0"/>
+              </a:tabLst>
               <a:defRPr b="0" lang="en-US" sz="1000" spc="-1" strike="noStrike">
                 <a:solidFill>
                   <a:srgbClr val="ffffff"/>
@@ -10221,17 +10803,20 @@
                 <a:spcPct val="100000"/>
               </a:lnSpc>
               <a:buNone/>
-            </a:pPr>
-            <a:fld id="{3E7E1E2A-175F-4C3E-8C7E-017A80CC8131}" type="slidenum">
+              <a:tabLst>
+                <a:tab algn="l" pos="0"/>
+              </a:tabLst>
+            </a:pPr>
+            <a:fld id="{BDFAD797-86F1-493A-82BE-88A24458FA47}" type="slidenum">
               <a:rPr b="0" lang="en-US" sz="1000" spc="-1" strike="noStrike">
                 <a:solidFill>
                   <a:srgbClr val="ffffff"/>
                 </a:solidFill>
                 <a:latin typeface="Aptos"/>
               </a:rPr>
-              <a:t>&lt;numéro&gt;</a:t>
+              <a:t>&lt;number&gt;</a:t>
             </a:fld>
-            <a:endParaRPr b="0" lang="fr-FR" sz="1000" spc="-1" strike="noStrike">
+            <a:endParaRPr b="0" lang="en-US" sz="1000" spc="-1" strike="noStrike">
               <a:solidFill>
                 <a:srgbClr val="000000"/>
               </a:solidFill>
@@ -10244,7 +10829,7 @@
   </p:cSld>
   <mc:AlternateContent>
     <mc:Choice Requires="p14">
-      <p:transition spd="slow" p14:dur="2000"/>
+      <p:transition spd="slow" p14:dur="1250"/>
     </mc:Choice>
     <mc:Fallback>
       <p:transition spd="slow"/>
@@ -10272,14 +10857,14 @@
       </p:grpSpPr>
       <p:sp>
         <p:nvSpPr>
-          <p:cNvPr id="97" name="Text 0"/>
+          <p:cNvPr id="102" name="Text 0"/>
           <p:cNvSpPr/>
           <p:nvPr/>
         </p:nvSpPr>
         <p:spPr>
           <a:xfrm>
             <a:off x="502920" y="411480"/>
-            <a:ext cx="7131960" cy="411120"/>
+            <a:ext cx="7131600" cy="410760"/>
           </a:xfrm>
           <a:prstGeom prst="rect">
             <a:avLst/>
@@ -10318,25 +10903,25 @@
               </a:rPr>
               <a:t>Contraintes LoRa et choix techniques</a:t>
             </a:r>
-            <a:endParaRPr b="0" lang="fr-FR" sz="2400" spc="-1" strike="noStrike">
-              <a:solidFill>
-                <a:srgbClr val="000000"/>
-              </a:solidFill>
-              <a:latin typeface="Arial"/>
-            </a:endParaRPr>
-          </a:p>
-        </p:txBody>
-      </p:sp>
-      <p:sp>
-        <p:nvSpPr>
-          <p:cNvPr id="98" name="Text 1"/>
+            <a:endParaRPr b="0" lang="en-US" sz="2400" spc="-1" strike="noStrike">
+              <a:solidFill>
+                <a:srgbClr val="000000"/>
+              </a:solidFill>
+              <a:latin typeface="Arial"/>
+            </a:endParaRPr>
+          </a:p>
+        </p:txBody>
+      </p:sp>
+      <p:sp>
+        <p:nvSpPr>
+          <p:cNvPr id="103" name="Text 1"/>
           <p:cNvSpPr/>
           <p:nvPr/>
         </p:nvSpPr>
         <p:spPr>
           <a:xfrm>
             <a:off x="530280" y="841320"/>
-            <a:ext cx="7954920" cy="228240"/>
+            <a:ext cx="7954560" cy="227880"/>
           </a:xfrm>
           <a:prstGeom prst="rect">
             <a:avLst/>
@@ -10374,25 +10959,25 @@
               </a:rPr>
               <a:t>Les compromis qui ont guidé l’implémentation</a:t>
             </a:r>
-            <a:endParaRPr b="0" lang="fr-FR" sz="1050" spc="-1" strike="noStrike">
-              <a:solidFill>
-                <a:srgbClr val="000000"/>
-              </a:solidFill>
-              <a:latin typeface="Arial"/>
-            </a:endParaRPr>
-          </a:p>
-        </p:txBody>
-      </p:sp>
-      <p:sp>
-        <p:nvSpPr>
-          <p:cNvPr id="99" name="Shape 2"/>
+            <a:endParaRPr b="0" lang="en-US" sz="1050" spc="-1" strike="noStrike">
+              <a:solidFill>
+                <a:srgbClr val="000000"/>
+              </a:solidFill>
+              <a:latin typeface="Arial"/>
+            </a:endParaRPr>
+          </a:p>
+        </p:txBody>
+      </p:sp>
+      <p:sp>
+        <p:nvSpPr>
+          <p:cNvPr id="104" name="Shape 2"/>
           <p:cNvSpPr/>
           <p:nvPr/>
         </p:nvSpPr>
         <p:spPr>
           <a:xfrm>
             <a:off x="685800" y="1417320"/>
-            <a:ext cx="3565800" cy="1416960"/>
+            <a:ext cx="3565440" cy="1416600"/>
           </a:xfrm>
           <a:prstGeom prst="roundRect">
             <a:avLst>
@@ -10409,7 +10994,7 @@
             <a:round/>
           </a:ln>
           <a:effectLst>
-            <a:outerShdw algn="bl" blurRad="12600" dir="2700000" dist="6109" kx="0" ky="0" rotWithShape="0" sx="100000" sy="100000">
+            <a:outerShdw algn="bl" blurRad="12600" dir="2700000" dist="6109" rotWithShape="0">
               <a:srgbClr val="000000">
                 <a:alpha val="10000"/>
               </a:srgbClr>
@@ -10427,6 +11012,11 @@
             <a:noAutofit/>
           </a:bodyPr>
           <a:p>
+            <a:pPr defTabSz="914400">
+              <a:lnSpc>
+                <a:spcPct val="100000"/>
+              </a:lnSpc>
+            </a:pPr>
             <a:endParaRPr b="0" lang="fr-FR" sz="1800" spc="-1" strike="noStrike">
               <a:solidFill>
                 <a:srgbClr val="000000"/>
@@ -10438,14 +11028,14 @@
       </p:sp>
       <p:sp>
         <p:nvSpPr>
-          <p:cNvPr id="100" name="Text 3"/>
+          <p:cNvPr id="105" name="Text 3"/>
           <p:cNvSpPr/>
           <p:nvPr/>
         </p:nvSpPr>
         <p:spPr>
           <a:xfrm>
             <a:off x="822960" y="1554480"/>
-            <a:ext cx="3291480" cy="219240"/>
+            <a:ext cx="3291120" cy="218880"/>
           </a:xfrm>
           <a:prstGeom prst="rect">
             <a:avLst/>
@@ -10483,25 +11073,25 @@
               </a:rPr>
               <a:t>Payload limité</a:t>
             </a:r>
-            <a:endParaRPr b="0" lang="fr-FR" sz="1400" spc="-1" strike="noStrike">
-              <a:solidFill>
-                <a:srgbClr val="000000"/>
-              </a:solidFill>
-              <a:latin typeface="Arial"/>
-            </a:endParaRPr>
-          </a:p>
-        </p:txBody>
-      </p:sp>
-      <p:sp>
-        <p:nvSpPr>
-          <p:cNvPr id="101" name="Text 4"/>
+            <a:endParaRPr b="0" lang="en-US" sz="1400" spc="-1" strike="noStrike">
+              <a:solidFill>
+                <a:srgbClr val="000000"/>
+              </a:solidFill>
+              <a:latin typeface="Arial"/>
+            </a:endParaRPr>
+          </a:p>
+        </p:txBody>
+      </p:sp>
+      <p:sp>
+        <p:nvSpPr>
+          <p:cNvPr id="106" name="Text 4"/>
           <p:cNvSpPr/>
           <p:nvPr/>
         </p:nvSpPr>
         <p:spPr>
           <a:xfrm>
             <a:off x="822960" y="1828800"/>
-            <a:ext cx="3291480" cy="886680"/>
+            <a:ext cx="3291120" cy="886320"/>
           </a:xfrm>
           <a:prstGeom prst="rect">
             <a:avLst/>
@@ -10539,25 +11129,25 @@
               </a:rPr>
               <a:t>Les réponses doivent rester courtes pour éviter la saturation radio et limiter les pertes.</a:t>
             </a:r>
-            <a:endParaRPr b="0" lang="fr-FR" sz="1150" spc="-1" strike="noStrike">
-              <a:solidFill>
-                <a:srgbClr val="000000"/>
-              </a:solidFill>
-              <a:latin typeface="Arial"/>
-            </a:endParaRPr>
-          </a:p>
-        </p:txBody>
-      </p:sp>
-      <p:sp>
-        <p:nvSpPr>
-          <p:cNvPr id="102" name="Shape 5"/>
+            <a:endParaRPr b="0" lang="en-US" sz="1150" spc="-1" strike="noStrike">
+              <a:solidFill>
+                <a:srgbClr val="000000"/>
+              </a:solidFill>
+              <a:latin typeface="Arial"/>
+            </a:endParaRPr>
+          </a:p>
+        </p:txBody>
+      </p:sp>
+      <p:sp>
+        <p:nvSpPr>
+          <p:cNvPr id="107" name="Shape 5"/>
           <p:cNvSpPr/>
           <p:nvPr/>
         </p:nvSpPr>
         <p:spPr>
           <a:xfrm>
             <a:off x="685800" y="3063240"/>
-            <a:ext cx="3565800" cy="1416960"/>
+            <a:ext cx="3565440" cy="1416600"/>
           </a:xfrm>
           <a:prstGeom prst="roundRect">
             <a:avLst>
@@ -10574,7 +11164,7 @@
             <a:round/>
           </a:ln>
           <a:effectLst>
-            <a:outerShdw algn="bl" blurRad="12600" dir="2700000" dist="6109" kx="0" ky="0" rotWithShape="0" sx="100000" sy="100000">
+            <a:outerShdw algn="bl" blurRad="12600" dir="2700000" dist="6109" rotWithShape="0">
               <a:srgbClr val="000000">
                 <a:alpha val="10000"/>
               </a:srgbClr>
@@ -10592,6 +11182,11 @@
             <a:noAutofit/>
           </a:bodyPr>
           <a:p>
+            <a:pPr defTabSz="914400">
+              <a:lnSpc>
+                <a:spcPct val="100000"/>
+              </a:lnSpc>
+            </a:pPr>
             <a:endParaRPr b="0" lang="fr-FR" sz="1800" spc="-1" strike="noStrike">
               <a:solidFill>
                 <a:srgbClr val="000000"/>
@@ -10603,14 +11198,14 @@
       </p:sp>
       <p:sp>
         <p:nvSpPr>
-          <p:cNvPr id="103" name="Text 6"/>
+          <p:cNvPr id="108" name="Text 6"/>
           <p:cNvSpPr/>
           <p:nvPr/>
         </p:nvSpPr>
         <p:spPr>
           <a:xfrm>
             <a:off x="822960" y="3200400"/>
-            <a:ext cx="3291480" cy="219240"/>
+            <a:ext cx="3291120" cy="218880"/>
           </a:xfrm>
           <a:prstGeom prst="rect">
             <a:avLst/>
@@ -10648,25 +11243,25 @@
               </a:rPr>
               <a:t>Faible bande passante</a:t>
             </a:r>
-            <a:endParaRPr b="0" lang="fr-FR" sz="1400" spc="-1" strike="noStrike">
-              <a:solidFill>
-                <a:srgbClr val="000000"/>
-              </a:solidFill>
-              <a:latin typeface="Arial"/>
-            </a:endParaRPr>
-          </a:p>
-        </p:txBody>
-      </p:sp>
-      <p:sp>
-        <p:nvSpPr>
-          <p:cNvPr id="104" name="Text 7"/>
+            <a:endParaRPr b="0" lang="en-US" sz="1400" spc="-1" strike="noStrike">
+              <a:solidFill>
+                <a:srgbClr val="000000"/>
+              </a:solidFill>
+              <a:latin typeface="Arial"/>
+            </a:endParaRPr>
+          </a:p>
+        </p:txBody>
+      </p:sp>
+      <p:sp>
+        <p:nvSpPr>
+          <p:cNvPr id="109" name="Text 7"/>
           <p:cNvSpPr/>
           <p:nvPr/>
         </p:nvSpPr>
         <p:spPr>
           <a:xfrm>
             <a:off x="822960" y="3474720"/>
-            <a:ext cx="3291480" cy="886680"/>
+            <a:ext cx="3291120" cy="886320"/>
           </a:xfrm>
           <a:prstGeom prst="rect">
             <a:avLst/>
@@ -10704,25 +11299,25 @@
               </a:rPr>
               <a:t>La lecture d’historique est volontairement limitée et les réponses longues sont découpées.</a:t>
             </a:r>
-            <a:endParaRPr b="0" lang="fr-FR" sz="1150" spc="-1" strike="noStrike">
-              <a:solidFill>
-                <a:srgbClr val="000000"/>
-              </a:solidFill>
-              <a:latin typeface="Arial"/>
-            </a:endParaRPr>
-          </a:p>
-        </p:txBody>
-      </p:sp>
-      <p:sp>
-        <p:nvSpPr>
-          <p:cNvPr id="105" name="Shape 8"/>
+            <a:endParaRPr b="0" lang="en-US" sz="1150" spc="-1" strike="noStrike">
+              <a:solidFill>
+                <a:srgbClr val="000000"/>
+              </a:solidFill>
+              <a:latin typeface="Arial"/>
+            </a:endParaRPr>
+          </a:p>
+        </p:txBody>
+      </p:sp>
+      <p:sp>
+        <p:nvSpPr>
+          <p:cNvPr id="110" name="Shape 8"/>
           <p:cNvSpPr/>
           <p:nvPr/>
         </p:nvSpPr>
         <p:spPr>
           <a:xfrm>
             <a:off x="685800" y="4709160"/>
-            <a:ext cx="3565800" cy="1005480"/>
+            <a:ext cx="3565440" cy="1005120"/>
           </a:xfrm>
           <a:prstGeom prst="roundRect">
             <a:avLst>
@@ -10739,7 +11334,7 @@
             <a:round/>
           </a:ln>
           <a:effectLst>
-            <a:outerShdw algn="bl" blurRad="12600" dir="2700000" dist="6109" kx="0" ky="0" rotWithShape="0" sx="100000" sy="100000">
+            <a:outerShdw algn="bl" blurRad="12600" dir="2700000" dist="6109" rotWithShape="0">
               <a:srgbClr val="000000">
                 <a:alpha val="10000"/>
               </a:srgbClr>
@@ -10757,6 +11352,11 @@
             <a:noAutofit/>
           </a:bodyPr>
           <a:p>
+            <a:pPr defTabSz="914400">
+              <a:lnSpc>
+                <a:spcPct val="100000"/>
+              </a:lnSpc>
+            </a:pPr>
             <a:endParaRPr b="0" lang="fr-FR" sz="1800" spc="-1" strike="noStrike">
               <a:solidFill>
                 <a:srgbClr val="000000"/>
@@ -10768,14 +11368,14 @@
       </p:sp>
       <p:sp>
         <p:nvSpPr>
-          <p:cNvPr id="106" name="Text 9"/>
+          <p:cNvPr id="111" name="Text 9"/>
           <p:cNvSpPr/>
           <p:nvPr/>
         </p:nvSpPr>
         <p:spPr>
           <a:xfrm>
             <a:off x="822960" y="4846320"/>
-            <a:ext cx="3291480" cy="219240"/>
+            <a:ext cx="3291120" cy="218880"/>
           </a:xfrm>
           <a:prstGeom prst="rect">
             <a:avLst/>
@@ -10813,25 +11413,25 @@
               </a:rPr>
               <a:t>Interférences réseau</a:t>
             </a:r>
-            <a:endParaRPr b="0" lang="fr-FR" sz="1400" spc="-1" strike="noStrike">
-              <a:solidFill>
-                <a:srgbClr val="000000"/>
-              </a:solidFill>
-              <a:latin typeface="Arial"/>
-            </a:endParaRPr>
-          </a:p>
-        </p:txBody>
-      </p:sp>
-      <p:sp>
-        <p:nvSpPr>
-          <p:cNvPr id="107" name="Text 10"/>
+            <a:endParaRPr b="0" lang="en-US" sz="1400" spc="-1" strike="noStrike">
+              <a:solidFill>
+                <a:srgbClr val="000000"/>
+              </a:solidFill>
+              <a:latin typeface="Arial"/>
+            </a:endParaRPr>
+          </a:p>
+        </p:txBody>
+      </p:sp>
+      <p:sp>
+        <p:nvSpPr>
+          <p:cNvPr id="112" name="Text 10"/>
           <p:cNvSpPr/>
           <p:nvPr/>
         </p:nvSpPr>
         <p:spPr>
           <a:xfrm>
             <a:off x="822960" y="5120640"/>
-            <a:ext cx="3291480" cy="475200"/>
+            <a:ext cx="3291120" cy="474840"/>
           </a:xfrm>
           <a:prstGeom prst="rect">
             <a:avLst/>
@@ -10869,25 +11469,25 @@
               </a:rPr>
               <a:t>Utilisation d’un canal privé avec PSK dédiée pour isoler les tests.</a:t>
             </a:r>
-            <a:endParaRPr b="0" lang="fr-FR" sz="1150" spc="-1" strike="noStrike">
-              <a:solidFill>
-                <a:srgbClr val="000000"/>
-              </a:solidFill>
-              <a:latin typeface="Arial"/>
-            </a:endParaRPr>
-          </a:p>
-        </p:txBody>
-      </p:sp>
-      <p:sp>
-        <p:nvSpPr>
-          <p:cNvPr id="108" name="Shape 11"/>
+            <a:endParaRPr b="0" lang="en-US" sz="1150" spc="-1" strike="noStrike">
+              <a:solidFill>
+                <a:srgbClr val="000000"/>
+              </a:solidFill>
+              <a:latin typeface="Arial"/>
+            </a:endParaRPr>
+          </a:p>
+        </p:txBody>
+      </p:sp>
+      <p:sp>
+        <p:nvSpPr>
+          <p:cNvPr id="113" name="Shape 11"/>
           <p:cNvSpPr/>
           <p:nvPr/>
         </p:nvSpPr>
         <p:spPr>
           <a:xfrm>
             <a:off x="4663440" y="1371600"/>
-            <a:ext cx="6811920" cy="4525920"/>
+            <a:ext cx="6811560" cy="4525560"/>
           </a:xfrm>
           <a:prstGeom prst="roundRect">
             <a:avLst>
@@ -10915,6 +11515,11 @@
             <a:noAutofit/>
           </a:bodyPr>
           <a:p>
+            <a:pPr defTabSz="914400">
+              <a:lnSpc>
+                <a:spcPct val="100000"/>
+              </a:lnSpc>
+            </a:pPr>
             <a:endParaRPr b="0" lang="fr-FR" sz="1800" spc="-1" strike="noStrike">
               <a:solidFill>
                 <a:srgbClr val="000000"/>
@@ -10926,14 +11531,14 @@
       </p:sp>
       <p:sp>
         <p:nvSpPr>
-          <p:cNvPr id="109" name="Text 12"/>
+          <p:cNvPr id="114" name="Text 12"/>
           <p:cNvSpPr/>
           <p:nvPr/>
         </p:nvSpPr>
         <p:spPr>
           <a:xfrm>
             <a:off x="4892040" y="1645920"/>
-            <a:ext cx="2011320" cy="273960"/>
+            <a:ext cx="4520520" cy="182520"/>
           </a:xfrm>
           <a:prstGeom prst="rect">
             <a:avLst/>
@@ -10971,25 +11576,25 @@
               </a:rPr>
               <a:t>Réponses apportées</a:t>
             </a:r>
-            <a:endParaRPr b="0" lang="fr-FR" sz="1800" spc="-1" strike="noStrike">
-              <a:solidFill>
-                <a:srgbClr val="000000"/>
-              </a:solidFill>
-              <a:latin typeface="Arial"/>
-            </a:endParaRPr>
-          </a:p>
-        </p:txBody>
-      </p:sp>
-      <p:sp>
-        <p:nvSpPr>
-          <p:cNvPr id="110" name="Text 13"/>
+            <a:endParaRPr b="0" lang="en-US" sz="1800" spc="-1" strike="noStrike">
+              <a:solidFill>
+                <a:srgbClr val="000000"/>
+              </a:solidFill>
+              <a:latin typeface="Arial"/>
+            </a:endParaRPr>
+          </a:p>
+        </p:txBody>
+      </p:sp>
+      <p:sp>
+        <p:nvSpPr>
+          <p:cNvPr id="115" name="Text 13"/>
           <p:cNvSpPr/>
           <p:nvPr/>
         </p:nvSpPr>
         <p:spPr>
           <a:xfrm>
-            <a:off x="4892040" y="2011680"/>
-            <a:ext cx="6217560" cy="2651400"/>
+            <a:off x="4846320" y="2272320"/>
+            <a:ext cx="6217200" cy="2651040"/>
           </a:xfrm>
           <a:prstGeom prst="rect">
             <a:avLst/>
@@ -11029,7 +11634,7 @@
               </a:rPr>
               <a:t>Commandes courtes : /room create, /room list, /room post, /room read,/room info, /room annonce</a:t>
             </a:r>
-            <a:endParaRPr b="0" lang="fr-FR" sz="1700" spc="-1" strike="noStrike">
+            <a:endParaRPr b="0" lang="en-US" sz="1700" spc="-1" strike="noStrike">
               <a:solidFill>
                 <a:srgbClr val="000000"/>
               </a:solidFill>
@@ -11056,7 +11661,7 @@
               </a:rPr>
               <a:t>Chunking des messages trop longs pour améliorer la lisibilité et réduire le risque de perte.</a:t>
             </a:r>
-            <a:endParaRPr b="0" lang="fr-FR" sz="1700" spc="-1" strike="noStrike">
+            <a:endParaRPr b="0" lang="en-US" sz="1700" spc="-1" strike="noStrike">
               <a:solidFill>
                 <a:srgbClr val="000000"/>
               </a:solidFill>
@@ -11083,7 +11688,7 @@
               </a:rPr>
               <a:t>Messages administratifs envoyés en privé quand c’est pertinent.</a:t>
             </a:r>
-            <a:endParaRPr b="0" lang="fr-FR" sz="1700" spc="-1" strike="noStrike">
+            <a:endParaRPr b="0" lang="en-US" sz="1700" spc="-1" strike="noStrike">
               <a:solidFill>
                 <a:srgbClr val="000000"/>
               </a:solidFill>
@@ -11110,7 +11715,7 @@
               </a:rPr>
               <a:t>systemd pour redémarrage automatique au boot ou après échec.</a:t>
             </a:r>
-            <a:endParaRPr b="0" lang="fr-FR" sz="1700" spc="-1" strike="noStrike">
+            <a:endParaRPr b="0" lang="en-US" sz="1700" spc="-1" strike="noStrike">
               <a:solidFill>
                 <a:srgbClr val="000000"/>
               </a:solidFill>
@@ -11137,25 +11742,25 @@
               </a:rPr>
               <a:t>Surveillance du matériel et stratégie de reprise après déconnexion USB.</a:t>
             </a:r>
-            <a:endParaRPr b="0" lang="fr-FR" sz="1700" spc="-1" strike="noStrike">
-              <a:solidFill>
-                <a:srgbClr val="000000"/>
-              </a:solidFill>
-              <a:latin typeface="Arial"/>
-            </a:endParaRPr>
-          </a:p>
-        </p:txBody>
-      </p:sp>
-      <p:sp>
-        <p:nvSpPr>
-          <p:cNvPr id="111" name="Text 14"/>
+            <a:endParaRPr b="0" lang="en-US" sz="1700" spc="-1" strike="noStrike">
+              <a:solidFill>
+                <a:srgbClr val="000000"/>
+              </a:solidFill>
+              <a:latin typeface="Arial"/>
+            </a:endParaRPr>
+          </a:p>
+        </p:txBody>
+      </p:sp>
+      <p:sp>
+        <p:nvSpPr>
+          <p:cNvPr id="116" name="Text 14"/>
           <p:cNvSpPr/>
           <p:nvPr/>
         </p:nvSpPr>
         <p:spPr>
           <a:xfrm>
             <a:off x="4937760" y="4983480"/>
-            <a:ext cx="6126120" cy="548280"/>
+            <a:ext cx="6125760" cy="547920"/>
           </a:xfrm>
           <a:prstGeom prst="rect">
             <a:avLst/>
@@ -11193,18 +11798,18 @@
               </a:rPr>
               <a:t>Idée clé : dans un environnement contraint, la valeur vient moins de la complexité que du bon compromis entre simplicité, robustesse et démontrabilité.</a:t>
             </a:r>
-            <a:endParaRPr b="0" lang="fr-FR" sz="1600" spc="-1" strike="noStrike">
-              <a:solidFill>
-                <a:srgbClr val="000000"/>
-              </a:solidFill>
-              <a:latin typeface="Arial"/>
-            </a:endParaRPr>
-          </a:p>
-        </p:txBody>
-      </p:sp>
-      <p:sp>
-        <p:nvSpPr>
-          <p:cNvPr id="112" name="PlaceHolder 1"/>
+            <a:endParaRPr b="0" lang="en-US" sz="1600" spc="-1" strike="noStrike">
+              <a:solidFill>
+                <a:srgbClr val="000000"/>
+              </a:solidFill>
+              <a:latin typeface="Arial"/>
+            </a:endParaRPr>
+          </a:p>
+        </p:txBody>
+      </p:sp>
+      <p:sp>
+        <p:nvSpPr>
+          <p:cNvPr id="117" name="PlaceHolder 1"/>
           <p:cNvSpPr>
             <a:spLocks noGrp="1"/>
           </p:cNvSpPr>
@@ -11215,7 +11820,7 @@
         <p:spPr>
           <a:xfrm>
             <a:off x="11750040" y="6583680"/>
-            <a:ext cx="228240" cy="182520"/>
+            <a:ext cx="227880" cy="182160"/>
           </a:xfrm>
           <a:prstGeom prst="rect">
             <a:avLst/>
@@ -11235,6 +11840,9 @@
                 <a:spcPct val="100000"/>
               </a:lnSpc>
               <a:buNone/>
+              <a:tabLst>
+                <a:tab algn="l" pos="0"/>
+              </a:tabLst>
               <a:defRPr b="0" lang="en-US" sz="1000" spc="-1" strike="noStrike">
                 <a:solidFill>
                   <a:srgbClr val="ffffff"/>
@@ -11249,17 +11857,20 @@
                 <a:spcPct val="100000"/>
               </a:lnSpc>
               <a:buNone/>
-            </a:pPr>
-            <a:fld id="{0DEEF3FF-2BFF-4DA7-A79B-84D6B81DF762}" type="slidenum">
+              <a:tabLst>
+                <a:tab algn="l" pos="0"/>
+              </a:tabLst>
+            </a:pPr>
+            <a:fld id="{95543BA4-B5A9-4B68-89CB-03A3E08CF2C1}" type="slidenum">
               <a:rPr b="0" lang="en-US" sz="1000" spc="-1" strike="noStrike">
                 <a:solidFill>
                   <a:srgbClr val="ffffff"/>
                 </a:solidFill>
                 <a:latin typeface="Aptos"/>
               </a:rPr>
-              <a:t>&lt;numéro&gt;</a:t>
+              <a:t>&lt;number&gt;</a:t>
             </a:fld>
-            <a:endParaRPr b="0" lang="fr-FR" sz="1000" spc="-1" strike="noStrike">
+            <a:endParaRPr b="0" lang="en-US" sz="1000" spc="-1" strike="noStrike">
               <a:solidFill>
                 <a:srgbClr val="000000"/>
               </a:solidFill>
@@ -11300,14 +11911,14 @@
       </p:grpSpPr>
       <p:sp>
         <p:nvSpPr>
-          <p:cNvPr id="113" name="Text 0"/>
+          <p:cNvPr id="118" name="Text 0"/>
           <p:cNvSpPr/>
           <p:nvPr/>
         </p:nvSpPr>
         <p:spPr>
           <a:xfrm>
             <a:off x="502920" y="411480"/>
-            <a:ext cx="7131960" cy="411120"/>
+            <a:ext cx="7131600" cy="410760"/>
           </a:xfrm>
           <a:prstGeom prst="rect">
             <a:avLst/>
@@ -11346,25 +11957,25 @@
               </a:rPr>
               <a:t>Validation et démonstration</a:t>
             </a:r>
-            <a:endParaRPr b="0" lang="fr-FR" sz="2400" spc="-1" strike="noStrike">
-              <a:solidFill>
-                <a:srgbClr val="000000"/>
-              </a:solidFill>
-              <a:latin typeface="Arial"/>
-            </a:endParaRPr>
-          </a:p>
-        </p:txBody>
-      </p:sp>
-      <p:sp>
-        <p:nvSpPr>
-          <p:cNvPr id="114" name="Text 1"/>
+            <a:endParaRPr b="0" lang="en-US" sz="2400" spc="-1" strike="noStrike">
+              <a:solidFill>
+                <a:srgbClr val="000000"/>
+              </a:solidFill>
+              <a:latin typeface="Arial"/>
+            </a:endParaRPr>
+          </a:p>
+        </p:txBody>
+      </p:sp>
+      <p:sp>
+        <p:nvSpPr>
+          <p:cNvPr id="119" name="Text 1"/>
           <p:cNvSpPr/>
           <p:nvPr/>
         </p:nvSpPr>
         <p:spPr>
           <a:xfrm>
             <a:off x="530280" y="841320"/>
-            <a:ext cx="7954920" cy="228240"/>
+            <a:ext cx="7954560" cy="227880"/>
           </a:xfrm>
           <a:prstGeom prst="rect">
             <a:avLst/>
@@ -11402,7 +12013,7 @@
               </a:rPr>
               <a:t>Ce qui a été effectivement testé sur le démonstrateur</a:t>
             </a:r>
-            <a:endParaRPr b="0" lang="fr-FR" sz="1050" spc="-1" strike="noStrike">
+            <a:endParaRPr b="0" lang="en-US" sz="1050" spc="-1" strike="noStrike">
               <a:solidFill>
                 <a:srgbClr val="000000"/>
               </a:solidFill>
@@ -11413,7 +12024,7 @@
       </p:sp>
       <p:graphicFrame>
         <p:nvGraphicFramePr>
-          <p:cNvPr id="115" name="Table 0"/>
+          <p:cNvPr id="120" name="Table 0"/>
           <p:cNvGraphicFramePr/>
           <p:nvPr/>
         </p:nvGraphicFramePr>
@@ -11454,7 +12065,7 @@
                         </a:rPr>
                         <a:t>Créer une room</a:t>
                       </a:r>
-                      <a:endParaRPr b="0" lang="fr-FR" sz="1230" spc="-1" strike="noStrike">
+                      <a:endParaRPr b="0" lang="en-US" sz="1230" spc="-1" strike="noStrike">
                         <a:solidFill>
                           <a:srgbClr val="000000"/>
                         </a:solidFill>
@@ -11515,7 +12126,7 @@
                         </a:rPr>
                         <a:t>Commande exécutée et accusé de réception</a:t>
                       </a:r>
-                      <a:endParaRPr b="0" lang="fr-FR" sz="1230" spc="-1" strike="noStrike">
+                      <a:endParaRPr b="0" lang="en-US" sz="1230" spc="-1" strike="noStrike">
                         <a:solidFill>
                           <a:srgbClr val="000000"/>
                         </a:solidFill>
@@ -11576,7 +12187,7 @@
                         </a:rPr>
                         <a:t>Validé</a:t>
                       </a:r>
-                      <a:endParaRPr b="0" lang="fr-FR" sz="1230" spc="-1" strike="noStrike">
+                      <a:endParaRPr b="0" lang="en-US" sz="1230" spc="-1" strike="noStrike">
                         <a:solidFill>
                           <a:srgbClr val="000000"/>
                         </a:solidFill>
@@ -11639,7 +12250,7 @@
                         </a:rPr>
                         <a:t>Poster un message</a:t>
                       </a:r>
-                      <a:endParaRPr b="0" lang="fr-FR" sz="1230" spc="-1" strike="noStrike">
+                      <a:endParaRPr b="0" lang="en-US" sz="1230" spc="-1" strike="noStrike">
                         <a:solidFill>
                           <a:srgbClr val="000000"/>
                         </a:solidFill>
@@ -11700,7 +12311,7 @@
                         </a:rPr>
                         <a:t>Message stocké dans la bonne room</a:t>
                       </a:r>
-                      <a:endParaRPr b="0" lang="fr-FR" sz="1230" spc="-1" strike="noStrike">
+                      <a:endParaRPr b="0" lang="en-US" sz="1230" spc="-1" strike="noStrike">
                         <a:solidFill>
                           <a:srgbClr val="000000"/>
                         </a:solidFill>
@@ -11761,7 +12372,7 @@
                         </a:rPr>
                         <a:t>Validé</a:t>
                       </a:r>
-                      <a:endParaRPr b="0" lang="fr-FR" sz="1230" spc="-1" strike="noStrike">
+                      <a:endParaRPr b="0" lang="en-US" sz="1230" spc="-1" strike="noStrike">
                         <a:solidFill>
                           <a:srgbClr val="000000"/>
                         </a:solidFill>
@@ -11824,7 +12435,7 @@
                         </a:rPr>
                         <a:t>Lire l’historique</a:t>
                       </a:r>
-                      <a:endParaRPr b="0" lang="fr-FR" sz="1230" spc="-1" strike="noStrike">
+                      <a:endParaRPr b="0" lang="en-US" sz="1230" spc="-1" strike="noStrike">
                         <a:solidFill>
                           <a:srgbClr val="000000"/>
                         </a:solidFill>
@@ -11885,7 +12496,7 @@
                         </a:rPr>
                         <a:t>Retour des derniers messages formatés</a:t>
                       </a:r>
-                      <a:endParaRPr b="0" lang="fr-FR" sz="1230" spc="-1" strike="noStrike">
+                      <a:endParaRPr b="0" lang="en-US" sz="1230" spc="-1" strike="noStrike">
                         <a:solidFill>
                           <a:srgbClr val="000000"/>
                         </a:solidFill>
@@ -11946,7 +12557,7 @@
                         </a:rPr>
                         <a:t>Validé</a:t>
                       </a:r>
-                      <a:endParaRPr b="0" lang="fr-FR" sz="1230" spc="-1" strike="noStrike">
+                      <a:endParaRPr b="0" lang="en-US" sz="1230" spc="-1" strike="noStrike">
                         <a:solidFill>
                           <a:srgbClr val="000000"/>
                         </a:solidFill>
@@ -12009,7 +12620,7 @@
                         </a:rPr>
                         <a:t>Redémarrer le serveur</a:t>
                       </a:r>
-                      <a:endParaRPr b="0" lang="fr-FR" sz="1230" spc="-1" strike="noStrike">
+                      <a:endParaRPr b="0" lang="en-US" sz="1230" spc="-1" strike="noStrike">
                         <a:solidFill>
                           <a:srgbClr val="000000"/>
                         </a:solidFill>
@@ -12070,7 +12681,7 @@
                         </a:rPr>
                         <a:t>Données toujours présentes après reboot</a:t>
                       </a:r>
-                      <a:endParaRPr b="0" lang="fr-FR" sz="1230" spc="-1" strike="noStrike">
+                      <a:endParaRPr b="0" lang="en-US" sz="1230" spc="-1" strike="noStrike">
                         <a:solidFill>
                           <a:srgbClr val="000000"/>
                         </a:solidFill>
@@ -12131,7 +12742,7 @@
                         </a:rPr>
                         <a:t>Validé</a:t>
                       </a:r>
-                      <a:endParaRPr b="0" lang="fr-FR" sz="1230" spc="-1" strike="noStrike">
+                      <a:endParaRPr b="0" lang="en-US" sz="1230" spc="-1" strike="noStrike">
                         <a:solidFill>
                           <a:srgbClr val="000000"/>
                         </a:solidFill>
@@ -12194,7 +12805,7 @@
                         </a:rPr>
                         <a:t>Débrancher le module USB</a:t>
                       </a:r>
-                      <a:endParaRPr b="0" lang="fr-FR" sz="1230" spc="-1" strike="noStrike">
+                      <a:endParaRPr b="0" lang="en-US" sz="1230" spc="-1" strike="noStrike">
                         <a:solidFill>
                           <a:srgbClr val="000000"/>
                         </a:solidFill>
@@ -12255,7 +12866,7 @@
                         </a:rPr>
                         <a:t>Sortie propre puis relance via systemd</a:t>
                       </a:r>
-                      <a:endParaRPr b="0" lang="fr-FR" sz="1230" spc="-1" strike="noStrike">
+                      <a:endParaRPr b="0" lang="en-US" sz="1230" spc="-1" strike="noStrike">
                         <a:solidFill>
                           <a:srgbClr val="000000"/>
                         </a:solidFill>
@@ -12316,7 +12927,7 @@
                         </a:rPr>
                         <a:t>Validé</a:t>
                       </a:r>
-                      <a:endParaRPr b="0" lang="fr-FR" sz="1230" spc="-1" strike="noStrike">
+                      <a:endParaRPr b="0" lang="en-US" sz="1230" spc="-1" strike="noStrike">
                         <a:solidFill>
                           <a:srgbClr val="000000"/>
                         </a:solidFill>
@@ -12379,7 +12990,7 @@
                         </a:rPr>
                         <a:t>Canal privé</a:t>
                       </a:r>
-                      <a:endParaRPr b="0" lang="fr-FR" sz="1230" spc="-1" strike="noStrike">
+                      <a:endParaRPr b="0" lang="en-US" sz="1230" spc="-1" strike="noStrike">
                         <a:solidFill>
                           <a:srgbClr val="000000"/>
                         </a:solidFill>
@@ -12440,7 +13051,7 @@
                         </a:rPr>
                         <a:t>Isolation par rapport au trafic public</a:t>
                       </a:r>
-                      <a:endParaRPr b="0" lang="fr-FR" sz="1230" spc="-1" strike="noStrike">
+                      <a:endParaRPr b="0" lang="en-US" sz="1230" spc="-1" strike="noStrike">
                         <a:solidFill>
                           <a:srgbClr val="000000"/>
                         </a:solidFill>
@@ -12501,7 +13112,7 @@
                         </a:rPr>
                         <a:t>Validé</a:t>
                       </a:r>
-                      <a:endParaRPr b="0" lang="fr-FR" sz="1230" spc="-1" strike="noStrike">
+                      <a:endParaRPr b="0" lang="en-US" sz="1230" spc="-1" strike="noStrike">
                         <a:solidFill>
                           <a:srgbClr val="000000"/>
                         </a:solidFill>
@@ -12546,14 +13157,14 @@
       </p:graphicFrame>
       <p:sp>
         <p:nvSpPr>
-          <p:cNvPr id="116" name="Shape 2"/>
+          <p:cNvPr id="121" name="Shape 2"/>
           <p:cNvSpPr/>
           <p:nvPr/>
         </p:nvSpPr>
         <p:spPr>
           <a:xfrm>
             <a:off x="7543800" y="1645920"/>
-            <a:ext cx="3657240" cy="1325520"/>
+            <a:ext cx="3656880" cy="1325160"/>
           </a:xfrm>
           <a:prstGeom prst="roundRect">
             <a:avLst>
@@ -12570,7 +13181,7 @@
             <a:round/>
           </a:ln>
           <a:effectLst>
-            <a:outerShdw algn="bl" blurRad="12600" dir="2700000" dist="6109" kx="0" ky="0" rotWithShape="0" sx="100000" sy="100000">
+            <a:outerShdw algn="bl" blurRad="12600" dir="2700000" dist="6109" rotWithShape="0">
               <a:srgbClr val="000000">
                 <a:alpha val="10000"/>
               </a:srgbClr>
@@ -12588,6 +13199,11 @@
             <a:noAutofit/>
           </a:bodyPr>
           <a:p>
+            <a:pPr defTabSz="914400">
+              <a:lnSpc>
+                <a:spcPct val="100000"/>
+              </a:lnSpc>
+            </a:pPr>
             <a:endParaRPr b="0" lang="fr-FR" sz="1800" spc="-1" strike="noStrike">
               <a:solidFill>
                 <a:srgbClr val="000000"/>
@@ -12599,14 +13215,14 @@
       </p:sp>
       <p:sp>
         <p:nvSpPr>
-          <p:cNvPr id="117" name="Text 3"/>
+          <p:cNvPr id="122" name="Text 3"/>
           <p:cNvSpPr/>
           <p:nvPr/>
         </p:nvSpPr>
         <p:spPr>
           <a:xfrm>
             <a:off x="7680960" y="1783080"/>
-            <a:ext cx="3382920" cy="219240"/>
+            <a:ext cx="3382560" cy="218880"/>
           </a:xfrm>
           <a:prstGeom prst="rect">
             <a:avLst/>
@@ -12644,25 +13260,25 @@
               </a:rPr>
               <a:t>Stratégie</a:t>
             </a:r>
-            <a:endParaRPr b="0" lang="fr-FR" sz="1400" spc="-1" strike="noStrike">
-              <a:solidFill>
-                <a:srgbClr val="000000"/>
-              </a:solidFill>
-              <a:latin typeface="Arial"/>
-            </a:endParaRPr>
-          </a:p>
-        </p:txBody>
-      </p:sp>
-      <p:sp>
-        <p:nvSpPr>
-          <p:cNvPr id="118" name="Text 4"/>
+            <a:endParaRPr b="0" lang="en-US" sz="1400" spc="-1" strike="noStrike">
+              <a:solidFill>
+                <a:srgbClr val="000000"/>
+              </a:solidFill>
+              <a:latin typeface="Arial"/>
+            </a:endParaRPr>
+          </a:p>
+        </p:txBody>
+      </p:sp>
+      <p:sp>
+        <p:nvSpPr>
+          <p:cNvPr id="123" name="Text 4"/>
           <p:cNvSpPr/>
           <p:nvPr/>
         </p:nvSpPr>
         <p:spPr>
           <a:xfrm>
             <a:off x="7680960" y="2057400"/>
-            <a:ext cx="3382920" cy="795240"/>
+            <a:ext cx="3382560" cy="794880"/>
           </a:xfrm>
           <a:prstGeom prst="rect">
             <a:avLst/>
@@ -12700,25 +13316,25 @@
               </a:rPr>
               <a:t>Validation progressive : d’abord en environnement mock, puis sur matériel réel.</a:t>
             </a:r>
-            <a:endParaRPr b="0" lang="fr-FR" sz="1150" spc="-1" strike="noStrike">
-              <a:solidFill>
-                <a:srgbClr val="000000"/>
-              </a:solidFill>
-              <a:latin typeface="Arial"/>
-            </a:endParaRPr>
-          </a:p>
-        </p:txBody>
-      </p:sp>
-      <p:sp>
-        <p:nvSpPr>
-          <p:cNvPr id="119" name="Shape 5"/>
+            <a:endParaRPr b="0" lang="en-US" sz="1150" spc="-1" strike="noStrike">
+              <a:solidFill>
+                <a:srgbClr val="000000"/>
+              </a:solidFill>
+              <a:latin typeface="Arial"/>
+            </a:endParaRPr>
+          </a:p>
+        </p:txBody>
+      </p:sp>
+      <p:sp>
+        <p:nvSpPr>
+          <p:cNvPr id="124" name="Shape 5"/>
           <p:cNvSpPr/>
           <p:nvPr/>
         </p:nvSpPr>
         <p:spPr>
           <a:xfrm>
             <a:off x="7543800" y="3200400"/>
-            <a:ext cx="3657240" cy="1325520"/>
+            <a:ext cx="3656880" cy="1325160"/>
           </a:xfrm>
           <a:prstGeom prst="roundRect">
             <a:avLst>
@@ -12735,7 +13351,7 @@
             <a:round/>
           </a:ln>
           <a:effectLst>
-            <a:outerShdw algn="bl" blurRad="12600" dir="2700000" dist="6109" kx="0" ky="0" rotWithShape="0" sx="100000" sy="100000">
+            <a:outerShdw algn="bl" blurRad="12600" dir="2700000" dist="6109" rotWithShape="0">
               <a:srgbClr val="000000">
                 <a:alpha val="10000"/>
               </a:srgbClr>
@@ -12753,6 +13369,11 @@
             <a:noAutofit/>
           </a:bodyPr>
           <a:p>
+            <a:pPr defTabSz="914400">
+              <a:lnSpc>
+                <a:spcPct val="100000"/>
+              </a:lnSpc>
+            </a:pPr>
             <a:endParaRPr b="0" lang="fr-FR" sz="1800" spc="-1" strike="noStrike">
               <a:solidFill>
                 <a:srgbClr val="000000"/>
@@ -12764,14 +13385,14 @@
       </p:sp>
       <p:sp>
         <p:nvSpPr>
-          <p:cNvPr id="120" name="Text 6"/>
+          <p:cNvPr id="125" name="Text 6"/>
           <p:cNvSpPr/>
           <p:nvPr/>
         </p:nvSpPr>
         <p:spPr>
           <a:xfrm>
             <a:off x="7680960" y="3337560"/>
-            <a:ext cx="3382920" cy="219240"/>
+            <a:ext cx="3382560" cy="218880"/>
           </a:xfrm>
           <a:prstGeom prst="rect">
             <a:avLst/>
@@ -12809,25 +13430,25 @@
               </a:rPr>
               <a:t>Résultat principal</a:t>
             </a:r>
-            <a:endParaRPr b="0" lang="fr-FR" sz="1400" spc="-1" strike="noStrike">
-              <a:solidFill>
-                <a:srgbClr val="000000"/>
-              </a:solidFill>
-              <a:latin typeface="Arial"/>
-            </a:endParaRPr>
-          </a:p>
-        </p:txBody>
-      </p:sp>
-      <p:sp>
-        <p:nvSpPr>
-          <p:cNvPr id="121" name="Text 7"/>
+            <a:endParaRPr b="0" lang="en-US" sz="1400" spc="-1" strike="noStrike">
+              <a:solidFill>
+                <a:srgbClr val="000000"/>
+              </a:solidFill>
+              <a:latin typeface="Arial"/>
+            </a:endParaRPr>
+          </a:p>
+        </p:txBody>
+      </p:sp>
+      <p:sp>
+        <p:nvSpPr>
+          <p:cNvPr id="126" name="Text 7"/>
           <p:cNvSpPr/>
           <p:nvPr/>
         </p:nvSpPr>
         <p:spPr>
           <a:xfrm>
             <a:off x="7680960" y="3611880"/>
-            <a:ext cx="3382920" cy="795240"/>
+            <a:ext cx="3382560" cy="794880"/>
           </a:xfrm>
           <a:prstGeom prst="rect">
             <a:avLst/>
@@ -12865,25 +13486,25 @@
               </a:rPr>
               <a:t>Le projet a démontré qu’un nœud Raspberry Pi peut étendre Meshtastic avec des rooms persistantes et une reprise contrôlée après panne.</a:t>
             </a:r>
-            <a:endParaRPr b="0" lang="fr-FR" sz="1150" spc="-1" strike="noStrike">
-              <a:solidFill>
-                <a:srgbClr val="000000"/>
-              </a:solidFill>
-              <a:latin typeface="Arial"/>
-            </a:endParaRPr>
-          </a:p>
-        </p:txBody>
-      </p:sp>
-      <p:sp>
-        <p:nvSpPr>
-          <p:cNvPr id="122" name="Shape 8"/>
+            <a:endParaRPr b="0" lang="en-US" sz="1150" spc="-1" strike="noStrike">
+              <a:solidFill>
+                <a:srgbClr val="000000"/>
+              </a:solidFill>
+              <a:latin typeface="Arial"/>
+            </a:endParaRPr>
+          </a:p>
+        </p:txBody>
+      </p:sp>
+      <p:sp>
+        <p:nvSpPr>
+          <p:cNvPr id="127" name="Shape 8"/>
           <p:cNvSpPr/>
           <p:nvPr/>
         </p:nvSpPr>
         <p:spPr>
           <a:xfrm>
             <a:off x="7543800" y="4754880"/>
-            <a:ext cx="3657240" cy="1051200"/>
+            <a:ext cx="3656880" cy="1050840"/>
           </a:xfrm>
           <a:prstGeom prst="roundRect">
             <a:avLst>
@@ -12900,7 +13521,7 @@
             <a:round/>
           </a:ln>
           <a:effectLst>
-            <a:outerShdw algn="bl" blurRad="12600" dir="2700000" dist="6109" kx="0" ky="0" rotWithShape="0" sx="100000" sy="100000">
+            <a:outerShdw algn="bl" blurRad="12600" dir="2700000" dist="6109" rotWithShape="0">
               <a:srgbClr val="000000">
                 <a:alpha val="10000"/>
               </a:srgbClr>
@@ -12918,6 +13539,11 @@
             <a:noAutofit/>
           </a:bodyPr>
           <a:p>
+            <a:pPr defTabSz="914400">
+              <a:lnSpc>
+                <a:spcPct val="100000"/>
+              </a:lnSpc>
+            </a:pPr>
             <a:endParaRPr b="0" lang="fr-FR" sz="1800" spc="-1" strike="noStrike">
               <a:solidFill>
                 <a:srgbClr val="000000"/>
@@ -12929,14 +13555,14 @@
       </p:sp>
       <p:sp>
         <p:nvSpPr>
-          <p:cNvPr id="123" name="Text 9"/>
+          <p:cNvPr id="128" name="Text 9"/>
           <p:cNvSpPr/>
           <p:nvPr/>
         </p:nvSpPr>
         <p:spPr>
           <a:xfrm>
             <a:off x="7680960" y="4892040"/>
-            <a:ext cx="3382920" cy="219240"/>
+            <a:ext cx="3382560" cy="218880"/>
           </a:xfrm>
           <a:prstGeom prst="rect">
             <a:avLst/>
@@ -12974,25 +13600,25 @@
               </a:rPr>
               <a:t>Limite assumée</a:t>
             </a:r>
-            <a:endParaRPr b="0" lang="fr-FR" sz="1400" spc="-1" strike="noStrike">
-              <a:solidFill>
-                <a:srgbClr val="000000"/>
-              </a:solidFill>
-              <a:latin typeface="Arial"/>
-            </a:endParaRPr>
-          </a:p>
-        </p:txBody>
-      </p:sp>
-      <p:sp>
-        <p:nvSpPr>
-          <p:cNvPr id="124" name="Text 10"/>
+            <a:endParaRPr b="0" lang="en-US" sz="1400" spc="-1" strike="noStrike">
+              <a:solidFill>
+                <a:srgbClr val="000000"/>
+              </a:solidFill>
+              <a:latin typeface="Arial"/>
+            </a:endParaRPr>
+          </a:p>
+        </p:txBody>
+      </p:sp>
+      <p:sp>
+        <p:nvSpPr>
+          <p:cNvPr id="129" name="Text 10"/>
           <p:cNvSpPr/>
           <p:nvPr/>
         </p:nvSpPr>
         <p:spPr>
           <a:xfrm>
             <a:off x="7680960" y="5166360"/>
-            <a:ext cx="3382920" cy="520920"/>
+            <a:ext cx="3382560" cy="520560"/>
           </a:xfrm>
           <a:prstGeom prst="rect">
             <a:avLst/>
@@ -13030,18 +13656,18 @@
               </a:rPr>
               <a:t>La campagne est surtout qualitative : peu de mesures massives de latence multi-clients.</a:t>
             </a:r>
-            <a:endParaRPr b="0" lang="fr-FR" sz="1150" spc="-1" strike="noStrike">
-              <a:solidFill>
-                <a:srgbClr val="000000"/>
-              </a:solidFill>
-              <a:latin typeface="Arial"/>
-            </a:endParaRPr>
-          </a:p>
-        </p:txBody>
-      </p:sp>
-      <p:sp>
-        <p:nvSpPr>
-          <p:cNvPr id="125" name="PlaceHolder 1"/>
+            <a:endParaRPr b="0" lang="en-US" sz="1150" spc="-1" strike="noStrike">
+              <a:solidFill>
+                <a:srgbClr val="000000"/>
+              </a:solidFill>
+              <a:latin typeface="Arial"/>
+            </a:endParaRPr>
+          </a:p>
+        </p:txBody>
+      </p:sp>
+      <p:sp>
+        <p:nvSpPr>
+          <p:cNvPr id="130" name="PlaceHolder 1"/>
           <p:cNvSpPr>
             <a:spLocks noGrp="1"/>
           </p:cNvSpPr>
@@ -13052,7 +13678,7 @@
         <p:spPr>
           <a:xfrm>
             <a:off x="11750040" y="6583680"/>
-            <a:ext cx="228240" cy="182520"/>
+            <a:ext cx="227880" cy="182160"/>
           </a:xfrm>
           <a:prstGeom prst="rect">
             <a:avLst/>
@@ -13072,6 +13698,9 @@
                 <a:spcPct val="100000"/>
               </a:lnSpc>
               <a:buNone/>
+              <a:tabLst>
+                <a:tab algn="l" pos="0"/>
+              </a:tabLst>
               <a:defRPr b="0" lang="en-US" sz="1000" spc="-1" strike="noStrike">
                 <a:solidFill>
                   <a:srgbClr val="ffffff"/>
@@ -13086,17 +13715,20 @@
                 <a:spcPct val="100000"/>
               </a:lnSpc>
               <a:buNone/>
-            </a:pPr>
-            <a:fld id="{A81D54F8-D9B3-4FC2-97DE-B8C4301D1B7E}" type="slidenum">
+              <a:tabLst>
+                <a:tab algn="l" pos="0"/>
+              </a:tabLst>
+            </a:pPr>
+            <a:fld id="{8E1CCDC2-4143-47C3-B860-97C9A46843D1}" type="slidenum">
               <a:rPr b="0" lang="en-US" sz="1000" spc="-1" strike="noStrike">
                 <a:solidFill>
                   <a:srgbClr val="ffffff"/>
                 </a:solidFill>
                 <a:latin typeface="Aptos"/>
               </a:rPr>
-              <a:t>&lt;numéro&gt;</a:t>
+              <a:t>&lt;number&gt;</a:t>
             </a:fld>
-            <a:endParaRPr b="0" lang="fr-FR" sz="1000" spc="-1" strike="noStrike">
+            <a:endParaRPr b="0" lang="en-US" sz="1000" spc="-1" strike="noStrike">
               <a:solidFill>
                 <a:srgbClr val="000000"/>
               </a:solidFill>
@@ -13137,14 +13769,14 @@
       </p:grpSpPr>
       <p:sp>
         <p:nvSpPr>
-          <p:cNvPr id="126" name="Text 0"/>
+          <p:cNvPr id="131" name="Text 0"/>
           <p:cNvSpPr/>
           <p:nvPr/>
         </p:nvSpPr>
         <p:spPr>
           <a:xfrm>
             <a:off x="502920" y="411480"/>
-            <a:ext cx="7131960" cy="411120"/>
+            <a:ext cx="7131600" cy="410760"/>
           </a:xfrm>
           <a:prstGeom prst="rect">
             <a:avLst/>
@@ -13183,25 +13815,25 @@
               </a:rPr>
               <a:t>Bilan, apport et perspectives</a:t>
             </a:r>
-            <a:endParaRPr b="0" lang="fr-FR" sz="2400" spc="-1" strike="noStrike">
-              <a:solidFill>
-                <a:srgbClr val="000000"/>
-              </a:solidFill>
-              <a:latin typeface="Arial"/>
-            </a:endParaRPr>
-          </a:p>
-        </p:txBody>
-      </p:sp>
-      <p:sp>
-        <p:nvSpPr>
-          <p:cNvPr id="127" name="Text 1"/>
+            <a:endParaRPr b="0" lang="en-US" sz="2400" spc="-1" strike="noStrike">
+              <a:solidFill>
+                <a:srgbClr val="000000"/>
+              </a:solidFill>
+              <a:latin typeface="Arial"/>
+            </a:endParaRPr>
+          </a:p>
+        </p:txBody>
+      </p:sp>
+      <p:sp>
+        <p:nvSpPr>
+          <p:cNvPr id="132" name="Text 1"/>
           <p:cNvSpPr/>
           <p:nvPr/>
         </p:nvSpPr>
         <p:spPr>
           <a:xfrm>
             <a:off x="530280" y="841320"/>
-            <a:ext cx="7954920" cy="228240"/>
+            <a:ext cx="7954560" cy="227880"/>
           </a:xfrm>
           <a:prstGeom prst="rect">
             <a:avLst/>
@@ -13239,25 +13871,25 @@
               </a:rPr>
               <a:t>Ce que le projet prouve et ce qu’il reste à faire</a:t>
             </a:r>
-            <a:endParaRPr b="0" lang="fr-FR" sz="1050" spc="-1" strike="noStrike">
-              <a:solidFill>
-                <a:srgbClr val="000000"/>
-              </a:solidFill>
-              <a:latin typeface="Arial"/>
-            </a:endParaRPr>
-          </a:p>
-        </p:txBody>
-      </p:sp>
-      <p:sp>
-        <p:nvSpPr>
-          <p:cNvPr id="128" name="Shape 2"/>
+            <a:endParaRPr b="0" lang="en-US" sz="1050" spc="-1" strike="noStrike">
+              <a:solidFill>
+                <a:srgbClr val="000000"/>
+              </a:solidFill>
+              <a:latin typeface="Arial"/>
+            </a:endParaRPr>
+          </a:p>
+        </p:txBody>
+      </p:sp>
+      <p:sp>
+        <p:nvSpPr>
+          <p:cNvPr id="133" name="Shape 2"/>
           <p:cNvSpPr/>
           <p:nvPr/>
         </p:nvSpPr>
         <p:spPr>
           <a:xfrm>
             <a:off x="731520" y="1417320"/>
-            <a:ext cx="3474360" cy="1828440"/>
+            <a:ext cx="3474000" cy="1828080"/>
           </a:xfrm>
           <a:prstGeom prst="roundRect">
             <a:avLst>
@@ -13274,7 +13906,7 @@
             <a:round/>
           </a:ln>
           <a:effectLst>
-            <a:outerShdw algn="bl" blurRad="12600" dir="2700000" dist="6109" kx="0" ky="0" rotWithShape="0" sx="100000" sy="100000">
+            <a:outerShdw algn="bl" blurRad="12600" dir="2700000" dist="6109" rotWithShape="0">
               <a:srgbClr val="000000">
                 <a:alpha val="10000"/>
               </a:srgbClr>
@@ -13292,6 +13924,11 @@
             <a:noAutofit/>
           </a:bodyPr>
           <a:p>
+            <a:pPr defTabSz="914400">
+              <a:lnSpc>
+                <a:spcPct val="100000"/>
+              </a:lnSpc>
+            </a:pPr>
             <a:endParaRPr b="0" lang="fr-FR" sz="1800" spc="-1" strike="noStrike">
               <a:solidFill>
                 <a:srgbClr val="000000"/>
@@ -13303,14 +13940,14 @@
       </p:sp>
       <p:sp>
         <p:nvSpPr>
-          <p:cNvPr id="129" name="Text 3"/>
+          <p:cNvPr id="134" name="Text 3"/>
           <p:cNvSpPr/>
           <p:nvPr/>
         </p:nvSpPr>
         <p:spPr>
           <a:xfrm>
             <a:off x="868680" y="1554480"/>
-            <a:ext cx="3200040" cy="219240"/>
+            <a:ext cx="3199680" cy="218880"/>
           </a:xfrm>
           <a:prstGeom prst="rect">
             <a:avLst/>
@@ -13348,25 +13985,25 @@
               </a:rPr>
               <a:t>Bilan</a:t>
             </a:r>
-            <a:endParaRPr b="0" lang="fr-FR" sz="1400" spc="-1" strike="noStrike">
-              <a:solidFill>
-                <a:srgbClr val="000000"/>
-              </a:solidFill>
-              <a:latin typeface="Arial"/>
-            </a:endParaRPr>
-          </a:p>
-        </p:txBody>
-      </p:sp>
-      <p:sp>
-        <p:nvSpPr>
-          <p:cNvPr id="130" name="Text 4"/>
+            <a:endParaRPr b="0" lang="en-US" sz="1400" spc="-1" strike="noStrike">
+              <a:solidFill>
+                <a:srgbClr val="000000"/>
+              </a:solidFill>
+              <a:latin typeface="Arial"/>
+            </a:endParaRPr>
+          </a:p>
+        </p:txBody>
+      </p:sp>
+      <p:sp>
+        <p:nvSpPr>
+          <p:cNvPr id="135" name="Text 4"/>
           <p:cNvSpPr/>
           <p:nvPr/>
         </p:nvSpPr>
         <p:spPr>
           <a:xfrm>
             <a:off x="868680" y="1828800"/>
-            <a:ext cx="3200040" cy="1298160"/>
+            <a:ext cx="3199680" cy="1297800"/>
           </a:xfrm>
           <a:prstGeom prst="rect">
             <a:avLst/>
@@ -13404,25 +14041,25 @@
               </a:rPr>
               <a:t>Le cœur fonctionnel demandé a été réalisé : rooms, messages persistants, lecture d’historique, robustesse après redémarrage et déploiement embarqué.</a:t>
             </a:r>
-            <a:endParaRPr b="0" lang="fr-FR" sz="1150" spc="-1" strike="noStrike">
-              <a:solidFill>
-                <a:srgbClr val="000000"/>
-              </a:solidFill>
-              <a:latin typeface="Arial"/>
-            </a:endParaRPr>
-          </a:p>
-        </p:txBody>
-      </p:sp>
-      <p:sp>
-        <p:nvSpPr>
-          <p:cNvPr id="131" name="Shape 5"/>
+            <a:endParaRPr b="0" lang="en-US" sz="1150" spc="-1" strike="noStrike">
+              <a:solidFill>
+                <a:srgbClr val="000000"/>
+              </a:solidFill>
+              <a:latin typeface="Arial"/>
+            </a:endParaRPr>
+          </a:p>
+        </p:txBody>
+      </p:sp>
+      <p:sp>
+        <p:nvSpPr>
+          <p:cNvPr id="136" name="Shape 5"/>
           <p:cNvSpPr/>
           <p:nvPr/>
         </p:nvSpPr>
         <p:spPr>
           <a:xfrm>
-            <a:off x="665640" y="3703320"/>
-            <a:ext cx="3474360" cy="1828440"/>
+            <a:off x="731520" y="3612240"/>
+            <a:ext cx="3474000" cy="1828080"/>
           </a:xfrm>
           <a:prstGeom prst="roundRect">
             <a:avLst>
@@ -13439,7 +14076,7 @@
             <a:round/>
           </a:ln>
           <a:effectLst>
-            <a:outerShdw algn="bl" blurRad="12600" dir="2700000" dist="6109" kx="0" ky="0" rotWithShape="0" sx="100000" sy="100000">
+            <a:outerShdw algn="bl" blurRad="12600" dir="2700000" dist="6109" rotWithShape="0">
               <a:srgbClr val="000000">
                 <a:alpha val="10000"/>
               </a:srgbClr>
@@ -13457,6 +14094,11 @@
             <a:noAutofit/>
           </a:bodyPr>
           <a:p>
+            <a:pPr defTabSz="914400">
+              <a:lnSpc>
+                <a:spcPct val="100000"/>
+              </a:lnSpc>
+            </a:pPr>
             <a:endParaRPr b="0" lang="fr-FR" sz="1800" spc="-1" strike="noStrike">
               <a:solidFill>
                 <a:srgbClr val="000000"/>
@@ -13468,14 +14110,14 @@
       </p:sp>
       <p:sp>
         <p:nvSpPr>
-          <p:cNvPr id="132" name="Text 6"/>
+          <p:cNvPr id="137" name="Text 6"/>
           <p:cNvSpPr/>
           <p:nvPr/>
         </p:nvSpPr>
         <p:spPr>
           <a:xfrm>
-            <a:off x="868680" y="3703320"/>
-            <a:ext cx="3200040" cy="219240"/>
+            <a:off x="868680" y="3832920"/>
+            <a:ext cx="3199680" cy="218880"/>
           </a:xfrm>
           <a:prstGeom prst="rect">
             <a:avLst/>
@@ -13513,25 +14155,25 @@
               </a:rPr>
               <a:t>Apport</a:t>
             </a:r>
-            <a:endParaRPr b="0" lang="fr-FR" sz="1400" spc="-1" strike="noStrike">
-              <a:solidFill>
-                <a:srgbClr val="000000"/>
-              </a:solidFill>
-              <a:latin typeface="Arial"/>
-            </a:endParaRPr>
-          </a:p>
-        </p:txBody>
-      </p:sp>
-      <p:sp>
-        <p:nvSpPr>
-          <p:cNvPr id="133" name="Text 7"/>
+            <a:endParaRPr b="0" lang="en-US" sz="1400" spc="-1" strike="noStrike">
+              <a:solidFill>
+                <a:srgbClr val="000000"/>
+              </a:solidFill>
+              <a:latin typeface="Arial"/>
+            </a:endParaRPr>
+          </a:p>
+        </p:txBody>
+      </p:sp>
+      <p:sp>
+        <p:nvSpPr>
+          <p:cNvPr id="138" name="Text 7"/>
           <p:cNvSpPr/>
           <p:nvPr/>
         </p:nvSpPr>
         <p:spPr>
           <a:xfrm>
-            <a:off x="868680" y="3977640"/>
-            <a:ext cx="3200040" cy="1298160"/>
+            <a:off x="868680" y="4177800"/>
+            <a:ext cx="3199680" cy="1353600"/>
           </a:xfrm>
           <a:prstGeom prst="rect">
             <a:avLst/>
@@ -13569,25 +14211,25 @@
               </a:rPr>
               <a:t>Le Room Server apporte une organisation structurée des échanges au-dessus d’un réseau initialement orienté diffusion simple.</a:t>
             </a:r>
-            <a:endParaRPr b="0" lang="fr-FR" sz="1150" spc="-1" strike="noStrike">
-              <a:solidFill>
-                <a:srgbClr val="000000"/>
-              </a:solidFill>
-              <a:latin typeface="Arial"/>
-            </a:endParaRPr>
-          </a:p>
-        </p:txBody>
-      </p:sp>
-      <p:sp>
-        <p:nvSpPr>
-          <p:cNvPr id="134" name="Shape 8"/>
+            <a:endParaRPr b="0" lang="en-US" sz="1150" spc="-1" strike="noStrike">
+              <a:solidFill>
+                <a:srgbClr val="000000"/>
+              </a:solidFill>
+              <a:latin typeface="Arial"/>
+            </a:endParaRPr>
+          </a:p>
+        </p:txBody>
+      </p:sp>
+      <p:sp>
+        <p:nvSpPr>
+          <p:cNvPr id="139" name="Shape 8"/>
           <p:cNvSpPr/>
           <p:nvPr/>
         </p:nvSpPr>
         <p:spPr>
           <a:xfrm>
             <a:off x="4572000" y="1417320"/>
-            <a:ext cx="6766200" cy="3977280"/>
+            <a:ext cx="6765840" cy="3976920"/>
           </a:xfrm>
           <a:prstGeom prst="roundRect">
             <a:avLst>
@@ -13615,6 +14257,11 @@
             <a:noAutofit/>
           </a:bodyPr>
           <a:p>
+            <a:pPr defTabSz="914400">
+              <a:lnSpc>
+                <a:spcPct val="100000"/>
+              </a:lnSpc>
+            </a:pPr>
             <a:endParaRPr b="0" lang="fr-FR" sz="1800" spc="-1" strike="noStrike">
               <a:solidFill>
                 <a:srgbClr val="000000"/>
@@ -13626,14 +14273,14 @@
       </p:sp>
       <p:sp>
         <p:nvSpPr>
-          <p:cNvPr id="135" name="Text 9"/>
+          <p:cNvPr id="140" name="Text 9"/>
           <p:cNvSpPr/>
           <p:nvPr/>
         </p:nvSpPr>
         <p:spPr>
           <a:xfrm>
             <a:off x="4800600" y="1719000"/>
-            <a:ext cx="2559960" cy="273960"/>
+            <a:ext cx="4033080" cy="109440"/>
           </a:xfrm>
           <a:prstGeom prst="rect">
             <a:avLst/>
@@ -13671,25 +14318,25 @@
               </a:rPr>
               <a:t>Perspectives d’évolution</a:t>
             </a:r>
-            <a:endParaRPr b="0" lang="fr-FR" sz="1900" spc="-1" strike="noStrike">
-              <a:solidFill>
-                <a:srgbClr val="000000"/>
-              </a:solidFill>
-              <a:latin typeface="Arial"/>
-            </a:endParaRPr>
-          </a:p>
-        </p:txBody>
-      </p:sp>
-      <p:sp>
-        <p:nvSpPr>
-          <p:cNvPr id="136" name="Text 10"/>
+            <a:endParaRPr b="0" lang="en-US" sz="1900" spc="-1" strike="noStrike">
+              <a:solidFill>
+                <a:srgbClr val="000000"/>
+              </a:solidFill>
+              <a:latin typeface="Arial"/>
+            </a:endParaRPr>
+          </a:p>
+        </p:txBody>
+      </p:sp>
+      <p:sp>
+        <p:nvSpPr>
+          <p:cNvPr id="141" name="Text 10"/>
           <p:cNvSpPr/>
           <p:nvPr/>
         </p:nvSpPr>
         <p:spPr>
           <a:xfrm>
             <a:off x="4800600" y="2057400"/>
-            <a:ext cx="6034680" cy="2331360"/>
+            <a:ext cx="6034320" cy="2331000"/>
           </a:xfrm>
           <a:prstGeom prst="rect">
             <a:avLst/>
@@ -13710,6 +14357,19 @@
             <a:noAutofit/>
           </a:bodyPr>
           <a:p>
+            <a:pPr defTabSz="914400">
+              <a:lnSpc>
+                <a:spcPct val="100000"/>
+              </a:lnSpc>
+            </a:pPr>
+            <a:endParaRPr b="0" lang="en-US" sz="1700" spc="-1" strike="noStrike">
+              <a:solidFill>
+                <a:srgbClr val="000000"/>
+              </a:solidFill>
+              <a:latin typeface="Arial"/>
+            </a:endParaRPr>
+          </a:p>
+          <a:p>
             <a:pPr marL="177840" indent="-177840" defTabSz="914400">
               <a:lnSpc>
                 <a:spcPct val="100000"/>
@@ -13720,7 +14380,16 @@
               <a:buFont typeface="Symbol" charset="2"/>
               <a:buChar char=""/>
             </a:pPr>
-            <a:endParaRPr b="0" lang="fr-FR" sz="1700" spc="-1" strike="noStrike">
+            <a:r>
+              <a:rPr b="0" lang="en-US" sz="1700" spc="-1" strike="noStrike">
+                <a:solidFill>
+                  <a:srgbClr val="1d2433"/>
+                </a:solidFill>
+                <a:latin typeface="Aptos"/>
+              </a:rPr>
+              <a:t>Gestion des droits et rooms privées.</a:t>
+            </a:r>
+            <a:endParaRPr b="0" lang="en-US" sz="1700" spc="-1" strike="noStrike">
               <a:solidFill>
                 <a:srgbClr val="000000"/>
               </a:solidFill>
@@ -13745,9 +14414,9 @@
                 </a:solidFill>
                 <a:latin typeface="Aptos"/>
               </a:rPr>
-              <a:t>Gestion des droits et rooms privées.</a:t>
+              <a:t>Interface web locale hébergée sur le Raspberry Pi.</a:t>
             </a:r>
-            <a:endParaRPr b="0" lang="fr-FR" sz="1700" spc="-1" strike="noStrike">
+            <a:endParaRPr b="0" lang="en-US" sz="1700" spc="-1" strike="noStrike">
               <a:solidFill>
                 <a:srgbClr val="000000"/>
               </a:solidFill>
@@ -13772,9 +14441,9 @@
                 </a:solidFill>
                 <a:latin typeface="Aptos"/>
               </a:rPr>
-              <a:t>Interface web locale hébergée sur le Raspberry Pi.</a:t>
+              <a:t>Synchronisation entre plusieurs Room Servers.</a:t>
             </a:r>
-            <a:endParaRPr b="0" lang="fr-FR" sz="1700" spc="-1" strike="noStrike">
+            <a:endParaRPr b="0" lang="en-US" sz="1700" spc="-1" strike="noStrike">
               <a:solidFill>
                 <a:srgbClr val="000000"/>
               </a:solidFill>
@@ -13799,9 +14468,9 @@
                 </a:solidFill>
                 <a:latin typeface="Aptos"/>
               </a:rPr>
-              <a:t>Synchronisation entre plusieurs Room Servers.</a:t>
+              <a:t>Tableau de bord de supervision et statistiques d’usage.</a:t>
             </a:r>
-            <a:endParaRPr b="0" lang="fr-FR" sz="1700" spc="-1" strike="noStrike">
+            <a:endParaRPr b="0" lang="en-US" sz="1700" spc="-1" strike="noStrike">
               <a:solidFill>
                 <a:srgbClr val="000000"/>
               </a:solidFill>
@@ -13826,54 +14495,27 @@
                 </a:solidFill>
                 <a:latin typeface="Aptos"/>
               </a:rPr>
-              <a:t>Tableau de bord de supervision et statistiques d’usage.</a:t>
-            </a:r>
-            <a:endParaRPr b="0" lang="fr-FR" sz="1700" spc="-1" strike="noStrike">
-              <a:solidFill>
-                <a:srgbClr val="000000"/>
-              </a:solidFill>
-              <a:latin typeface="Arial"/>
-            </a:endParaRPr>
-          </a:p>
-          <a:p>
-            <a:pPr marL="177840" indent="-177840" defTabSz="914400">
-              <a:lnSpc>
-                <a:spcPct val="100000"/>
-              </a:lnSpc>
-              <a:buClr>
-                <a:srgbClr val="1d2433"/>
-              </a:buClr>
-              <a:buFont typeface="Symbol" charset="2"/>
-              <a:buChar char=""/>
-            </a:pPr>
-            <a:r>
-              <a:rPr b="0" lang="en-US" sz="1700" spc="-1" strike="noStrike">
-                <a:solidFill>
-                  <a:srgbClr val="1d2433"/>
-                </a:solidFill>
-                <a:latin typeface="Aptos"/>
-              </a:rPr>
               <a:t>Mesures quantitatives plus poussées sous charge contrôlée.</a:t>
             </a:r>
-            <a:endParaRPr b="0" lang="fr-FR" sz="1700" spc="-1" strike="noStrike">
-              <a:solidFill>
-                <a:srgbClr val="000000"/>
-              </a:solidFill>
-              <a:latin typeface="Arial"/>
-            </a:endParaRPr>
-          </a:p>
-        </p:txBody>
-      </p:sp>
-      <p:sp>
-        <p:nvSpPr>
-          <p:cNvPr id="137" name="Text 11"/>
+            <a:endParaRPr b="0" lang="en-US" sz="1700" spc="-1" strike="noStrike">
+              <a:solidFill>
+                <a:srgbClr val="000000"/>
+              </a:solidFill>
+              <a:latin typeface="Arial"/>
+            </a:endParaRPr>
+          </a:p>
+        </p:txBody>
+      </p:sp>
+      <p:sp>
+        <p:nvSpPr>
+          <p:cNvPr id="142" name="Text 11"/>
           <p:cNvSpPr/>
           <p:nvPr/>
         </p:nvSpPr>
         <p:spPr>
           <a:xfrm>
             <a:off x="4800600" y="4709160"/>
-            <a:ext cx="3200040" cy="319680"/>
+            <a:ext cx="4985640" cy="45360"/>
           </a:xfrm>
           <a:prstGeom prst="rect">
             <a:avLst/>
@@ -13911,25 +14553,25 @@
               </a:rPr>
               <a:t>Merci pour votre attention</a:t>
             </a:r>
-            <a:endParaRPr b="0" lang="fr-FR" sz="2400" spc="-1" strike="noStrike">
-              <a:solidFill>
-                <a:srgbClr val="000000"/>
-              </a:solidFill>
-              <a:latin typeface="Arial"/>
-            </a:endParaRPr>
-          </a:p>
-        </p:txBody>
-      </p:sp>
-      <p:sp>
-        <p:nvSpPr>
-          <p:cNvPr id="138" name="Text 12"/>
+            <a:endParaRPr b="0" lang="en-US" sz="2400" spc="-1" strike="noStrike">
+              <a:solidFill>
+                <a:srgbClr val="000000"/>
+              </a:solidFill>
+              <a:latin typeface="Arial"/>
+            </a:endParaRPr>
+          </a:p>
+        </p:txBody>
+      </p:sp>
+      <p:sp>
+        <p:nvSpPr>
+          <p:cNvPr id="143" name="Text 12"/>
           <p:cNvSpPr/>
           <p:nvPr/>
         </p:nvSpPr>
         <p:spPr>
           <a:xfrm>
             <a:off x="4800600" y="5074920"/>
-            <a:ext cx="1828440" cy="319680"/>
+            <a:ext cx="1828080" cy="319320"/>
           </a:xfrm>
           <a:prstGeom prst="rect">
             <a:avLst/>
@@ -13969,7 +14611,7 @@
       </p:sp>
       <p:sp>
         <p:nvSpPr>
-          <p:cNvPr id="139" name="PlaceHolder 1"/>
+          <p:cNvPr id="144" name="PlaceHolder 1"/>
           <p:cNvSpPr>
             <a:spLocks noGrp="1"/>
           </p:cNvSpPr>
@@ -13980,7 +14622,7 @@
         <p:spPr>
           <a:xfrm>
             <a:off x="11750040" y="6583680"/>
-            <a:ext cx="228240" cy="182520"/>
+            <a:ext cx="227880" cy="182160"/>
           </a:xfrm>
           <a:prstGeom prst="rect">
             <a:avLst/>
@@ -14000,6 +14642,9 @@
                 <a:spcPct val="100000"/>
               </a:lnSpc>
               <a:buNone/>
+              <a:tabLst>
+                <a:tab algn="l" pos="0"/>
+              </a:tabLst>
               <a:defRPr b="0" lang="en-US" sz="1000" spc="-1" strike="noStrike">
                 <a:solidFill>
                   <a:srgbClr val="ffffff"/>
@@ -14014,17 +14659,20 @@
                 <a:spcPct val="100000"/>
               </a:lnSpc>
               <a:buNone/>
-            </a:pPr>
-            <a:fld id="{D5E96975-8886-45DA-AC7C-BE3A3F8862C4}" type="slidenum">
+              <a:tabLst>
+                <a:tab algn="l" pos="0"/>
+              </a:tabLst>
+            </a:pPr>
+            <a:fld id="{7273E702-7445-4A36-AEA8-BC9CA26F1E75}" type="slidenum">
               <a:rPr b="0" lang="en-US" sz="1000" spc="-1" strike="noStrike">
                 <a:solidFill>
                   <a:srgbClr val="ffffff"/>
                 </a:solidFill>
                 <a:latin typeface="Aptos"/>
               </a:rPr>
-              <a:t>&lt;numéro&gt;</a:t>
+              <a:t>&lt;number&gt;</a:t>
             </a:fld>
-            <a:endParaRPr b="0" lang="fr-FR" sz="1000" spc="-1" strike="noStrike">
+            <a:endParaRPr b="0" lang="en-US" sz="1000" spc="-1" strike="noStrike">
               <a:solidFill>
                 <a:srgbClr val="000000"/>
               </a:solidFill>
@@ -14033,6 +14681,35 @@
           </a:p>
         </p:txBody>
       </p:sp>
+      <p:pic>
+        <p:nvPicPr>
+          <p:cNvPr id="145" name="Graphic 1" descr="Winking face with solid fill with solid fill"/>
+          <p:cNvPicPr/>
+          <p:nvPr/>
+        </p:nvPicPr>
+        <p:blipFill>
+          <a:blip r:embed="rId1">
+            <a:extLst>
+              <a:ext uri="{96DAC541-7B7A-43D3-8B79-37D633B846F1}">
+                <asvg:svgBlip xmlns:asvg="http://schemas.microsoft.com/office/drawing/2016/SVG/main" r:embed="rId2"/>
+              </a:ext>
+            </a:extLst>
+          </a:blip>
+          <a:stretch/>
+        </p:blipFill>
+        <p:spPr>
+          <a:xfrm>
+            <a:off x="8915400" y="4407480"/>
+            <a:ext cx="621720" cy="621720"/>
+          </a:xfrm>
+          <a:prstGeom prst="rect">
+            <a:avLst/>
+          </a:prstGeom>
+          <a:ln w="0">
+            <a:noFill/>
+          </a:ln>
+        </p:spPr>
+      </p:pic>
     </p:spTree>
   </p:cSld>
   <mc:AlternateContent>
